--- a/02-PROFESORADO/03-PRESENTACIONES/POR-SESION/h0/S203-microprueba-y-equipos-provisionales-de-3-o-4-presentacion.pptx
+++ b/02-PROFESORADO/03-PRESENTACIONES/POR-SESION/h0/S203-microprueba-y-equipos-provisionales-de-3-o-4-presentacion.pptx
@@ -11,6 +11,14 @@
     <p:sldId id="259" r:id="rId10"/>
     <p:sldId id="260" r:id="rId11"/>
     <p:sldId id="261" r:id="rId12"/>
+    <p:sldId id="262" r:id="rId13"/>
+    <p:sldId id="263" r:id="rId14"/>
+    <p:sldId id="264" r:id="rId15"/>
+    <p:sldId id="265" r:id="rId16"/>
+    <p:sldId id="266" r:id="rId17"/>
+    <p:sldId id="267" r:id="rId18"/>
+    <p:sldId id="268" r:id="rId19"/>
+    <p:sldId id="269" r:id="rId20"/>
   </p:sldIdLst>
   <p:sldSz cx="12191695" cy="6858000" type="screen4x3"/>
   <p:notesSz cx="6858000" cy="9144000"/>
@@ -3145,7 +3153,7 @@
         <p:spPr>
           <a:xfrm>
             <a:off x="0" y="0"/>
-            <a:ext cx="228600" cy="6858000"/>
+            <a:ext cx="256032" cy="6858000"/>
           </a:xfrm>
           <a:prstGeom prst="rect">
             <a:avLst/>
@@ -3187,10 +3195,332 @@
         </p:nvSpPr>
         <p:spPr>
           <a:xfrm>
-            <a:off x="640080" y="566928"/>
-            <a:ext cx="1828800" cy="566928"/>
+            <a:off x="658368" y="566928"/>
+            <a:ext cx="1874519" cy="566928"/>
           </a:xfrm>
           <a:prstGeom prst="roundRect">
+            <a:avLst/>
+          </a:prstGeom>
+          <a:solidFill>
+            <a:srgbClr val="CC4F3E"/>
+          </a:solidFill>
+          <a:ln>
+            <a:solidFill>
+              <a:srgbClr val="CC4F3E"/>
+            </a:solidFill>
+          </a:ln>
+        </p:spPr>
+        <p:style>
+          <a:lnRef idx="1">
+            <a:schemeClr val="accent1"/>
+          </a:lnRef>
+          <a:fillRef idx="3">
+            <a:schemeClr val="accent1"/>
+          </a:fillRef>
+          <a:effectRef idx="2">
+            <a:schemeClr val="accent1"/>
+          </a:effectRef>
+          <a:fontRef idx="minor">
+            <a:schemeClr val="lt1"/>
+          </a:fontRef>
+        </p:style>
+        <p:txBody>
+          <a:bodyPr rtlCol="0" anchor="ctr"/>
+          <a:lstStyle/>
+          <a:p>
+            <a:pPr algn="ctr"/>
+          </a:p>
+        </p:txBody>
+      </p:sp>
+      <p:sp>
+        <p:nvSpPr>
+          <p:cNvPr id="5" name="TextBox 4"/>
+          <p:cNvSpPr txBox="1"/>
+          <p:nvPr/>
+        </p:nvSpPr>
+        <p:spPr>
+          <a:xfrm>
+            <a:off x="731520" y="685800"/>
+            <a:ext cx="1719072" cy="228600"/>
+          </a:xfrm>
+          <a:prstGeom prst="rect">
+            <a:avLst/>
+          </a:prstGeom>
+          <a:noFill/>
+        </p:spPr>
+        <p:txBody>
+          <a:bodyPr wrap="square" lIns="45720" rIns="45720" tIns="36576" bIns="36576" anchor="t">
+            <a:spAutoFit/>
+          </a:bodyPr>
+          <a:lstStyle/>
+          <a:p>
+            <a:pPr algn="ctr">
+              <a:defRPr sz="1400" b="1">
+                <a:solidFill>
+                  <a:srgbClr val="FFFFFF"/>
+                </a:solidFill>
+                <a:latin typeface="Aptos"/>
+              </a:defRPr>
+            </a:pPr>
+            <a:r>
+              <a:t>SESIÓN 203</a:t>
+            </a:r>
+          </a:p>
+        </p:txBody>
+      </p:sp>
+      <p:sp>
+        <p:nvSpPr>
+          <p:cNvPr id="6" name="TextBox 5"/>
+          <p:cNvSpPr txBox="1"/>
+          <p:nvPr/>
+        </p:nvSpPr>
+        <p:spPr>
+          <a:xfrm>
+            <a:off x="685800" y="1481328"/>
+            <a:ext cx="10789920" cy="1691640"/>
+          </a:xfrm>
+          <a:prstGeom prst="rect">
+            <a:avLst/>
+          </a:prstGeom>
+          <a:noFill/>
+        </p:spPr>
+        <p:txBody>
+          <a:bodyPr wrap="square" lIns="45720" rIns="45720" tIns="36576" bIns="36576" anchor="t">
+            <a:spAutoFit/>
+          </a:bodyPr>
+          <a:lstStyle/>
+          <a:p>
+            <a:pPr algn="l">
+              <a:defRPr sz="3200" b="1">
+                <a:solidFill>
+                  <a:srgbClr val="FFFFFF"/>
+                </a:solidFill>
+                <a:latin typeface="Aptos"/>
+              </a:defRPr>
+            </a:pPr>
+            <a:r>
+              <a:t>Composición HADA, equipos provisionales y funciones para la torre</a:t>
+            </a:r>
+          </a:p>
+        </p:txBody>
+      </p:sp>
+      <p:sp>
+        <p:nvSpPr>
+          <p:cNvPr id="7" name="TextBox 6"/>
+          <p:cNvSpPr txBox="1"/>
+          <p:nvPr/>
+        </p:nvSpPr>
+        <p:spPr>
+          <a:xfrm>
+            <a:off x="713232" y="3703320"/>
+            <a:ext cx="10424160" cy="411480"/>
+          </a:xfrm>
+          <a:prstGeom prst="rect">
+            <a:avLst/>
+          </a:prstGeom>
+          <a:noFill/>
+        </p:spPr>
+        <p:txBody>
+          <a:bodyPr wrap="square" lIns="45720" rIns="45720" tIns="36576" bIns="36576" anchor="t">
+            <a:spAutoFit/>
+          </a:bodyPr>
+          <a:lstStyle/>
+          <a:p>
+            <a:pPr algn="l">
+              <a:defRPr sz="1900" b="1">
+                <a:solidFill>
+                  <a:srgbClr val="BEC8D6"/>
+                </a:solidFill>
+                <a:latin typeface="Aptos"/>
+              </a:defRPr>
+            </a:pPr>
+            <a:r>
+              <a:t>H0 — Formación y prueba de equipos Scrum mediante la torre de papel · 45 minutos</a:t>
+            </a:r>
+          </a:p>
+        </p:txBody>
+      </p:sp>
+      <p:sp>
+        <p:nvSpPr>
+          <p:cNvPr id="8" name="TextBox 7"/>
+          <p:cNvSpPr txBox="1"/>
+          <p:nvPr/>
+        </p:nvSpPr>
+        <p:spPr>
+          <a:xfrm>
+            <a:off x="713232" y="4315968"/>
+            <a:ext cx="10241280" cy="502920"/>
+          </a:xfrm>
+          <a:prstGeom prst="rect">
+            <a:avLst/>
+          </a:prstGeom>
+          <a:noFill/>
+        </p:spPr>
+        <p:txBody>
+          <a:bodyPr wrap="square" lIns="45720" rIns="45720" tIns="36576" bIns="36576" anchor="t">
+            <a:spAutoFit/>
+          </a:bodyPr>
+          <a:lstStyle/>
+          <a:p>
+            <a:pPr algn="l">
+              <a:defRPr sz="1900" b="0">
+                <a:solidFill>
+                  <a:srgbClr val="FFFFFF"/>
+                </a:solidFill>
+                <a:latin typeface="Aptos"/>
+              </a:defRPr>
+            </a:pPr>
+            <a:r>
+              <a:t>Fase HEXA: Fase 0 — Equipos + Idear — proponer soluciones + Planificar — organizar el trabajo</a:t>
+            </a:r>
+          </a:p>
+        </p:txBody>
+      </p:sp>
+      <p:sp>
+        <p:nvSpPr>
+          <p:cNvPr id="9" name="TextBox 8"/>
+          <p:cNvSpPr txBox="1"/>
+          <p:nvPr/>
+        </p:nvSpPr>
+        <p:spPr>
+          <a:xfrm>
+            <a:off x="713232" y="4965192"/>
+            <a:ext cx="10241280" cy="594360"/>
+          </a:xfrm>
+          <a:prstGeom prst="rect">
+            <a:avLst/>
+          </a:prstGeom>
+          <a:noFill/>
+        </p:spPr>
+        <p:txBody>
+          <a:bodyPr wrap="square" lIns="45720" rIns="45720" tIns="36576" bIns="36576" anchor="t">
+            <a:spAutoFit/>
+          </a:bodyPr>
+          <a:lstStyle/>
+          <a:p>
+            <a:pPr algn="l">
+              <a:defRPr sz="1700" b="0">
+                <a:solidFill>
+                  <a:srgbClr val="D2D9E4"/>
+                </a:solidFill>
+                <a:latin typeface="Aptos"/>
+              </a:defRPr>
+            </a:pPr>
+            <a:r>
+              <a:t>Equipos provisionales de tres o cuatro preparados por el docente</a:t>
+            </a:r>
+          </a:p>
+        </p:txBody>
+      </p:sp>
+      <p:sp>
+        <p:nvSpPr>
+          <p:cNvPr id="10" name="TextBox 9"/>
+          <p:cNvSpPr txBox="1"/>
+          <p:nvPr/>
+        </p:nvSpPr>
+        <p:spPr>
+          <a:xfrm>
+            <a:off x="713232" y="6272784"/>
+            <a:ext cx="10607040" cy="201168"/>
+          </a:xfrm>
+          <a:prstGeom prst="rect">
+            <a:avLst/>
+          </a:prstGeom>
+          <a:noFill/>
+        </p:spPr>
+        <p:txBody>
+          <a:bodyPr wrap="square" lIns="45720" rIns="45720" tIns="36576" bIns="36576" anchor="t">
+            <a:spAutoFit/>
+          </a:bodyPr>
+          <a:lstStyle/>
+          <a:p>
+            <a:pPr algn="l">
+              <a:defRPr sz="1000" b="1">
+                <a:solidFill>
+                  <a:srgbClr val="A0AAB9"/>
+                </a:solidFill>
+                <a:latin typeface="Aptos"/>
+              </a:defRPr>
+            </a:pPr>
+            <a:r>
+              <a:t>MINIJARVIS · PROGRAMACIÓN + ENTORNOS DE DESARROLLO</a:t>
+            </a:r>
+          </a:p>
+        </p:txBody>
+      </p:sp>
+    </p:spTree>
+  </p:cSld>
+  <p:clrMapOvr>
+    <a:masterClrMapping/>
+  </p:clrMapOvr>
+</p:sld>
+</file>
+
+<file path=ppt/slides/slide10.xml><?xml version="1.0" encoding="utf-8"?>
+<p:sld xmlns:a="http://schemas.openxmlformats.org/drawingml/2006/main" xmlns:p="http://schemas.openxmlformats.org/presentationml/2006/main" xmlns:r="http://schemas.openxmlformats.org/officeDocument/2006/relationships">
+  <p:cSld>
+    <p:spTree>
+      <p:nvGrpSpPr>
+        <p:cNvPr id="1" name=""/>
+        <p:cNvGrpSpPr/>
+        <p:nvPr/>
+      </p:nvGrpSpPr>
+      <p:grpSpPr/>
+      <p:sp>
+        <p:nvSpPr>
+          <p:cNvPr id="2" name="Rectangle 1"/>
+          <p:cNvSpPr/>
+          <p:nvPr/>
+        </p:nvSpPr>
+        <p:spPr>
+          <a:xfrm>
+            <a:off x="0" y="0"/>
+            <a:ext cx="12191695" cy="6858000"/>
+          </a:xfrm>
+          <a:prstGeom prst="rect">
+            <a:avLst/>
+          </a:prstGeom>
+          <a:solidFill>
+            <a:srgbClr val="F9F7F2"/>
+          </a:solidFill>
+          <a:ln>
+            <a:noFill/>
+          </a:ln>
+        </p:spPr>
+        <p:style>
+          <a:lnRef idx="1">
+            <a:schemeClr val="accent1"/>
+          </a:lnRef>
+          <a:fillRef idx="3">
+            <a:schemeClr val="accent1"/>
+          </a:fillRef>
+          <a:effectRef idx="2">
+            <a:schemeClr val="accent1"/>
+          </a:effectRef>
+          <a:fontRef idx="minor">
+            <a:schemeClr val="lt1"/>
+          </a:fontRef>
+        </p:style>
+        <p:txBody>
+          <a:bodyPr rtlCol="0" anchor="ctr"/>
+          <a:lstStyle/>
+          <a:p>
+            <a:pPr algn="ctr"/>
+          </a:p>
+        </p:txBody>
+      </p:sp>
+      <p:sp>
+        <p:nvSpPr>
+          <p:cNvPr id="3" name="Rectangle 2"/>
+          <p:cNvSpPr/>
+          <p:nvPr/>
+        </p:nvSpPr>
+        <p:spPr>
+          <a:xfrm>
+            <a:off x="0" y="0"/>
+            <a:ext cx="164592" cy="6858000"/>
+          </a:xfrm>
+          <a:prstGeom prst="rect">
             <a:avLst/>
           </a:prstGeom>
           <a:solidFill>
@@ -3224,166 +3554,22 @@
       </p:sp>
       <p:sp>
         <p:nvSpPr>
-          <p:cNvPr id="5" name="TextBox 4"/>
-          <p:cNvSpPr txBox="1"/>
-          <p:nvPr/>
-        </p:nvSpPr>
-        <p:spPr>
-          <a:xfrm>
-            <a:off x="713232" y="676656"/>
-            <a:ext cx="1682496" cy="256032"/>
-          </a:xfrm>
-          <a:prstGeom prst="rect">
-            <a:avLst/>
-          </a:prstGeom>
-          <a:noFill/>
-        </p:spPr>
-        <p:txBody>
-          <a:bodyPr wrap="square" lIns="36576" rIns="36576" tIns="27432" bIns="27432">
-            <a:spAutoFit/>
-          </a:bodyPr>
-          <a:lstStyle/>
-          <a:p>
-            <a:pPr algn="ctr">
-              <a:defRPr sz="1400" b="1">
-                <a:solidFill>
-                  <a:srgbClr val="FFFFFF"/>
-                </a:solidFill>
-                <a:latin typeface="Aptos"/>
-              </a:defRPr>
-            </a:pPr>
-            <a:r>
-              <a:t>SESIÓN 203</a:t>
-            </a:r>
-          </a:p>
-        </p:txBody>
-      </p:sp>
-      <p:sp>
-        <p:nvSpPr>
-          <p:cNvPr id="6" name="TextBox 5"/>
-          <p:cNvSpPr txBox="1"/>
-          <p:nvPr/>
-        </p:nvSpPr>
-        <p:spPr>
-          <a:xfrm>
-            <a:off x="658368" y="1536192"/>
-            <a:ext cx="10789920" cy="1645920"/>
-          </a:xfrm>
-          <a:prstGeom prst="rect">
-            <a:avLst/>
-          </a:prstGeom>
-          <a:noFill/>
-        </p:spPr>
-        <p:txBody>
-          <a:bodyPr wrap="square" lIns="36576" rIns="36576" tIns="27432" bIns="27432">
-            <a:spAutoFit/>
-          </a:bodyPr>
-          <a:lstStyle/>
-          <a:p>
-            <a:pPr algn="l">
-              <a:defRPr sz="3800" b="1">
-                <a:solidFill>
-                  <a:srgbClr val="FFFFFF"/>
-                </a:solidFill>
-                <a:latin typeface="Aptos"/>
-              </a:defRPr>
-            </a:pPr>
-            <a:r>
-              <a:t>Composición HADA, equipo provisional y funciones para la torre</a:t>
-            </a:r>
-          </a:p>
-        </p:txBody>
-      </p:sp>
-      <p:sp>
-        <p:nvSpPr>
-          <p:cNvPr id="7" name="TextBox 6"/>
-          <p:cNvSpPr txBox="1"/>
-          <p:nvPr/>
-        </p:nvSpPr>
-        <p:spPr>
-          <a:xfrm>
-            <a:off x="685800" y="3822191"/>
-            <a:ext cx="6766560" cy="384048"/>
-          </a:xfrm>
-          <a:prstGeom prst="rect">
-            <a:avLst/>
-          </a:prstGeom>
-          <a:noFill/>
-        </p:spPr>
-        <p:txBody>
-          <a:bodyPr wrap="square" lIns="36576" rIns="36576" tIns="27432" bIns="27432">
-            <a:spAutoFit/>
-          </a:bodyPr>
-          <a:lstStyle/>
-          <a:p>
-            <a:pPr algn="l">
-              <a:defRPr sz="1900" b="1">
-                <a:solidFill>
-                  <a:srgbClr val="BEC8D6"/>
-                </a:solidFill>
-                <a:latin typeface="Aptos"/>
-              </a:defRPr>
-            </a:pPr>
-            <a:r>
-              <a:t>H0  ·  45 minutos</a:t>
-            </a:r>
-          </a:p>
-        </p:txBody>
-      </p:sp>
-      <p:sp>
-        <p:nvSpPr>
-          <p:cNvPr id="8" name="TextBox 7"/>
-          <p:cNvSpPr txBox="1"/>
-          <p:nvPr/>
-        </p:nvSpPr>
-        <p:spPr>
-          <a:xfrm>
-            <a:off x="685800" y="5074920"/>
-            <a:ext cx="10241280" cy="640080"/>
-          </a:xfrm>
-          <a:prstGeom prst="rect">
-            <a:avLst/>
-          </a:prstGeom>
-          <a:noFill/>
-        </p:spPr>
-        <p:txBody>
-          <a:bodyPr wrap="square" lIns="36576" rIns="36576" tIns="27432" bIns="27432">
-            <a:spAutoFit/>
-          </a:bodyPr>
-          <a:lstStyle/>
-          <a:p>
-            <a:pPr algn="l">
-              <a:defRPr sz="2400" b="0">
-                <a:solidFill>
-                  <a:srgbClr val="FFFFFF"/>
-                </a:solidFill>
-                <a:latin typeface="Aptos"/>
-              </a:defRPr>
-            </a:pPr>
-            <a:r>
-              <a:t>Hoy construiremos una evidencia que puedas comprobar y explicar.</a:t>
-            </a:r>
-          </a:p>
-        </p:txBody>
-      </p:sp>
-      <p:sp>
-        <p:nvSpPr>
-          <p:cNvPr id="9" name="TextBox 8"/>
-          <p:cNvSpPr txBox="1"/>
-          <p:nvPr/>
-        </p:nvSpPr>
-        <p:spPr>
-          <a:xfrm>
-            <a:off x="685800" y="6272784"/>
-            <a:ext cx="10607040" cy="201168"/>
-          </a:xfrm>
-          <a:prstGeom prst="rect">
-            <a:avLst/>
-          </a:prstGeom>
-          <a:noFill/>
-        </p:spPr>
-        <p:txBody>
-          <a:bodyPr wrap="square" lIns="36576" rIns="36576" tIns="27432" bIns="27432">
+          <p:cNvPr id="4" name="TextBox 3"/>
+          <p:cNvSpPr txBox="1"/>
+          <p:nvPr/>
+        </p:nvSpPr>
+        <p:spPr>
+          <a:xfrm>
+            <a:off x="502920" y="274320"/>
+            <a:ext cx="5486400" cy="256032"/>
+          </a:xfrm>
+          <a:prstGeom prst="rect">
+            <a:avLst/>
+          </a:prstGeom>
+          <a:noFill/>
+        </p:spPr>
+        <p:txBody>
+          <a:bodyPr wrap="square" lIns="45720" rIns="45720" tIns="36576" bIns="36576" anchor="t">
             <a:spAutoFit/>
           </a:bodyPr>
           <a:lstStyle/>
@@ -3391,13 +3577,2862 @@
             <a:pPr algn="l">
               <a:defRPr sz="1000" b="1">
                 <a:solidFill>
-                  <a:srgbClr val="A0AAB9"/>
-                </a:solidFill>
-                <a:latin typeface="Aptos"/>
-              </a:defRPr>
-            </a:pPr>
-            <a:r>
-              <a:t>MINIJARVIS · PROGRAMACIÓN + ENTORNOS DE DESARROLLO</a:t>
+                  <a:srgbClr val="CC4F3E"/>
+                </a:solidFill>
+                <a:latin typeface="Aptos"/>
+              </a:defRPr>
+            </a:pPr>
+            <a:r>
+              <a:t>APLICAR Y DECIDIR</a:t>
+            </a:r>
+          </a:p>
+        </p:txBody>
+      </p:sp>
+      <p:sp>
+        <p:nvSpPr>
+          <p:cNvPr id="5" name="TextBox 4"/>
+          <p:cNvSpPr txBox="1"/>
+          <p:nvPr/>
+        </p:nvSpPr>
+        <p:spPr>
+          <a:xfrm>
+            <a:off x="502920" y="603504"/>
+            <a:ext cx="11064240" cy="530352"/>
+          </a:xfrm>
+          <a:prstGeom prst="rect">
+            <a:avLst/>
+          </a:prstGeom>
+          <a:noFill/>
+        </p:spPr>
+        <p:txBody>
+          <a:bodyPr wrap="square" lIns="45720" rIns="45720" tIns="36576" bIns="36576" anchor="t">
+            <a:spAutoFit/>
+          </a:bodyPr>
+          <a:lstStyle/>
+          <a:p>
+            <a:pPr algn="l">
+              <a:defRPr sz="2800" b="1">
+                <a:solidFill>
+                  <a:srgbClr val="1C2330"/>
+                </a:solidFill>
+                <a:latin typeface="Aptos"/>
+              </a:defRPr>
+            </a:pPr>
+            <a:r>
+              <a:t>Actividad central · 2</a:t>
+            </a:r>
+          </a:p>
+        </p:txBody>
+      </p:sp>
+      <p:sp>
+        <p:nvSpPr>
+          <p:cNvPr id="6" name="Rectangle 5"/>
+          <p:cNvSpPr/>
+          <p:nvPr/>
+        </p:nvSpPr>
+        <p:spPr>
+          <a:xfrm>
+            <a:off x="0" y="6601968"/>
+            <a:ext cx="12191695" cy="256032"/>
+          </a:xfrm>
+          <a:prstGeom prst="rect">
+            <a:avLst/>
+          </a:prstGeom>
+          <a:solidFill>
+            <a:srgbClr val="CC4F3E"/>
+          </a:solidFill>
+          <a:ln>
+            <a:noFill/>
+          </a:ln>
+        </p:spPr>
+        <p:style>
+          <a:lnRef idx="1">
+            <a:schemeClr val="accent1"/>
+          </a:lnRef>
+          <a:fillRef idx="3">
+            <a:schemeClr val="accent1"/>
+          </a:fillRef>
+          <a:effectRef idx="2">
+            <a:schemeClr val="accent1"/>
+          </a:effectRef>
+          <a:fontRef idx="minor">
+            <a:schemeClr val="lt1"/>
+          </a:fontRef>
+        </p:style>
+        <p:txBody>
+          <a:bodyPr rtlCol="0" anchor="ctr"/>
+          <a:lstStyle/>
+          <a:p>
+            <a:pPr algn="ctr"/>
+          </a:p>
+        </p:txBody>
+      </p:sp>
+      <p:sp>
+        <p:nvSpPr>
+          <p:cNvPr id="7" name="TextBox 6"/>
+          <p:cNvSpPr txBox="1"/>
+          <p:nvPr/>
+        </p:nvSpPr>
+        <p:spPr>
+          <a:xfrm>
+            <a:off x="411480" y="6629400"/>
+            <a:ext cx="11247120" cy="164592"/>
+          </a:xfrm>
+          <a:prstGeom prst="rect">
+            <a:avLst/>
+          </a:prstGeom>
+          <a:noFill/>
+        </p:spPr>
+        <p:txBody>
+          <a:bodyPr wrap="square" lIns="45720" rIns="45720" tIns="36576" bIns="36576" anchor="t">
+            <a:spAutoFit/>
+          </a:bodyPr>
+          <a:lstStyle/>
+          <a:p>
+            <a:pPr algn="l">
+              <a:defRPr sz="900" b="0">
+                <a:solidFill>
+                  <a:srgbClr val="FFFFFF"/>
+                </a:solidFill>
+                <a:latin typeface="Aptos"/>
+              </a:defRPr>
+            </a:pPr>
+            <a:r>
+              <a:t>MiniJarvis · 1.º DAW · Sesión 203 · H0 — Formación y prueba de equipos Scrum mediante la torre de papel</a:t>
+            </a:r>
+          </a:p>
+        </p:txBody>
+      </p:sp>
+      <p:sp>
+        <p:nvSpPr>
+          <p:cNvPr id="8" name="Rounded Rectangle 7"/>
+          <p:cNvSpPr/>
+          <p:nvPr/>
+        </p:nvSpPr>
+        <p:spPr>
+          <a:xfrm>
+            <a:off x="658368" y="1307592"/>
+            <a:ext cx="10835640" cy="1049274"/>
+          </a:xfrm>
+          <a:prstGeom prst="roundRect">
+            <a:avLst/>
+          </a:prstGeom>
+          <a:solidFill>
+            <a:srgbClr val="FFFFFF"/>
+          </a:solidFill>
+          <a:ln>
+            <a:solidFill>
+              <a:srgbClr val="E5E9EF"/>
+            </a:solidFill>
+          </a:ln>
+        </p:spPr>
+        <p:style>
+          <a:lnRef idx="1">
+            <a:schemeClr val="accent1"/>
+          </a:lnRef>
+          <a:fillRef idx="3">
+            <a:schemeClr val="accent1"/>
+          </a:fillRef>
+          <a:effectRef idx="2">
+            <a:schemeClr val="accent1"/>
+          </a:effectRef>
+          <a:fontRef idx="minor">
+            <a:schemeClr val="lt1"/>
+          </a:fontRef>
+        </p:style>
+        <p:txBody>
+          <a:bodyPr rtlCol="0" anchor="ctr"/>
+          <a:lstStyle/>
+          <a:p>
+            <a:pPr algn="ctr"/>
+          </a:p>
+        </p:txBody>
+      </p:sp>
+      <p:sp>
+        <p:nvSpPr>
+          <p:cNvPr id="9" name="TextBox 8"/>
+          <p:cNvSpPr txBox="1"/>
+          <p:nvPr/>
+        </p:nvSpPr>
+        <p:spPr>
+          <a:xfrm>
+            <a:off x="850392" y="1453895"/>
+            <a:ext cx="685800" cy="384048"/>
+          </a:xfrm>
+          <a:prstGeom prst="rect">
+            <a:avLst/>
+          </a:prstGeom>
+          <a:noFill/>
+        </p:spPr>
+        <p:txBody>
+          <a:bodyPr wrap="square" lIns="45720" rIns="45720" tIns="36576" bIns="36576" anchor="t">
+            <a:spAutoFit/>
+          </a:bodyPr>
+          <a:lstStyle/>
+          <a:p>
+            <a:pPr algn="l">
+              <a:defRPr sz="1200" b="1">
+                <a:solidFill>
+                  <a:srgbClr val="CC4F3E"/>
+                </a:solidFill>
+                <a:latin typeface="Aptos"/>
+              </a:defRPr>
+            </a:pPr>
+            <a:r>
+              <a:t>PASO 6</a:t>
+            </a:r>
+          </a:p>
+        </p:txBody>
+      </p:sp>
+      <p:sp>
+        <p:nvSpPr>
+          <p:cNvPr id="10" name="TextBox 9"/>
+          <p:cNvSpPr txBox="1"/>
+          <p:nvPr/>
+        </p:nvSpPr>
+        <p:spPr>
+          <a:xfrm>
+            <a:off x="1664208" y="1417319"/>
+            <a:ext cx="9464040" cy="829818"/>
+          </a:xfrm>
+          <a:prstGeom prst="rect">
+            <a:avLst/>
+          </a:prstGeom>
+          <a:noFill/>
+        </p:spPr>
+        <p:txBody>
+          <a:bodyPr wrap="square" lIns="45720" rIns="45720" tIns="36576" bIns="36576" anchor="t">
+            <a:spAutoFit/>
+          </a:bodyPr>
+          <a:lstStyle/>
+          <a:p>
+            <a:pPr algn="l">
+              <a:defRPr sz="1700" b="0">
+                <a:solidFill>
+                  <a:srgbClr val="1C2330"/>
+                </a:solidFill>
+                <a:latin typeface="Aptos"/>
+              </a:defRPr>
+            </a:pPr>
+            <a:r>
+              <a:t>Backlog — al menos seis tareas comprobables, con prioridad y criterio de Hecho.</a:t>
+            </a:r>
+          </a:p>
+        </p:txBody>
+      </p:sp>
+      <p:sp>
+        <p:nvSpPr>
+          <p:cNvPr id="11" name="Rounded Rectangle 10"/>
+          <p:cNvSpPr/>
+          <p:nvPr/>
+        </p:nvSpPr>
+        <p:spPr>
+          <a:xfrm>
+            <a:off x="658368" y="2542032"/>
+            <a:ext cx="10835640" cy="1049274"/>
+          </a:xfrm>
+          <a:prstGeom prst="roundRect">
+            <a:avLst/>
+          </a:prstGeom>
+          <a:solidFill>
+            <a:srgbClr val="FFFFFF"/>
+          </a:solidFill>
+          <a:ln>
+            <a:solidFill>
+              <a:srgbClr val="E5E9EF"/>
+            </a:solidFill>
+          </a:ln>
+        </p:spPr>
+        <p:style>
+          <a:lnRef idx="1">
+            <a:schemeClr val="accent1"/>
+          </a:lnRef>
+          <a:fillRef idx="3">
+            <a:schemeClr val="accent1"/>
+          </a:fillRef>
+          <a:effectRef idx="2">
+            <a:schemeClr val="accent1"/>
+          </a:effectRef>
+          <a:fontRef idx="minor">
+            <a:schemeClr val="lt1"/>
+          </a:fontRef>
+        </p:style>
+        <p:txBody>
+          <a:bodyPr rtlCol="0" anchor="ctr"/>
+          <a:lstStyle/>
+          <a:p>
+            <a:pPr algn="ctr"/>
+          </a:p>
+        </p:txBody>
+      </p:sp>
+      <p:sp>
+        <p:nvSpPr>
+          <p:cNvPr id="12" name="TextBox 11"/>
+          <p:cNvSpPr txBox="1"/>
+          <p:nvPr/>
+        </p:nvSpPr>
+        <p:spPr>
+          <a:xfrm>
+            <a:off x="850392" y="2688336"/>
+            <a:ext cx="685800" cy="384048"/>
+          </a:xfrm>
+          <a:prstGeom prst="rect">
+            <a:avLst/>
+          </a:prstGeom>
+          <a:noFill/>
+        </p:spPr>
+        <p:txBody>
+          <a:bodyPr wrap="square" lIns="45720" rIns="45720" tIns="36576" bIns="36576" anchor="t">
+            <a:spAutoFit/>
+          </a:bodyPr>
+          <a:lstStyle/>
+          <a:p>
+            <a:pPr algn="l">
+              <a:defRPr sz="1200" b="1">
+                <a:solidFill>
+                  <a:srgbClr val="CC4F3E"/>
+                </a:solidFill>
+                <a:latin typeface="Aptos"/>
+              </a:defRPr>
+            </a:pPr>
+            <a:r>
+              <a:t>PASO 7</a:t>
+            </a:r>
+          </a:p>
+        </p:txBody>
+      </p:sp>
+      <p:sp>
+        <p:nvSpPr>
+          <p:cNvPr id="13" name="TextBox 12"/>
+          <p:cNvSpPr txBox="1"/>
+          <p:nvPr/>
+        </p:nvSpPr>
+        <p:spPr>
+          <a:xfrm>
+            <a:off x="1664208" y="2651760"/>
+            <a:ext cx="9464040" cy="829818"/>
+          </a:xfrm>
+          <a:prstGeom prst="rect">
+            <a:avLst/>
+          </a:prstGeom>
+          <a:noFill/>
+        </p:spPr>
+        <p:txBody>
+          <a:bodyPr wrap="square" lIns="45720" rIns="45720" tIns="36576" bIns="36576" anchor="t">
+            <a:spAutoFit/>
+          </a:bodyPr>
+          <a:lstStyle/>
+          <a:p>
+            <a:pPr algn="l">
+              <a:defRPr sz="1700" b="0">
+                <a:solidFill>
+                  <a:srgbClr val="1C2330"/>
+                </a:solidFill>
+                <a:latin typeface="Aptos"/>
+              </a:defRPr>
+            </a:pPr>
+            <a:r>
+              <a:t>Definición de terminado y bloqueo probable — indicar cómo se harán visibles.</a:t>
+            </a:r>
+          </a:p>
+        </p:txBody>
+      </p:sp>
+      <p:sp>
+        <p:nvSpPr>
+          <p:cNvPr id="14" name="Rounded Rectangle 13"/>
+          <p:cNvSpPr/>
+          <p:nvPr/>
+        </p:nvSpPr>
+        <p:spPr>
+          <a:xfrm>
+            <a:off x="658368" y="3776472"/>
+            <a:ext cx="10835640" cy="1049274"/>
+          </a:xfrm>
+          <a:prstGeom prst="roundRect">
+            <a:avLst/>
+          </a:prstGeom>
+          <a:solidFill>
+            <a:srgbClr val="FFFFFF"/>
+          </a:solidFill>
+          <a:ln>
+            <a:solidFill>
+              <a:srgbClr val="E5E9EF"/>
+            </a:solidFill>
+          </a:ln>
+        </p:spPr>
+        <p:style>
+          <a:lnRef idx="1">
+            <a:schemeClr val="accent1"/>
+          </a:lnRef>
+          <a:fillRef idx="3">
+            <a:schemeClr val="accent1"/>
+          </a:fillRef>
+          <a:effectRef idx="2">
+            <a:schemeClr val="accent1"/>
+          </a:effectRef>
+          <a:fontRef idx="minor">
+            <a:schemeClr val="lt1"/>
+          </a:fontRef>
+        </p:style>
+        <p:txBody>
+          <a:bodyPr rtlCol="0" anchor="ctr"/>
+          <a:lstStyle/>
+          <a:p>
+            <a:pPr algn="ctr"/>
+          </a:p>
+        </p:txBody>
+      </p:sp>
+      <p:sp>
+        <p:nvSpPr>
+          <p:cNvPr id="15" name="TextBox 14"/>
+          <p:cNvSpPr txBox="1"/>
+          <p:nvPr/>
+        </p:nvSpPr>
+        <p:spPr>
+          <a:xfrm>
+            <a:off x="850392" y="3922776"/>
+            <a:ext cx="685800" cy="384048"/>
+          </a:xfrm>
+          <a:prstGeom prst="rect">
+            <a:avLst/>
+          </a:prstGeom>
+          <a:noFill/>
+        </p:spPr>
+        <p:txBody>
+          <a:bodyPr wrap="square" lIns="45720" rIns="45720" tIns="36576" bIns="36576" anchor="t">
+            <a:spAutoFit/>
+          </a:bodyPr>
+          <a:lstStyle/>
+          <a:p>
+            <a:pPr algn="l">
+              <a:defRPr sz="1200" b="1">
+                <a:solidFill>
+                  <a:srgbClr val="CC4F3E"/>
+                </a:solidFill>
+                <a:latin typeface="Aptos"/>
+              </a:defRPr>
+            </a:pPr>
+            <a:r>
+              <a:t>PASO 8</a:t>
+            </a:r>
+          </a:p>
+        </p:txBody>
+      </p:sp>
+      <p:sp>
+        <p:nvSpPr>
+          <p:cNvPr id="16" name="TextBox 15"/>
+          <p:cNvSpPr txBox="1"/>
+          <p:nvPr/>
+        </p:nvSpPr>
+        <p:spPr>
+          <a:xfrm>
+            <a:off x="1664208" y="3886200"/>
+            <a:ext cx="9464040" cy="829818"/>
+          </a:xfrm>
+          <a:prstGeom prst="rect">
+            <a:avLst/>
+          </a:prstGeom>
+          <a:noFill/>
+        </p:spPr>
+        <p:txBody>
+          <a:bodyPr wrap="square" lIns="45720" rIns="45720" tIns="36576" bIns="36576" anchor="t">
+            <a:spAutoFit/>
+          </a:bodyPr>
+          <a:lstStyle/>
+          <a:p>
+            <a:pPr algn="l">
+              <a:defRPr sz="1700" b="0">
+                <a:solidFill>
+                  <a:srgbClr val="1C2330"/>
+                </a:solidFill>
+                <a:latin typeface="Aptos"/>
+              </a:defRPr>
+            </a:pPr>
+            <a:r>
+              <a:t>Defensa — explicar capacidad a compensar, función, conducta observable y criterio de terminado.</a:t>
+            </a:r>
+          </a:p>
+        </p:txBody>
+      </p:sp>
+      <p:sp>
+        <p:nvSpPr>
+          <p:cNvPr id="17" name="Rounded Rectangle 16"/>
+          <p:cNvSpPr/>
+          <p:nvPr/>
+        </p:nvSpPr>
+        <p:spPr>
+          <a:xfrm>
+            <a:off x="658368" y="5010912"/>
+            <a:ext cx="10835640" cy="1049274"/>
+          </a:xfrm>
+          <a:prstGeom prst="roundRect">
+            <a:avLst/>
+          </a:prstGeom>
+          <a:solidFill>
+            <a:srgbClr val="FFFFFF"/>
+          </a:solidFill>
+          <a:ln>
+            <a:solidFill>
+              <a:srgbClr val="E5E9EF"/>
+            </a:solidFill>
+          </a:ln>
+        </p:spPr>
+        <p:style>
+          <a:lnRef idx="1">
+            <a:schemeClr val="accent1"/>
+          </a:lnRef>
+          <a:fillRef idx="3">
+            <a:schemeClr val="accent1"/>
+          </a:fillRef>
+          <a:effectRef idx="2">
+            <a:schemeClr val="accent1"/>
+          </a:effectRef>
+          <a:fontRef idx="minor">
+            <a:schemeClr val="lt1"/>
+          </a:fontRef>
+        </p:style>
+        <p:txBody>
+          <a:bodyPr rtlCol="0" anchor="ctr"/>
+          <a:lstStyle/>
+          <a:p>
+            <a:pPr algn="ctr"/>
+          </a:p>
+        </p:txBody>
+      </p:sp>
+      <p:sp>
+        <p:nvSpPr>
+          <p:cNvPr id="18" name="TextBox 17"/>
+          <p:cNvSpPr txBox="1"/>
+          <p:nvPr/>
+        </p:nvSpPr>
+        <p:spPr>
+          <a:xfrm>
+            <a:off x="850392" y="5157216"/>
+            <a:ext cx="685800" cy="384048"/>
+          </a:xfrm>
+          <a:prstGeom prst="rect">
+            <a:avLst/>
+          </a:prstGeom>
+          <a:noFill/>
+        </p:spPr>
+        <p:txBody>
+          <a:bodyPr wrap="square" lIns="45720" rIns="45720" tIns="36576" bIns="36576" anchor="t">
+            <a:spAutoFit/>
+          </a:bodyPr>
+          <a:lstStyle/>
+          <a:p>
+            <a:pPr algn="l">
+              <a:defRPr sz="1200" b="1">
+                <a:solidFill>
+                  <a:srgbClr val="CC4F3E"/>
+                </a:solidFill>
+                <a:latin typeface="Aptos"/>
+              </a:defRPr>
+            </a:pPr>
+            <a:r>
+              <a:t>PASO 9</a:t>
+            </a:r>
+          </a:p>
+        </p:txBody>
+      </p:sp>
+      <p:sp>
+        <p:nvSpPr>
+          <p:cNvPr id="19" name="TextBox 18"/>
+          <p:cNvSpPr txBox="1"/>
+          <p:nvPr/>
+        </p:nvSpPr>
+        <p:spPr>
+          <a:xfrm>
+            <a:off x="1664208" y="5120640"/>
+            <a:ext cx="9464040" cy="829818"/>
+          </a:xfrm>
+          <a:prstGeom prst="rect">
+            <a:avLst/>
+          </a:prstGeom>
+          <a:noFill/>
+        </p:spPr>
+        <p:txBody>
+          <a:bodyPr wrap="square" lIns="45720" rIns="45720" tIns="36576" bIns="36576" anchor="t">
+            <a:spAutoFit/>
+          </a:bodyPr>
+          <a:lstStyle/>
+          <a:p>
+            <a:pPr algn="l">
+              <a:defRPr sz="1700" b="0">
+                <a:solidFill>
+                  <a:srgbClr val="1C2330"/>
+                </a:solidFill>
+                <a:latin typeface="Aptos"/>
+              </a:defRPr>
+            </a:pPr>
+            <a:r>
+              <a:t>Cierre individual — Mi responsabilidad inicial; conducta observable; tarea compartida; condición para revisar la función.</a:t>
+            </a:r>
+          </a:p>
+        </p:txBody>
+      </p:sp>
+    </p:spTree>
+  </p:cSld>
+  <p:clrMapOvr>
+    <a:masterClrMapping/>
+  </p:clrMapOvr>
+</p:sld>
+</file>
+
+<file path=ppt/slides/slide11.xml><?xml version="1.0" encoding="utf-8"?>
+<p:sld xmlns:a="http://schemas.openxmlformats.org/drawingml/2006/main" xmlns:p="http://schemas.openxmlformats.org/presentationml/2006/main" xmlns:r="http://schemas.openxmlformats.org/officeDocument/2006/relationships">
+  <p:cSld>
+    <p:spTree>
+      <p:nvGrpSpPr>
+        <p:cNvPr id="1" name=""/>
+        <p:cNvGrpSpPr/>
+        <p:nvPr/>
+      </p:nvGrpSpPr>
+      <p:grpSpPr/>
+      <p:sp>
+        <p:nvSpPr>
+          <p:cNvPr id="2" name="Rectangle 1"/>
+          <p:cNvSpPr/>
+          <p:nvPr/>
+        </p:nvSpPr>
+        <p:spPr>
+          <a:xfrm>
+            <a:off x="0" y="0"/>
+            <a:ext cx="12191695" cy="6858000"/>
+          </a:xfrm>
+          <a:prstGeom prst="rect">
+            <a:avLst/>
+          </a:prstGeom>
+          <a:solidFill>
+            <a:srgbClr val="F9F7F2"/>
+          </a:solidFill>
+          <a:ln>
+            <a:noFill/>
+          </a:ln>
+        </p:spPr>
+        <p:style>
+          <a:lnRef idx="1">
+            <a:schemeClr val="accent1"/>
+          </a:lnRef>
+          <a:fillRef idx="3">
+            <a:schemeClr val="accent1"/>
+          </a:fillRef>
+          <a:effectRef idx="2">
+            <a:schemeClr val="accent1"/>
+          </a:effectRef>
+          <a:fontRef idx="minor">
+            <a:schemeClr val="lt1"/>
+          </a:fontRef>
+        </p:style>
+        <p:txBody>
+          <a:bodyPr rtlCol="0" anchor="ctr"/>
+          <a:lstStyle/>
+          <a:p>
+            <a:pPr algn="ctr"/>
+          </a:p>
+        </p:txBody>
+      </p:sp>
+      <p:sp>
+        <p:nvSpPr>
+          <p:cNvPr id="3" name="Rectangle 2"/>
+          <p:cNvSpPr/>
+          <p:nvPr/>
+        </p:nvSpPr>
+        <p:spPr>
+          <a:xfrm>
+            <a:off x="0" y="0"/>
+            <a:ext cx="164592" cy="6858000"/>
+          </a:xfrm>
+          <a:prstGeom prst="rect">
+            <a:avLst/>
+          </a:prstGeom>
+          <a:solidFill>
+            <a:srgbClr val="CC4F3E"/>
+          </a:solidFill>
+          <a:ln>
+            <a:noFill/>
+          </a:ln>
+        </p:spPr>
+        <p:style>
+          <a:lnRef idx="1">
+            <a:schemeClr val="accent1"/>
+          </a:lnRef>
+          <a:fillRef idx="3">
+            <a:schemeClr val="accent1"/>
+          </a:fillRef>
+          <a:effectRef idx="2">
+            <a:schemeClr val="accent1"/>
+          </a:effectRef>
+          <a:fontRef idx="minor">
+            <a:schemeClr val="lt1"/>
+          </a:fontRef>
+        </p:style>
+        <p:txBody>
+          <a:bodyPr rtlCol="0" anchor="ctr"/>
+          <a:lstStyle/>
+          <a:p>
+            <a:pPr algn="ctr"/>
+          </a:p>
+        </p:txBody>
+      </p:sp>
+      <p:sp>
+        <p:nvSpPr>
+          <p:cNvPr id="4" name="TextBox 3"/>
+          <p:cNvSpPr txBox="1"/>
+          <p:nvPr/>
+        </p:nvSpPr>
+        <p:spPr>
+          <a:xfrm>
+            <a:off x="502920" y="274320"/>
+            <a:ext cx="5486400" cy="256032"/>
+          </a:xfrm>
+          <a:prstGeom prst="rect">
+            <a:avLst/>
+          </a:prstGeom>
+          <a:noFill/>
+        </p:spPr>
+        <p:txBody>
+          <a:bodyPr wrap="square" lIns="45720" rIns="45720" tIns="36576" bIns="36576" anchor="t">
+            <a:spAutoFit/>
+          </a:bodyPr>
+          <a:lstStyle/>
+          <a:p>
+            <a:pPr algn="l">
+              <a:defRPr sz="1000" b="1">
+                <a:solidFill>
+                  <a:srgbClr val="CC4F3E"/>
+                </a:solidFill>
+                <a:latin typeface="Aptos"/>
+              </a:defRPr>
+            </a:pPr>
+            <a:r>
+              <a:t>COMPROBAR</a:t>
+            </a:r>
+          </a:p>
+        </p:txBody>
+      </p:sp>
+      <p:sp>
+        <p:nvSpPr>
+          <p:cNvPr id="5" name="TextBox 4"/>
+          <p:cNvSpPr txBox="1"/>
+          <p:nvPr/>
+        </p:nvSpPr>
+        <p:spPr>
+          <a:xfrm>
+            <a:off x="502920" y="603504"/>
+            <a:ext cx="11064240" cy="530352"/>
+          </a:xfrm>
+          <a:prstGeom prst="rect">
+            <a:avLst/>
+          </a:prstGeom>
+          <a:noFill/>
+        </p:spPr>
+        <p:txBody>
+          <a:bodyPr wrap="square" lIns="45720" rIns="45720" tIns="36576" bIns="36576" anchor="t">
+            <a:spAutoFit/>
+          </a:bodyPr>
+          <a:lstStyle/>
+          <a:p>
+            <a:pPr algn="l">
+              <a:defRPr sz="2800" b="1">
+                <a:solidFill>
+                  <a:srgbClr val="1C2330"/>
+                </a:solidFill>
+                <a:latin typeface="Aptos"/>
+              </a:defRPr>
+            </a:pPr>
+            <a:r>
+              <a:t>Evidencia y comprobación · 1</a:t>
+            </a:r>
+          </a:p>
+        </p:txBody>
+      </p:sp>
+      <p:sp>
+        <p:nvSpPr>
+          <p:cNvPr id="6" name="Rectangle 5"/>
+          <p:cNvSpPr/>
+          <p:nvPr/>
+        </p:nvSpPr>
+        <p:spPr>
+          <a:xfrm>
+            <a:off x="0" y="6601968"/>
+            <a:ext cx="12191695" cy="256032"/>
+          </a:xfrm>
+          <a:prstGeom prst="rect">
+            <a:avLst/>
+          </a:prstGeom>
+          <a:solidFill>
+            <a:srgbClr val="CC4F3E"/>
+          </a:solidFill>
+          <a:ln>
+            <a:noFill/>
+          </a:ln>
+        </p:spPr>
+        <p:style>
+          <a:lnRef idx="1">
+            <a:schemeClr val="accent1"/>
+          </a:lnRef>
+          <a:fillRef idx="3">
+            <a:schemeClr val="accent1"/>
+          </a:fillRef>
+          <a:effectRef idx="2">
+            <a:schemeClr val="accent1"/>
+          </a:effectRef>
+          <a:fontRef idx="minor">
+            <a:schemeClr val="lt1"/>
+          </a:fontRef>
+        </p:style>
+        <p:txBody>
+          <a:bodyPr rtlCol="0" anchor="ctr"/>
+          <a:lstStyle/>
+          <a:p>
+            <a:pPr algn="ctr"/>
+          </a:p>
+        </p:txBody>
+      </p:sp>
+      <p:sp>
+        <p:nvSpPr>
+          <p:cNvPr id="7" name="TextBox 6"/>
+          <p:cNvSpPr txBox="1"/>
+          <p:nvPr/>
+        </p:nvSpPr>
+        <p:spPr>
+          <a:xfrm>
+            <a:off x="411480" y="6629400"/>
+            <a:ext cx="11247120" cy="164592"/>
+          </a:xfrm>
+          <a:prstGeom prst="rect">
+            <a:avLst/>
+          </a:prstGeom>
+          <a:noFill/>
+        </p:spPr>
+        <p:txBody>
+          <a:bodyPr wrap="square" lIns="45720" rIns="45720" tIns="36576" bIns="36576" anchor="t">
+            <a:spAutoFit/>
+          </a:bodyPr>
+          <a:lstStyle/>
+          <a:p>
+            <a:pPr algn="l">
+              <a:defRPr sz="900" b="0">
+                <a:solidFill>
+                  <a:srgbClr val="FFFFFF"/>
+                </a:solidFill>
+                <a:latin typeface="Aptos"/>
+              </a:defRPr>
+            </a:pPr>
+            <a:r>
+              <a:t>MiniJarvis · 1.º DAW · Sesión 203 · H0 — Formación y prueba de equipos Scrum mediante la torre de papel</a:t>
+            </a:r>
+          </a:p>
+        </p:txBody>
+      </p:sp>
+      <p:sp>
+        <p:nvSpPr>
+          <p:cNvPr id="8" name="Rounded Rectangle 7"/>
+          <p:cNvSpPr/>
+          <p:nvPr/>
+        </p:nvSpPr>
+        <p:spPr>
+          <a:xfrm>
+            <a:off x="713232" y="1298448"/>
+            <a:ext cx="420624" cy="420624"/>
+          </a:xfrm>
+          <a:prstGeom prst="roundRect">
+            <a:avLst/>
+          </a:prstGeom>
+          <a:solidFill>
+            <a:srgbClr val="FFFFFF"/>
+          </a:solidFill>
+          <a:ln>
+            <a:solidFill>
+              <a:srgbClr val="CC4F3E"/>
+            </a:solidFill>
+          </a:ln>
+        </p:spPr>
+        <p:style>
+          <a:lnRef idx="1">
+            <a:schemeClr val="accent1"/>
+          </a:lnRef>
+          <a:fillRef idx="3">
+            <a:schemeClr val="accent1"/>
+          </a:fillRef>
+          <a:effectRef idx="2">
+            <a:schemeClr val="accent1"/>
+          </a:effectRef>
+          <a:fontRef idx="minor">
+            <a:schemeClr val="lt1"/>
+          </a:fontRef>
+        </p:style>
+        <p:txBody>
+          <a:bodyPr rtlCol="0" anchor="ctr"/>
+          <a:lstStyle/>
+          <a:p>
+            <a:pPr algn="ctr"/>
+          </a:p>
+        </p:txBody>
+      </p:sp>
+      <p:sp>
+        <p:nvSpPr>
+          <p:cNvPr id="9" name="TextBox 8"/>
+          <p:cNvSpPr txBox="1"/>
+          <p:nvPr/>
+        </p:nvSpPr>
+        <p:spPr>
+          <a:xfrm>
+            <a:off x="1389888" y="1280160"/>
+            <a:ext cx="9829800" cy="675349"/>
+          </a:xfrm>
+          <a:prstGeom prst="rect">
+            <a:avLst/>
+          </a:prstGeom>
+          <a:noFill/>
+        </p:spPr>
+        <p:txBody>
+          <a:bodyPr wrap="square" lIns="45720" rIns="45720" tIns="36576" bIns="36576" anchor="t">
+            <a:spAutoFit/>
+          </a:bodyPr>
+          <a:lstStyle/>
+          <a:p>
+            <a:pPr algn="l">
+              <a:defRPr sz="1600" b="0">
+                <a:solidFill>
+                  <a:srgbClr val="1C2330"/>
+                </a:solidFill>
+                <a:latin typeface="Aptos"/>
+              </a:defRPr>
+            </a:pPr>
+            <a:r>
+              <a:t>cada equipo conoce que su composición es provisional;</a:t>
+            </a:r>
+          </a:p>
+        </p:txBody>
+      </p:sp>
+      <p:sp>
+        <p:nvSpPr>
+          <p:cNvPr id="10" name="Rounded Rectangle 9"/>
+          <p:cNvSpPr/>
+          <p:nvPr/>
+        </p:nvSpPr>
+        <p:spPr>
+          <a:xfrm>
+            <a:off x="713232" y="2010373"/>
+            <a:ext cx="420624" cy="420624"/>
+          </a:xfrm>
+          <a:prstGeom prst="roundRect">
+            <a:avLst/>
+          </a:prstGeom>
+          <a:solidFill>
+            <a:srgbClr val="FFFFFF"/>
+          </a:solidFill>
+          <a:ln>
+            <a:solidFill>
+              <a:srgbClr val="CC4F3E"/>
+            </a:solidFill>
+          </a:ln>
+        </p:spPr>
+        <p:style>
+          <a:lnRef idx="1">
+            <a:schemeClr val="accent1"/>
+          </a:lnRef>
+          <a:fillRef idx="3">
+            <a:schemeClr val="accent1"/>
+          </a:fillRef>
+          <a:effectRef idx="2">
+            <a:schemeClr val="accent1"/>
+          </a:effectRef>
+          <a:fontRef idx="minor">
+            <a:schemeClr val="lt1"/>
+          </a:fontRef>
+        </p:style>
+        <p:txBody>
+          <a:bodyPr rtlCol="0" anchor="ctr"/>
+          <a:lstStyle/>
+          <a:p>
+            <a:pPr algn="ctr"/>
+          </a:p>
+        </p:txBody>
+      </p:sp>
+      <p:sp>
+        <p:nvSpPr>
+          <p:cNvPr id="11" name="TextBox 10"/>
+          <p:cNvSpPr txBox="1"/>
+          <p:nvPr/>
+        </p:nvSpPr>
+        <p:spPr>
+          <a:xfrm>
+            <a:off x="1389888" y="1992085"/>
+            <a:ext cx="9829800" cy="675349"/>
+          </a:xfrm>
+          <a:prstGeom prst="rect">
+            <a:avLst/>
+          </a:prstGeom>
+          <a:noFill/>
+        </p:spPr>
+        <p:txBody>
+          <a:bodyPr wrap="square" lIns="45720" rIns="45720" tIns="36576" bIns="36576" anchor="t">
+            <a:spAutoFit/>
+          </a:bodyPr>
+          <a:lstStyle/>
+          <a:p>
+            <a:pPr algn="l">
+              <a:defRPr sz="1600" b="0">
+                <a:solidFill>
+                  <a:srgbClr val="1C2330"/>
+                </a:solidFill>
+                <a:latin typeface="Aptos"/>
+              </a:defRPr>
+            </a:pPr>
+            <a:r>
+              <a:t>no se han publicado puntuaciones nominales;</a:t>
+            </a:r>
+          </a:p>
+        </p:txBody>
+      </p:sp>
+      <p:sp>
+        <p:nvSpPr>
+          <p:cNvPr id="12" name="Rounded Rectangle 11"/>
+          <p:cNvSpPr/>
+          <p:nvPr/>
+        </p:nvSpPr>
+        <p:spPr>
+          <a:xfrm>
+            <a:off x="713232" y="2722299"/>
+            <a:ext cx="420624" cy="420624"/>
+          </a:xfrm>
+          <a:prstGeom prst="roundRect">
+            <a:avLst/>
+          </a:prstGeom>
+          <a:solidFill>
+            <a:srgbClr val="FFFFFF"/>
+          </a:solidFill>
+          <a:ln>
+            <a:solidFill>
+              <a:srgbClr val="CC4F3E"/>
+            </a:solidFill>
+          </a:ln>
+        </p:spPr>
+        <p:style>
+          <a:lnRef idx="1">
+            <a:schemeClr val="accent1"/>
+          </a:lnRef>
+          <a:fillRef idx="3">
+            <a:schemeClr val="accent1"/>
+          </a:fillRef>
+          <a:effectRef idx="2">
+            <a:schemeClr val="accent1"/>
+          </a:effectRef>
+          <a:fontRef idx="minor">
+            <a:schemeClr val="lt1"/>
+          </a:fontRef>
+        </p:style>
+        <p:txBody>
+          <a:bodyPr rtlCol="0" anchor="ctr"/>
+          <a:lstStyle/>
+          <a:p>
+            <a:pPr algn="ctr"/>
+          </a:p>
+        </p:txBody>
+      </p:sp>
+      <p:sp>
+        <p:nvSpPr>
+          <p:cNvPr id="13" name="TextBox 12"/>
+          <p:cNvSpPr txBox="1"/>
+          <p:nvPr/>
+        </p:nvSpPr>
+        <p:spPr>
+          <a:xfrm>
+            <a:off x="1389888" y="2704011"/>
+            <a:ext cx="9829800" cy="675349"/>
+          </a:xfrm>
+          <a:prstGeom prst="rect">
+            <a:avLst/>
+          </a:prstGeom>
+          <a:noFill/>
+        </p:spPr>
+        <p:txBody>
+          <a:bodyPr wrap="square" lIns="45720" rIns="45720" tIns="36576" bIns="36576" anchor="t">
+            <a:spAutoFit/>
+          </a:bodyPr>
+          <a:lstStyle/>
+          <a:p>
+            <a:pPr algn="l">
+              <a:defRPr sz="1600" b="0">
+                <a:solidFill>
+                  <a:srgbClr val="1C2330"/>
+                </a:solidFill>
+                <a:latin typeface="Aptos"/>
+              </a:defRPr>
+            </a:pPr>
+            <a:r>
+              <a:t>distingue perfil HADA de función;</a:t>
+            </a:r>
+          </a:p>
+        </p:txBody>
+      </p:sp>
+      <p:sp>
+        <p:nvSpPr>
+          <p:cNvPr id="14" name="Rounded Rectangle 13"/>
+          <p:cNvSpPr/>
+          <p:nvPr/>
+        </p:nvSpPr>
+        <p:spPr>
+          <a:xfrm>
+            <a:off x="713232" y="3434225"/>
+            <a:ext cx="420624" cy="420624"/>
+          </a:xfrm>
+          <a:prstGeom prst="roundRect">
+            <a:avLst/>
+          </a:prstGeom>
+          <a:solidFill>
+            <a:srgbClr val="FFFFFF"/>
+          </a:solidFill>
+          <a:ln>
+            <a:solidFill>
+              <a:srgbClr val="CC4F3E"/>
+            </a:solidFill>
+          </a:ln>
+        </p:spPr>
+        <p:style>
+          <a:lnRef idx="1">
+            <a:schemeClr val="accent1"/>
+          </a:lnRef>
+          <a:fillRef idx="3">
+            <a:schemeClr val="accent1"/>
+          </a:fillRef>
+          <a:effectRef idx="2">
+            <a:schemeClr val="accent1"/>
+          </a:effectRef>
+          <a:fontRef idx="minor">
+            <a:schemeClr val="lt1"/>
+          </a:fontRef>
+        </p:style>
+        <p:txBody>
+          <a:bodyPr rtlCol="0" anchor="ctr"/>
+          <a:lstStyle/>
+          <a:p>
+            <a:pPr algn="ctr"/>
+          </a:p>
+        </p:txBody>
+      </p:sp>
+      <p:sp>
+        <p:nvSpPr>
+          <p:cNvPr id="15" name="TextBox 14"/>
+          <p:cNvSpPr txBox="1"/>
+          <p:nvPr/>
+        </p:nvSpPr>
+        <p:spPr>
+          <a:xfrm>
+            <a:off x="1389888" y="3415937"/>
+            <a:ext cx="9829800" cy="675349"/>
+          </a:xfrm>
+          <a:prstGeom prst="rect">
+            <a:avLst/>
+          </a:prstGeom>
+          <a:noFill/>
+        </p:spPr>
+        <p:txBody>
+          <a:bodyPr wrap="square" lIns="45720" rIns="45720" tIns="36576" bIns="36576" anchor="t">
+            <a:spAutoFit/>
+          </a:bodyPr>
+          <a:lstStyle/>
+          <a:p>
+            <a:pPr algn="l">
+              <a:defRPr sz="1600" b="0">
+                <a:solidFill>
+                  <a:srgbClr val="1C2330"/>
+                </a:solidFill>
+                <a:latin typeface="Aptos"/>
+              </a:defRPr>
+            </a:pPr>
+            <a:r>
+              <a:t>identifica una fortaleza y una capacidad por compensar;</a:t>
+            </a:r>
+          </a:p>
+        </p:txBody>
+      </p:sp>
+      <p:sp>
+        <p:nvSpPr>
+          <p:cNvPr id="16" name="Rounded Rectangle 15"/>
+          <p:cNvSpPr/>
+          <p:nvPr/>
+        </p:nvSpPr>
+        <p:spPr>
+          <a:xfrm>
+            <a:off x="713232" y="4146150"/>
+            <a:ext cx="420624" cy="420624"/>
+          </a:xfrm>
+          <a:prstGeom prst="roundRect">
+            <a:avLst/>
+          </a:prstGeom>
+          <a:solidFill>
+            <a:srgbClr val="FFFFFF"/>
+          </a:solidFill>
+          <a:ln>
+            <a:solidFill>
+              <a:srgbClr val="CC4F3E"/>
+            </a:solidFill>
+          </a:ln>
+        </p:spPr>
+        <p:style>
+          <a:lnRef idx="1">
+            <a:schemeClr val="accent1"/>
+          </a:lnRef>
+          <a:fillRef idx="3">
+            <a:schemeClr val="accent1"/>
+          </a:fillRef>
+          <a:effectRef idx="2">
+            <a:schemeClr val="accent1"/>
+          </a:effectRef>
+          <a:fontRef idx="minor">
+            <a:schemeClr val="lt1"/>
+          </a:fontRef>
+        </p:style>
+        <p:txBody>
+          <a:bodyPr rtlCol="0" anchor="ctr"/>
+          <a:lstStyle/>
+          <a:p>
+            <a:pPr algn="ctr"/>
+          </a:p>
+        </p:txBody>
+      </p:sp>
+      <p:sp>
+        <p:nvSpPr>
+          <p:cNvPr id="17" name="TextBox 16"/>
+          <p:cNvSpPr txBox="1"/>
+          <p:nvPr/>
+        </p:nvSpPr>
+        <p:spPr>
+          <a:xfrm>
+            <a:off x="1389888" y="4127862"/>
+            <a:ext cx="9829800" cy="675349"/>
+          </a:xfrm>
+          <a:prstGeom prst="rect">
+            <a:avLst/>
+          </a:prstGeom>
+          <a:noFill/>
+        </p:spPr>
+        <p:txBody>
+          <a:bodyPr wrap="square" lIns="45720" rIns="45720" tIns="36576" bIns="36576" anchor="t">
+            <a:spAutoFit/>
+          </a:bodyPr>
+          <a:lstStyle/>
+          <a:p>
+            <a:pPr algn="l">
+              <a:defRPr sz="1600" b="0">
+                <a:solidFill>
+                  <a:srgbClr val="1C2330"/>
+                </a:solidFill>
+                <a:latin typeface="Aptos"/>
+              </a:defRPr>
+            </a:pPr>
+            <a:r>
+              <a:t>cubre los cuatro focos operativos;</a:t>
+            </a:r>
+          </a:p>
+        </p:txBody>
+      </p:sp>
+      <p:sp>
+        <p:nvSpPr>
+          <p:cNvPr id="18" name="Rounded Rectangle 17"/>
+          <p:cNvSpPr/>
+          <p:nvPr/>
+        </p:nvSpPr>
+        <p:spPr>
+          <a:xfrm>
+            <a:off x="713232" y="4858076"/>
+            <a:ext cx="420624" cy="420624"/>
+          </a:xfrm>
+          <a:prstGeom prst="roundRect">
+            <a:avLst/>
+          </a:prstGeom>
+          <a:solidFill>
+            <a:srgbClr val="FFFFFF"/>
+          </a:solidFill>
+          <a:ln>
+            <a:solidFill>
+              <a:srgbClr val="CC4F3E"/>
+            </a:solidFill>
+          </a:ln>
+        </p:spPr>
+        <p:style>
+          <a:lnRef idx="1">
+            <a:schemeClr val="accent1"/>
+          </a:lnRef>
+          <a:fillRef idx="3">
+            <a:schemeClr val="accent1"/>
+          </a:fillRef>
+          <a:effectRef idx="2">
+            <a:schemeClr val="accent1"/>
+          </a:effectRef>
+          <a:fontRef idx="minor">
+            <a:schemeClr val="lt1"/>
+          </a:fontRef>
+        </p:style>
+        <p:txBody>
+          <a:bodyPr rtlCol="0" anchor="ctr"/>
+          <a:lstStyle/>
+          <a:p>
+            <a:pPr algn="ctr"/>
+          </a:p>
+        </p:txBody>
+      </p:sp>
+      <p:sp>
+        <p:nvSpPr>
+          <p:cNvPr id="19" name="TextBox 18"/>
+          <p:cNvSpPr txBox="1"/>
+          <p:nvPr/>
+        </p:nvSpPr>
+        <p:spPr>
+          <a:xfrm>
+            <a:off x="1389888" y="4839788"/>
+            <a:ext cx="9829800" cy="675349"/>
+          </a:xfrm>
+          <a:prstGeom prst="rect">
+            <a:avLst/>
+          </a:prstGeom>
+          <a:noFill/>
+        </p:spPr>
+        <p:txBody>
+          <a:bodyPr wrap="square" lIns="45720" rIns="45720" tIns="36576" bIns="36576" anchor="t">
+            <a:spAutoFit/>
+          </a:bodyPr>
+          <a:lstStyle/>
+          <a:p>
+            <a:pPr algn="l">
+              <a:defRPr sz="1600" b="0">
+                <a:solidFill>
+                  <a:srgbClr val="1C2330"/>
+                </a:solidFill>
+                <a:latin typeface="Aptos"/>
+              </a:defRPr>
+            </a:pPr>
+            <a:r>
+              <a:t>justifica quién inicia cada función;</a:t>
+            </a:r>
+          </a:p>
+        </p:txBody>
+      </p:sp>
+      <p:sp>
+        <p:nvSpPr>
+          <p:cNvPr id="20" name="Rounded Rectangle 19"/>
+          <p:cNvSpPr/>
+          <p:nvPr/>
+        </p:nvSpPr>
+        <p:spPr>
+          <a:xfrm>
+            <a:off x="713232" y="5570002"/>
+            <a:ext cx="420624" cy="420624"/>
+          </a:xfrm>
+          <a:prstGeom prst="roundRect">
+            <a:avLst/>
+          </a:prstGeom>
+          <a:solidFill>
+            <a:srgbClr val="FFFFFF"/>
+          </a:solidFill>
+          <a:ln>
+            <a:solidFill>
+              <a:srgbClr val="CC4F3E"/>
+            </a:solidFill>
+          </a:ln>
+        </p:spPr>
+        <p:style>
+          <a:lnRef idx="1">
+            <a:schemeClr val="accent1"/>
+          </a:lnRef>
+          <a:fillRef idx="3">
+            <a:schemeClr val="accent1"/>
+          </a:fillRef>
+          <a:effectRef idx="2">
+            <a:schemeClr val="accent1"/>
+          </a:effectRef>
+          <a:fontRef idx="minor">
+            <a:schemeClr val="lt1"/>
+          </a:fontRef>
+        </p:style>
+        <p:txBody>
+          <a:bodyPr rtlCol="0" anchor="ctr"/>
+          <a:lstStyle/>
+          <a:p>
+            <a:pPr algn="ctr"/>
+          </a:p>
+        </p:txBody>
+      </p:sp>
+      <p:sp>
+        <p:nvSpPr>
+          <p:cNvPr id="21" name="TextBox 20"/>
+          <p:cNvSpPr txBox="1"/>
+          <p:nvPr/>
+        </p:nvSpPr>
+        <p:spPr>
+          <a:xfrm>
+            <a:off x="1389888" y="5551714"/>
+            <a:ext cx="9829800" cy="675349"/>
+          </a:xfrm>
+          <a:prstGeom prst="rect">
+            <a:avLst/>
+          </a:prstGeom>
+          <a:noFill/>
+        </p:spPr>
+        <p:txBody>
+          <a:bodyPr wrap="square" lIns="45720" rIns="45720" tIns="36576" bIns="36576" anchor="t">
+            <a:spAutoFit/>
+          </a:bodyPr>
+          <a:lstStyle/>
+          <a:p>
+            <a:pPr algn="l">
+              <a:defRPr sz="1600" b="0">
+                <a:solidFill>
+                  <a:srgbClr val="1C2330"/>
+                </a:solidFill>
+                <a:latin typeface="Aptos"/>
+              </a:defRPr>
+            </a:pPr>
+            <a:r>
+              <a:t>todas las personas siguen participando en construcción y explicación;</a:t>
+            </a:r>
+          </a:p>
+        </p:txBody>
+      </p:sp>
+    </p:spTree>
+  </p:cSld>
+  <p:clrMapOvr>
+    <a:masterClrMapping/>
+  </p:clrMapOvr>
+</p:sld>
+</file>
+
+<file path=ppt/slides/slide12.xml><?xml version="1.0" encoding="utf-8"?>
+<p:sld xmlns:a="http://schemas.openxmlformats.org/drawingml/2006/main" xmlns:p="http://schemas.openxmlformats.org/presentationml/2006/main" xmlns:r="http://schemas.openxmlformats.org/officeDocument/2006/relationships">
+  <p:cSld>
+    <p:spTree>
+      <p:nvGrpSpPr>
+        <p:cNvPr id="1" name=""/>
+        <p:cNvGrpSpPr/>
+        <p:nvPr/>
+      </p:nvGrpSpPr>
+      <p:grpSpPr/>
+      <p:sp>
+        <p:nvSpPr>
+          <p:cNvPr id="2" name="Rectangle 1"/>
+          <p:cNvSpPr/>
+          <p:nvPr/>
+        </p:nvSpPr>
+        <p:spPr>
+          <a:xfrm>
+            <a:off x="0" y="0"/>
+            <a:ext cx="12191695" cy="6858000"/>
+          </a:xfrm>
+          <a:prstGeom prst="rect">
+            <a:avLst/>
+          </a:prstGeom>
+          <a:solidFill>
+            <a:srgbClr val="F9F7F2"/>
+          </a:solidFill>
+          <a:ln>
+            <a:noFill/>
+          </a:ln>
+        </p:spPr>
+        <p:style>
+          <a:lnRef idx="1">
+            <a:schemeClr val="accent1"/>
+          </a:lnRef>
+          <a:fillRef idx="3">
+            <a:schemeClr val="accent1"/>
+          </a:fillRef>
+          <a:effectRef idx="2">
+            <a:schemeClr val="accent1"/>
+          </a:effectRef>
+          <a:fontRef idx="minor">
+            <a:schemeClr val="lt1"/>
+          </a:fontRef>
+        </p:style>
+        <p:txBody>
+          <a:bodyPr rtlCol="0" anchor="ctr"/>
+          <a:lstStyle/>
+          <a:p>
+            <a:pPr algn="ctr"/>
+          </a:p>
+        </p:txBody>
+      </p:sp>
+      <p:sp>
+        <p:nvSpPr>
+          <p:cNvPr id="3" name="Rectangle 2"/>
+          <p:cNvSpPr/>
+          <p:nvPr/>
+        </p:nvSpPr>
+        <p:spPr>
+          <a:xfrm>
+            <a:off x="0" y="0"/>
+            <a:ext cx="164592" cy="6858000"/>
+          </a:xfrm>
+          <a:prstGeom prst="rect">
+            <a:avLst/>
+          </a:prstGeom>
+          <a:solidFill>
+            <a:srgbClr val="CC4F3E"/>
+          </a:solidFill>
+          <a:ln>
+            <a:noFill/>
+          </a:ln>
+        </p:spPr>
+        <p:style>
+          <a:lnRef idx="1">
+            <a:schemeClr val="accent1"/>
+          </a:lnRef>
+          <a:fillRef idx="3">
+            <a:schemeClr val="accent1"/>
+          </a:fillRef>
+          <a:effectRef idx="2">
+            <a:schemeClr val="accent1"/>
+          </a:effectRef>
+          <a:fontRef idx="minor">
+            <a:schemeClr val="lt1"/>
+          </a:fontRef>
+        </p:style>
+        <p:txBody>
+          <a:bodyPr rtlCol="0" anchor="ctr"/>
+          <a:lstStyle/>
+          <a:p>
+            <a:pPr algn="ctr"/>
+          </a:p>
+        </p:txBody>
+      </p:sp>
+      <p:sp>
+        <p:nvSpPr>
+          <p:cNvPr id="4" name="TextBox 3"/>
+          <p:cNvSpPr txBox="1"/>
+          <p:nvPr/>
+        </p:nvSpPr>
+        <p:spPr>
+          <a:xfrm>
+            <a:off x="502920" y="274320"/>
+            <a:ext cx="5486400" cy="256032"/>
+          </a:xfrm>
+          <a:prstGeom prst="rect">
+            <a:avLst/>
+          </a:prstGeom>
+          <a:noFill/>
+        </p:spPr>
+        <p:txBody>
+          <a:bodyPr wrap="square" lIns="45720" rIns="45720" tIns="36576" bIns="36576" anchor="t">
+            <a:spAutoFit/>
+          </a:bodyPr>
+          <a:lstStyle/>
+          <a:p>
+            <a:pPr algn="l">
+              <a:defRPr sz="1000" b="1">
+                <a:solidFill>
+                  <a:srgbClr val="CC4F3E"/>
+                </a:solidFill>
+                <a:latin typeface="Aptos"/>
+              </a:defRPr>
+            </a:pPr>
+            <a:r>
+              <a:t>COMPROBAR</a:t>
+            </a:r>
+          </a:p>
+        </p:txBody>
+      </p:sp>
+      <p:sp>
+        <p:nvSpPr>
+          <p:cNvPr id="5" name="TextBox 4"/>
+          <p:cNvSpPr txBox="1"/>
+          <p:nvPr/>
+        </p:nvSpPr>
+        <p:spPr>
+          <a:xfrm>
+            <a:off x="502920" y="603504"/>
+            <a:ext cx="11064240" cy="530352"/>
+          </a:xfrm>
+          <a:prstGeom prst="rect">
+            <a:avLst/>
+          </a:prstGeom>
+          <a:noFill/>
+        </p:spPr>
+        <p:txBody>
+          <a:bodyPr wrap="square" lIns="45720" rIns="45720" tIns="36576" bIns="36576" anchor="t">
+            <a:spAutoFit/>
+          </a:bodyPr>
+          <a:lstStyle/>
+          <a:p>
+            <a:pPr algn="l">
+              <a:defRPr sz="2800" b="1">
+                <a:solidFill>
+                  <a:srgbClr val="1C2330"/>
+                </a:solidFill>
+                <a:latin typeface="Aptos"/>
+              </a:defRPr>
+            </a:pPr>
+            <a:r>
+              <a:t>Evidencia y comprobación · 2</a:t>
+            </a:r>
+          </a:p>
+        </p:txBody>
+      </p:sp>
+      <p:sp>
+        <p:nvSpPr>
+          <p:cNvPr id="6" name="Rectangle 5"/>
+          <p:cNvSpPr/>
+          <p:nvPr/>
+        </p:nvSpPr>
+        <p:spPr>
+          <a:xfrm>
+            <a:off x="0" y="6601968"/>
+            <a:ext cx="12191695" cy="256032"/>
+          </a:xfrm>
+          <a:prstGeom prst="rect">
+            <a:avLst/>
+          </a:prstGeom>
+          <a:solidFill>
+            <a:srgbClr val="CC4F3E"/>
+          </a:solidFill>
+          <a:ln>
+            <a:noFill/>
+          </a:ln>
+        </p:spPr>
+        <p:style>
+          <a:lnRef idx="1">
+            <a:schemeClr val="accent1"/>
+          </a:lnRef>
+          <a:fillRef idx="3">
+            <a:schemeClr val="accent1"/>
+          </a:fillRef>
+          <a:effectRef idx="2">
+            <a:schemeClr val="accent1"/>
+          </a:effectRef>
+          <a:fontRef idx="minor">
+            <a:schemeClr val="lt1"/>
+          </a:fontRef>
+        </p:style>
+        <p:txBody>
+          <a:bodyPr rtlCol="0" anchor="ctr"/>
+          <a:lstStyle/>
+          <a:p>
+            <a:pPr algn="ctr"/>
+          </a:p>
+        </p:txBody>
+      </p:sp>
+      <p:sp>
+        <p:nvSpPr>
+          <p:cNvPr id="7" name="TextBox 6"/>
+          <p:cNvSpPr txBox="1"/>
+          <p:nvPr/>
+        </p:nvSpPr>
+        <p:spPr>
+          <a:xfrm>
+            <a:off x="411480" y="6629400"/>
+            <a:ext cx="11247120" cy="164592"/>
+          </a:xfrm>
+          <a:prstGeom prst="rect">
+            <a:avLst/>
+          </a:prstGeom>
+          <a:noFill/>
+        </p:spPr>
+        <p:txBody>
+          <a:bodyPr wrap="square" lIns="45720" rIns="45720" tIns="36576" bIns="36576" anchor="t">
+            <a:spAutoFit/>
+          </a:bodyPr>
+          <a:lstStyle/>
+          <a:p>
+            <a:pPr algn="l">
+              <a:defRPr sz="900" b="0">
+                <a:solidFill>
+                  <a:srgbClr val="FFFFFF"/>
+                </a:solidFill>
+                <a:latin typeface="Aptos"/>
+              </a:defRPr>
+            </a:pPr>
+            <a:r>
+              <a:t>MiniJarvis · 1.º DAW · Sesión 203 · H0 — Formación y prueba de equipos Scrum mediante la torre de papel</a:t>
+            </a:r>
+          </a:p>
+        </p:txBody>
+      </p:sp>
+      <p:sp>
+        <p:nvSpPr>
+          <p:cNvPr id="8" name="Rounded Rectangle 7"/>
+          <p:cNvSpPr/>
+          <p:nvPr/>
+        </p:nvSpPr>
+        <p:spPr>
+          <a:xfrm>
+            <a:off x="713232" y="1298448"/>
+            <a:ext cx="420624" cy="420624"/>
+          </a:xfrm>
+          <a:prstGeom prst="roundRect">
+            <a:avLst/>
+          </a:prstGeom>
+          <a:solidFill>
+            <a:srgbClr val="FFFFFF"/>
+          </a:solidFill>
+          <a:ln>
+            <a:solidFill>
+              <a:srgbClr val="CC4F3E"/>
+            </a:solidFill>
+          </a:ln>
+        </p:spPr>
+        <p:style>
+          <a:lnRef idx="1">
+            <a:schemeClr val="accent1"/>
+          </a:lnRef>
+          <a:fillRef idx="3">
+            <a:schemeClr val="accent1"/>
+          </a:fillRef>
+          <a:effectRef idx="2">
+            <a:schemeClr val="accent1"/>
+          </a:effectRef>
+          <a:fontRef idx="minor">
+            <a:schemeClr val="lt1"/>
+          </a:fontRef>
+        </p:style>
+        <p:txBody>
+          <a:bodyPr rtlCol="0" anchor="ctr"/>
+          <a:lstStyle/>
+          <a:p>
+            <a:pPr algn="ctr"/>
+          </a:p>
+        </p:txBody>
+      </p:sp>
+      <p:sp>
+        <p:nvSpPr>
+          <p:cNvPr id="9" name="TextBox 8"/>
+          <p:cNvSpPr txBox="1"/>
+          <p:nvPr/>
+        </p:nvSpPr>
+        <p:spPr>
+          <a:xfrm>
+            <a:off x="1389888" y="1280160"/>
+            <a:ext cx="9829800" cy="1624584"/>
+          </a:xfrm>
+          <a:prstGeom prst="rect">
+            <a:avLst/>
+          </a:prstGeom>
+          <a:noFill/>
+        </p:spPr>
+        <p:txBody>
+          <a:bodyPr wrap="square" lIns="45720" rIns="45720" tIns="36576" bIns="36576" anchor="t">
+            <a:spAutoFit/>
+          </a:bodyPr>
+          <a:lstStyle/>
+          <a:p>
+            <a:pPr algn="l">
+              <a:defRPr sz="1900" b="0">
+                <a:solidFill>
+                  <a:srgbClr val="1C2330"/>
+                </a:solidFill>
+                <a:latin typeface="Aptos"/>
+              </a:defRPr>
+            </a:pPr>
+            <a:r>
+              <a:t>existe un backlog mínimo de seis tareas;</a:t>
+            </a:r>
+          </a:p>
+        </p:txBody>
+      </p:sp>
+      <p:sp>
+        <p:nvSpPr>
+          <p:cNvPr id="10" name="Rounded Rectangle 9"/>
+          <p:cNvSpPr/>
+          <p:nvPr/>
+        </p:nvSpPr>
+        <p:spPr>
+          <a:xfrm>
+            <a:off x="713232" y="2959607"/>
+            <a:ext cx="420624" cy="420624"/>
+          </a:xfrm>
+          <a:prstGeom prst="roundRect">
+            <a:avLst/>
+          </a:prstGeom>
+          <a:solidFill>
+            <a:srgbClr val="FFFFFF"/>
+          </a:solidFill>
+          <a:ln>
+            <a:solidFill>
+              <a:srgbClr val="CC4F3E"/>
+            </a:solidFill>
+          </a:ln>
+        </p:spPr>
+        <p:style>
+          <a:lnRef idx="1">
+            <a:schemeClr val="accent1"/>
+          </a:lnRef>
+          <a:fillRef idx="3">
+            <a:schemeClr val="accent1"/>
+          </a:fillRef>
+          <a:effectRef idx="2">
+            <a:schemeClr val="accent1"/>
+          </a:effectRef>
+          <a:fontRef idx="minor">
+            <a:schemeClr val="lt1"/>
+          </a:fontRef>
+        </p:style>
+        <p:txBody>
+          <a:bodyPr rtlCol="0" anchor="ctr"/>
+          <a:lstStyle/>
+          <a:p>
+            <a:pPr algn="ctr"/>
+          </a:p>
+        </p:txBody>
+      </p:sp>
+      <p:sp>
+        <p:nvSpPr>
+          <p:cNvPr id="11" name="TextBox 10"/>
+          <p:cNvSpPr txBox="1"/>
+          <p:nvPr/>
+        </p:nvSpPr>
+        <p:spPr>
+          <a:xfrm>
+            <a:off x="1389888" y="2941319"/>
+            <a:ext cx="9829800" cy="1624584"/>
+          </a:xfrm>
+          <a:prstGeom prst="rect">
+            <a:avLst/>
+          </a:prstGeom>
+          <a:noFill/>
+        </p:spPr>
+        <p:txBody>
+          <a:bodyPr wrap="square" lIns="45720" rIns="45720" tIns="36576" bIns="36576" anchor="t">
+            <a:spAutoFit/>
+          </a:bodyPr>
+          <a:lstStyle/>
+          <a:p>
+            <a:pPr algn="l">
+              <a:defRPr sz="1900" b="0">
+                <a:solidFill>
+                  <a:srgbClr val="1C2330"/>
+                </a:solidFill>
+                <a:latin typeface="Aptos"/>
+              </a:defRPr>
+            </a:pPr>
+            <a:r>
+              <a:t>existe una definición verificable de terminado;</a:t>
+            </a:r>
+          </a:p>
+        </p:txBody>
+      </p:sp>
+      <p:sp>
+        <p:nvSpPr>
+          <p:cNvPr id="12" name="Rounded Rectangle 11"/>
+          <p:cNvSpPr/>
+          <p:nvPr/>
+        </p:nvSpPr>
+        <p:spPr>
+          <a:xfrm>
+            <a:off x="713232" y="4620767"/>
+            <a:ext cx="420624" cy="420624"/>
+          </a:xfrm>
+          <a:prstGeom prst="roundRect">
+            <a:avLst/>
+          </a:prstGeom>
+          <a:solidFill>
+            <a:srgbClr val="FFFFFF"/>
+          </a:solidFill>
+          <a:ln>
+            <a:solidFill>
+              <a:srgbClr val="CC4F3E"/>
+            </a:solidFill>
+          </a:ln>
+        </p:spPr>
+        <p:style>
+          <a:lnRef idx="1">
+            <a:schemeClr val="accent1"/>
+          </a:lnRef>
+          <a:fillRef idx="3">
+            <a:schemeClr val="accent1"/>
+          </a:fillRef>
+          <a:effectRef idx="2">
+            <a:schemeClr val="accent1"/>
+          </a:effectRef>
+          <a:fontRef idx="minor">
+            <a:schemeClr val="lt1"/>
+          </a:fontRef>
+        </p:style>
+        <p:txBody>
+          <a:bodyPr rtlCol="0" anchor="ctr"/>
+          <a:lstStyle/>
+          <a:p>
+            <a:pPr algn="ctr"/>
+          </a:p>
+        </p:txBody>
+      </p:sp>
+      <p:sp>
+        <p:nvSpPr>
+          <p:cNvPr id="13" name="TextBox 12"/>
+          <p:cNvSpPr txBox="1"/>
+          <p:nvPr/>
+        </p:nvSpPr>
+        <p:spPr>
+          <a:xfrm>
+            <a:off x="1389888" y="4602480"/>
+            <a:ext cx="9829800" cy="1624584"/>
+          </a:xfrm>
+          <a:prstGeom prst="rect">
+            <a:avLst/>
+          </a:prstGeom>
+          <a:noFill/>
+        </p:spPr>
+        <p:txBody>
+          <a:bodyPr wrap="square" lIns="45720" rIns="45720" tIns="36576" bIns="36576" anchor="t">
+            <a:spAutoFit/>
+          </a:bodyPr>
+          <a:lstStyle/>
+          <a:p>
+            <a:pPr algn="l">
+              <a:defRPr sz="1900" b="0">
+                <a:solidFill>
+                  <a:srgbClr val="1C2330"/>
+                </a:solidFill>
+                <a:latin typeface="Aptos"/>
+              </a:defRPr>
+            </a:pPr>
+            <a:r>
+              <a:t>cada persona ha registrado una conducta observable asociada a su responsabilidad.</a:t>
+            </a:r>
+          </a:p>
+        </p:txBody>
+      </p:sp>
+    </p:spTree>
+  </p:cSld>
+  <p:clrMapOvr>
+    <a:masterClrMapping/>
+  </p:clrMapOvr>
+</p:sld>
+</file>
+
+<file path=ppt/slides/slide13.xml><?xml version="1.0" encoding="utf-8"?>
+<p:sld xmlns:a="http://schemas.openxmlformats.org/drawingml/2006/main" xmlns:p="http://schemas.openxmlformats.org/presentationml/2006/main" xmlns:r="http://schemas.openxmlformats.org/officeDocument/2006/relationships">
+  <p:cSld>
+    <p:spTree>
+      <p:nvGrpSpPr>
+        <p:cNvPr id="1" name=""/>
+        <p:cNvGrpSpPr/>
+        <p:nvPr/>
+      </p:nvGrpSpPr>
+      <p:grpSpPr/>
+      <p:sp>
+        <p:nvSpPr>
+          <p:cNvPr id="2" name="Rectangle 1"/>
+          <p:cNvSpPr/>
+          <p:nvPr/>
+        </p:nvSpPr>
+        <p:spPr>
+          <a:xfrm>
+            <a:off x="0" y="0"/>
+            <a:ext cx="12191695" cy="6858000"/>
+          </a:xfrm>
+          <a:prstGeom prst="rect">
+            <a:avLst/>
+          </a:prstGeom>
+          <a:solidFill>
+            <a:srgbClr val="F9F7F2"/>
+          </a:solidFill>
+          <a:ln>
+            <a:noFill/>
+          </a:ln>
+        </p:spPr>
+        <p:style>
+          <a:lnRef idx="1">
+            <a:schemeClr val="accent1"/>
+          </a:lnRef>
+          <a:fillRef idx="3">
+            <a:schemeClr val="accent1"/>
+          </a:fillRef>
+          <a:effectRef idx="2">
+            <a:schemeClr val="accent1"/>
+          </a:effectRef>
+          <a:fontRef idx="minor">
+            <a:schemeClr val="lt1"/>
+          </a:fontRef>
+        </p:style>
+        <p:txBody>
+          <a:bodyPr rtlCol="0" anchor="ctr"/>
+          <a:lstStyle/>
+          <a:p>
+            <a:pPr algn="ctr"/>
+          </a:p>
+        </p:txBody>
+      </p:sp>
+      <p:sp>
+        <p:nvSpPr>
+          <p:cNvPr id="3" name="Rectangle 2"/>
+          <p:cNvSpPr/>
+          <p:nvPr/>
+        </p:nvSpPr>
+        <p:spPr>
+          <a:xfrm>
+            <a:off x="0" y="0"/>
+            <a:ext cx="164592" cy="6858000"/>
+          </a:xfrm>
+          <a:prstGeom prst="rect">
+            <a:avLst/>
+          </a:prstGeom>
+          <a:solidFill>
+            <a:srgbClr val="CC4F3E"/>
+          </a:solidFill>
+          <a:ln>
+            <a:noFill/>
+          </a:ln>
+        </p:spPr>
+        <p:style>
+          <a:lnRef idx="1">
+            <a:schemeClr val="accent1"/>
+          </a:lnRef>
+          <a:fillRef idx="3">
+            <a:schemeClr val="accent1"/>
+          </a:fillRef>
+          <a:effectRef idx="2">
+            <a:schemeClr val="accent1"/>
+          </a:effectRef>
+          <a:fontRef idx="minor">
+            <a:schemeClr val="lt1"/>
+          </a:fontRef>
+        </p:style>
+        <p:txBody>
+          <a:bodyPr rtlCol="0" anchor="ctr"/>
+          <a:lstStyle/>
+          <a:p>
+            <a:pPr algn="ctr"/>
+          </a:p>
+        </p:txBody>
+      </p:sp>
+      <p:sp>
+        <p:nvSpPr>
+          <p:cNvPr id="4" name="TextBox 3"/>
+          <p:cNvSpPr txBox="1"/>
+          <p:nvPr/>
+        </p:nvSpPr>
+        <p:spPr>
+          <a:xfrm>
+            <a:off x="502920" y="274320"/>
+            <a:ext cx="5486400" cy="256032"/>
+          </a:xfrm>
+          <a:prstGeom prst="rect">
+            <a:avLst/>
+          </a:prstGeom>
+          <a:noFill/>
+        </p:spPr>
+        <p:txBody>
+          <a:bodyPr wrap="square" lIns="45720" rIns="45720" tIns="36576" bIns="36576" anchor="t">
+            <a:spAutoFit/>
+          </a:bodyPr>
+          <a:lstStyle/>
+          <a:p>
+            <a:pPr algn="l">
+              <a:defRPr sz="1000" b="1">
+                <a:solidFill>
+                  <a:srgbClr val="CC4F3E"/>
+                </a:solidFill>
+                <a:latin typeface="Aptos"/>
+              </a:defRPr>
+            </a:pPr>
+            <a:r>
+              <a:t>LÍMITES QUE PROTEGEN EL APRENDIZAJE</a:t>
+            </a:r>
+          </a:p>
+        </p:txBody>
+      </p:sp>
+      <p:sp>
+        <p:nvSpPr>
+          <p:cNvPr id="5" name="TextBox 4"/>
+          <p:cNvSpPr txBox="1"/>
+          <p:nvPr/>
+        </p:nvSpPr>
+        <p:spPr>
+          <a:xfrm>
+            <a:off x="502920" y="603504"/>
+            <a:ext cx="11064240" cy="530352"/>
+          </a:xfrm>
+          <a:prstGeom prst="rect">
+            <a:avLst/>
+          </a:prstGeom>
+          <a:noFill/>
+        </p:spPr>
+        <p:txBody>
+          <a:bodyPr wrap="square" lIns="45720" rIns="45720" tIns="36576" bIns="36576" anchor="t">
+            <a:spAutoFit/>
+          </a:bodyPr>
+          <a:lstStyle/>
+          <a:p>
+            <a:pPr algn="l">
+              <a:defRPr sz="2800" b="1">
+                <a:solidFill>
+                  <a:srgbClr val="1C2330"/>
+                </a:solidFill>
+                <a:latin typeface="Aptos"/>
+              </a:defRPr>
+            </a:pPr>
+            <a:r>
+              <a:t>Seguridad y uso responsable</a:t>
+            </a:r>
+          </a:p>
+        </p:txBody>
+      </p:sp>
+      <p:sp>
+        <p:nvSpPr>
+          <p:cNvPr id="6" name="Rectangle 5"/>
+          <p:cNvSpPr/>
+          <p:nvPr/>
+        </p:nvSpPr>
+        <p:spPr>
+          <a:xfrm>
+            <a:off x="0" y="6601968"/>
+            <a:ext cx="12191695" cy="256032"/>
+          </a:xfrm>
+          <a:prstGeom prst="rect">
+            <a:avLst/>
+          </a:prstGeom>
+          <a:solidFill>
+            <a:srgbClr val="CC4F3E"/>
+          </a:solidFill>
+          <a:ln>
+            <a:noFill/>
+          </a:ln>
+        </p:spPr>
+        <p:style>
+          <a:lnRef idx="1">
+            <a:schemeClr val="accent1"/>
+          </a:lnRef>
+          <a:fillRef idx="3">
+            <a:schemeClr val="accent1"/>
+          </a:fillRef>
+          <a:effectRef idx="2">
+            <a:schemeClr val="accent1"/>
+          </a:effectRef>
+          <a:fontRef idx="minor">
+            <a:schemeClr val="lt1"/>
+          </a:fontRef>
+        </p:style>
+        <p:txBody>
+          <a:bodyPr rtlCol="0" anchor="ctr"/>
+          <a:lstStyle/>
+          <a:p>
+            <a:pPr algn="ctr"/>
+          </a:p>
+        </p:txBody>
+      </p:sp>
+      <p:sp>
+        <p:nvSpPr>
+          <p:cNvPr id="7" name="TextBox 6"/>
+          <p:cNvSpPr txBox="1"/>
+          <p:nvPr/>
+        </p:nvSpPr>
+        <p:spPr>
+          <a:xfrm>
+            <a:off x="411480" y="6629400"/>
+            <a:ext cx="11247120" cy="164592"/>
+          </a:xfrm>
+          <a:prstGeom prst="rect">
+            <a:avLst/>
+          </a:prstGeom>
+          <a:noFill/>
+        </p:spPr>
+        <p:txBody>
+          <a:bodyPr wrap="square" lIns="45720" rIns="45720" tIns="36576" bIns="36576" anchor="t">
+            <a:spAutoFit/>
+          </a:bodyPr>
+          <a:lstStyle/>
+          <a:p>
+            <a:pPr algn="l">
+              <a:defRPr sz="900" b="0">
+                <a:solidFill>
+                  <a:srgbClr val="FFFFFF"/>
+                </a:solidFill>
+                <a:latin typeface="Aptos"/>
+              </a:defRPr>
+            </a:pPr>
+            <a:r>
+              <a:t>MiniJarvis · 1.º DAW · Sesión 203 · H0 — Formación y prueba de equipos Scrum mediante la torre de papel</a:t>
+            </a:r>
+          </a:p>
+        </p:txBody>
+      </p:sp>
+      <p:sp>
+        <p:nvSpPr>
+          <p:cNvPr id="8" name="Rounded Rectangle 7"/>
+          <p:cNvSpPr/>
+          <p:nvPr/>
+        </p:nvSpPr>
+        <p:spPr>
+          <a:xfrm>
+            <a:off x="621792" y="1298448"/>
+            <a:ext cx="5230368" cy="4553712"/>
+          </a:xfrm>
+          <a:prstGeom prst="roundRect">
+            <a:avLst/>
+          </a:prstGeom>
+          <a:solidFill>
+            <a:srgbClr val="FFFFFF"/>
+          </a:solidFill>
+          <a:ln>
+            <a:solidFill>
+              <a:srgbClr val="E5E9EF"/>
+            </a:solidFill>
+          </a:ln>
+        </p:spPr>
+        <p:style>
+          <a:lnRef idx="1">
+            <a:schemeClr val="accent1"/>
+          </a:lnRef>
+          <a:fillRef idx="3">
+            <a:schemeClr val="accent1"/>
+          </a:fillRef>
+          <a:effectRef idx="2">
+            <a:schemeClr val="accent1"/>
+          </a:effectRef>
+          <a:fontRef idx="minor">
+            <a:schemeClr val="lt1"/>
+          </a:fontRef>
+        </p:style>
+        <p:txBody>
+          <a:bodyPr rtlCol="0" anchor="ctr"/>
+          <a:lstStyle/>
+          <a:p>
+            <a:pPr algn="ctr"/>
+          </a:p>
+        </p:txBody>
+      </p:sp>
+      <p:sp>
+        <p:nvSpPr>
+          <p:cNvPr id="9" name="Rounded Rectangle 8"/>
+          <p:cNvSpPr/>
+          <p:nvPr/>
+        </p:nvSpPr>
+        <p:spPr>
+          <a:xfrm>
+            <a:off x="841248" y="1527048"/>
+            <a:ext cx="237744" cy="4096512"/>
+          </a:xfrm>
+          <a:prstGeom prst="roundRect">
+            <a:avLst/>
+          </a:prstGeom>
+          <a:solidFill>
+            <a:srgbClr val="247E5C"/>
+          </a:solidFill>
+          <a:ln>
+            <a:noFill/>
+          </a:ln>
+        </p:spPr>
+        <p:style>
+          <a:lnRef idx="1">
+            <a:schemeClr val="accent1"/>
+          </a:lnRef>
+          <a:fillRef idx="3">
+            <a:schemeClr val="accent1"/>
+          </a:fillRef>
+          <a:effectRef idx="2">
+            <a:schemeClr val="accent1"/>
+          </a:effectRef>
+          <a:fontRef idx="minor">
+            <a:schemeClr val="lt1"/>
+          </a:fontRef>
+        </p:style>
+        <p:txBody>
+          <a:bodyPr rtlCol="0" anchor="ctr"/>
+          <a:lstStyle/>
+          <a:p>
+            <a:pPr algn="ctr"/>
+          </a:p>
+        </p:txBody>
+      </p:sp>
+      <p:sp>
+        <p:nvSpPr>
+          <p:cNvPr id="10" name="TextBox 9"/>
+          <p:cNvSpPr txBox="1"/>
+          <p:nvPr/>
+        </p:nvSpPr>
+        <p:spPr>
+          <a:xfrm>
+            <a:off x="1280160" y="1527048"/>
+            <a:ext cx="4224528" cy="4160520"/>
+          </a:xfrm>
+          <a:prstGeom prst="rect">
+            <a:avLst/>
+          </a:prstGeom>
+          <a:noFill/>
+        </p:spPr>
+        <p:txBody>
+          <a:bodyPr wrap="square" lIns="45720" rIns="45720" tIns="36576" bIns="36576" anchor="t">
+            <a:spAutoFit/>
+          </a:bodyPr>
+          <a:lstStyle/>
+          <a:p>
+            <a:pPr algn="l">
+              <a:defRPr sz="1900" b="0">
+                <a:solidFill>
+                  <a:srgbClr val="1C2330"/>
+                </a:solidFill>
+                <a:latin typeface="Aptos"/>
+              </a:defRPr>
+            </a:pPr>
+            <a:r>
+              <a:t>Nadie tiene que publicar sus puntuaciones HADA.</a:t>
+            </a:r>
+          </a:p>
+        </p:txBody>
+      </p:sp>
+      <p:sp>
+        <p:nvSpPr>
+          <p:cNvPr id="11" name="Rounded Rectangle 10"/>
+          <p:cNvSpPr/>
+          <p:nvPr/>
+        </p:nvSpPr>
+        <p:spPr>
+          <a:xfrm>
+            <a:off x="6126479" y="1298448"/>
+            <a:ext cx="5230368" cy="4553712"/>
+          </a:xfrm>
+          <a:prstGeom prst="roundRect">
+            <a:avLst/>
+          </a:prstGeom>
+          <a:solidFill>
+            <a:srgbClr val="FFFFFF"/>
+          </a:solidFill>
+          <a:ln>
+            <a:solidFill>
+              <a:srgbClr val="E5E9EF"/>
+            </a:solidFill>
+          </a:ln>
+        </p:spPr>
+        <p:style>
+          <a:lnRef idx="1">
+            <a:schemeClr val="accent1"/>
+          </a:lnRef>
+          <a:fillRef idx="3">
+            <a:schemeClr val="accent1"/>
+          </a:fillRef>
+          <a:effectRef idx="2">
+            <a:schemeClr val="accent1"/>
+          </a:effectRef>
+          <a:fontRef idx="minor">
+            <a:schemeClr val="lt1"/>
+          </a:fontRef>
+        </p:style>
+        <p:txBody>
+          <a:bodyPr rtlCol="0" anchor="ctr"/>
+          <a:lstStyle/>
+          <a:p>
+            <a:pPr algn="ctr"/>
+          </a:p>
+        </p:txBody>
+      </p:sp>
+      <p:sp>
+        <p:nvSpPr>
+          <p:cNvPr id="12" name="Rounded Rectangle 11"/>
+          <p:cNvSpPr/>
+          <p:nvPr/>
+        </p:nvSpPr>
+        <p:spPr>
+          <a:xfrm>
+            <a:off x="6345936" y="1527048"/>
+            <a:ext cx="237744" cy="4096512"/>
+          </a:xfrm>
+          <a:prstGeom prst="roundRect">
+            <a:avLst/>
+          </a:prstGeom>
+          <a:solidFill>
+            <a:srgbClr val="C07020"/>
+          </a:solidFill>
+          <a:ln>
+            <a:noFill/>
+          </a:ln>
+        </p:spPr>
+        <p:style>
+          <a:lnRef idx="1">
+            <a:schemeClr val="accent1"/>
+          </a:lnRef>
+          <a:fillRef idx="3">
+            <a:schemeClr val="accent1"/>
+          </a:fillRef>
+          <a:effectRef idx="2">
+            <a:schemeClr val="accent1"/>
+          </a:effectRef>
+          <a:fontRef idx="minor">
+            <a:schemeClr val="lt1"/>
+          </a:fontRef>
+        </p:style>
+        <p:txBody>
+          <a:bodyPr rtlCol="0" anchor="ctr"/>
+          <a:lstStyle/>
+          <a:p>
+            <a:pPr algn="ctr"/>
+          </a:p>
+        </p:txBody>
+      </p:sp>
+      <p:sp>
+        <p:nvSpPr>
+          <p:cNvPr id="13" name="TextBox 12"/>
+          <p:cNvSpPr txBox="1"/>
+          <p:nvPr/>
+        </p:nvSpPr>
+        <p:spPr>
+          <a:xfrm>
+            <a:off x="6784847" y="1527048"/>
+            <a:ext cx="4224528" cy="4160520"/>
+          </a:xfrm>
+          <a:prstGeom prst="rect">
+            <a:avLst/>
+          </a:prstGeom>
+          <a:noFill/>
+        </p:spPr>
+        <p:txBody>
+          <a:bodyPr wrap="square" lIns="45720" rIns="45720" tIns="36576" bIns="36576" anchor="t">
+            <a:spAutoFit/>
+          </a:bodyPr>
+          <a:lstStyle/>
+          <a:p>
+            <a:pPr algn="l">
+              <a:defRPr sz="1900" b="0">
+                <a:solidFill>
+                  <a:srgbClr val="1C2330"/>
+                </a:solidFill>
+                <a:latin typeface="Aptos"/>
+              </a:defRPr>
+            </a:pPr>
+            <a:r>
+              <a:t>Todas las personas participarán en diseño, construcción, prueba y explicación.</a:t>
+            </a:r>
+          </a:p>
+        </p:txBody>
+      </p:sp>
+    </p:spTree>
+  </p:cSld>
+  <p:clrMapOvr>
+    <a:masterClrMapping/>
+  </p:clrMapOvr>
+</p:sld>
+</file>
+
+<file path=ppt/slides/slide14.xml><?xml version="1.0" encoding="utf-8"?>
+<p:sld xmlns:a="http://schemas.openxmlformats.org/drawingml/2006/main" xmlns:p="http://schemas.openxmlformats.org/presentationml/2006/main" xmlns:r="http://schemas.openxmlformats.org/officeDocument/2006/relationships">
+  <p:cSld>
+    <p:spTree>
+      <p:nvGrpSpPr>
+        <p:cNvPr id="1" name=""/>
+        <p:cNvGrpSpPr/>
+        <p:nvPr/>
+      </p:nvGrpSpPr>
+      <p:grpSpPr/>
+      <p:sp>
+        <p:nvSpPr>
+          <p:cNvPr id="2" name="Rectangle 1"/>
+          <p:cNvSpPr/>
+          <p:nvPr/>
+        </p:nvSpPr>
+        <p:spPr>
+          <a:xfrm>
+            <a:off x="0" y="0"/>
+            <a:ext cx="12191695" cy="6858000"/>
+          </a:xfrm>
+          <a:prstGeom prst="rect">
+            <a:avLst/>
+          </a:prstGeom>
+          <a:solidFill>
+            <a:srgbClr val="F9F7F2"/>
+          </a:solidFill>
+          <a:ln>
+            <a:noFill/>
+          </a:ln>
+        </p:spPr>
+        <p:style>
+          <a:lnRef idx="1">
+            <a:schemeClr val="accent1"/>
+          </a:lnRef>
+          <a:fillRef idx="3">
+            <a:schemeClr val="accent1"/>
+          </a:fillRef>
+          <a:effectRef idx="2">
+            <a:schemeClr val="accent1"/>
+          </a:effectRef>
+          <a:fontRef idx="minor">
+            <a:schemeClr val="lt1"/>
+          </a:fontRef>
+        </p:style>
+        <p:txBody>
+          <a:bodyPr rtlCol="0" anchor="ctr"/>
+          <a:lstStyle/>
+          <a:p>
+            <a:pPr algn="ctr"/>
+          </a:p>
+        </p:txBody>
+      </p:sp>
+      <p:sp>
+        <p:nvSpPr>
+          <p:cNvPr id="3" name="Rectangle 2"/>
+          <p:cNvSpPr/>
+          <p:nvPr/>
+        </p:nvSpPr>
+        <p:spPr>
+          <a:xfrm>
+            <a:off x="0" y="0"/>
+            <a:ext cx="164592" cy="6858000"/>
+          </a:xfrm>
+          <a:prstGeom prst="rect">
+            <a:avLst/>
+          </a:prstGeom>
+          <a:solidFill>
+            <a:srgbClr val="CC4F3E"/>
+          </a:solidFill>
+          <a:ln>
+            <a:noFill/>
+          </a:ln>
+        </p:spPr>
+        <p:style>
+          <a:lnRef idx="1">
+            <a:schemeClr val="accent1"/>
+          </a:lnRef>
+          <a:fillRef idx="3">
+            <a:schemeClr val="accent1"/>
+          </a:fillRef>
+          <a:effectRef idx="2">
+            <a:schemeClr val="accent1"/>
+          </a:effectRef>
+          <a:fontRef idx="minor">
+            <a:schemeClr val="lt1"/>
+          </a:fontRef>
+        </p:style>
+        <p:txBody>
+          <a:bodyPr rtlCol="0" anchor="ctr"/>
+          <a:lstStyle/>
+          <a:p>
+            <a:pPr algn="ctr"/>
+          </a:p>
+        </p:txBody>
+      </p:sp>
+      <p:sp>
+        <p:nvSpPr>
+          <p:cNvPr id="4" name="TextBox 3"/>
+          <p:cNvSpPr txBox="1"/>
+          <p:nvPr/>
+        </p:nvSpPr>
+        <p:spPr>
+          <a:xfrm>
+            <a:off x="502920" y="274320"/>
+            <a:ext cx="5486400" cy="256032"/>
+          </a:xfrm>
+          <a:prstGeom prst="rect">
+            <a:avLst/>
+          </a:prstGeom>
+          <a:noFill/>
+        </p:spPr>
+        <p:txBody>
+          <a:bodyPr wrap="square" lIns="45720" rIns="45720" tIns="36576" bIns="36576" anchor="t">
+            <a:spAutoFit/>
+          </a:bodyPr>
+          <a:lstStyle/>
+          <a:p>
+            <a:pPr algn="l">
+              <a:defRPr sz="1000" b="1">
+                <a:solidFill>
+                  <a:srgbClr val="CC4F3E"/>
+                </a:solidFill>
+                <a:latin typeface="Aptos"/>
+              </a:defRPr>
+            </a:pPr>
+            <a:r>
+              <a:t>EXPLICAR Y DEFENDER</a:t>
+            </a:r>
+          </a:p>
+        </p:txBody>
+      </p:sp>
+      <p:sp>
+        <p:nvSpPr>
+          <p:cNvPr id="5" name="TextBox 4"/>
+          <p:cNvSpPr txBox="1"/>
+          <p:nvPr/>
+        </p:nvSpPr>
+        <p:spPr>
+          <a:xfrm>
+            <a:off x="502920" y="603504"/>
+            <a:ext cx="11064240" cy="530352"/>
+          </a:xfrm>
+          <a:prstGeom prst="rect">
+            <a:avLst/>
+          </a:prstGeom>
+          <a:noFill/>
+        </p:spPr>
+        <p:txBody>
+          <a:bodyPr wrap="square" lIns="45720" rIns="45720" tIns="36576" bIns="36576" anchor="t">
+            <a:spAutoFit/>
+          </a:bodyPr>
+          <a:lstStyle/>
+          <a:p>
+            <a:pPr algn="l">
+              <a:defRPr sz="2800" b="1">
+                <a:solidFill>
+                  <a:srgbClr val="1C2330"/>
+                </a:solidFill>
+                <a:latin typeface="Aptos"/>
+              </a:defRPr>
+            </a:pPr>
+            <a:r>
+              <a:t>Cierre y defensa</a:t>
+            </a:r>
+          </a:p>
+        </p:txBody>
+      </p:sp>
+      <p:sp>
+        <p:nvSpPr>
+          <p:cNvPr id="6" name="Rectangle 5"/>
+          <p:cNvSpPr/>
+          <p:nvPr/>
+        </p:nvSpPr>
+        <p:spPr>
+          <a:xfrm>
+            <a:off x="0" y="6601968"/>
+            <a:ext cx="12191695" cy="256032"/>
+          </a:xfrm>
+          <a:prstGeom prst="rect">
+            <a:avLst/>
+          </a:prstGeom>
+          <a:solidFill>
+            <a:srgbClr val="CC4F3E"/>
+          </a:solidFill>
+          <a:ln>
+            <a:noFill/>
+          </a:ln>
+        </p:spPr>
+        <p:style>
+          <a:lnRef idx="1">
+            <a:schemeClr val="accent1"/>
+          </a:lnRef>
+          <a:fillRef idx="3">
+            <a:schemeClr val="accent1"/>
+          </a:fillRef>
+          <a:effectRef idx="2">
+            <a:schemeClr val="accent1"/>
+          </a:effectRef>
+          <a:fontRef idx="minor">
+            <a:schemeClr val="lt1"/>
+          </a:fontRef>
+        </p:style>
+        <p:txBody>
+          <a:bodyPr rtlCol="0" anchor="ctr"/>
+          <a:lstStyle/>
+          <a:p>
+            <a:pPr algn="ctr"/>
+          </a:p>
+        </p:txBody>
+      </p:sp>
+      <p:sp>
+        <p:nvSpPr>
+          <p:cNvPr id="7" name="TextBox 6"/>
+          <p:cNvSpPr txBox="1"/>
+          <p:nvPr/>
+        </p:nvSpPr>
+        <p:spPr>
+          <a:xfrm>
+            <a:off x="411480" y="6629400"/>
+            <a:ext cx="11247120" cy="164592"/>
+          </a:xfrm>
+          <a:prstGeom prst="rect">
+            <a:avLst/>
+          </a:prstGeom>
+          <a:noFill/>
+        </p:spPr>
+        <p:txBody>
+          <a:bodyPr wrap="square" lIns="45720" rIns="45720" tIns="36576" bIns="36576" anchor="t">
+            <a:spAutoFit/>
+          </a:bodyPr>
+          <a:lstStyle/>
+          <a:p>
+            <a:pPr algn="l">
+              <a:defRPr sz="900" b="0">
+                <a:solidFill>
+                  <a:srgbClr val="FFFFFF"/>
+                </a:solidFill>
+                <a:latin typeface="Aptos"/>
+              </a:defRPr>
+            </a:pPr>
+            <a:r>
+              <a:t>MiniJarvis · 1.º DAW · Sesión 203 · H0 — Formación y prueba de equipos Scrum mediante la torre de papel</a:t>
+            </a:r>
+          </a:p>
+        </p:txBody>
+      </p:sp>
+      <p:sp>
+        <p:nvSpPr>
+          <p:cNvPr id="8" name="Rounded Rectangle 7"/>
+          <p:cNvSpPr/>
+          <p:nvPr/>
+        </p:nvSpPr>
+        <p:spPr>
+          <a:xfrm>
+            <a:off x="621792" y="1298448"/>
+            <a:ext cx="10927080" cy="1828800"/>
+          </a:xfrm>
+          <a:prstGeom prst="roundRect">
+            <a:avLst/>
+          </a:prstGeom>
+          <a:solidFill>
+            <a:srgbClr val="CC4F3E"/>
+          </a:solidFill>
+          <a:ln>
+            <a:solidFill>
+              <a:srgbClr val="CC4F3E"/>
+            </a:solidFill>
+          </a:ln>
+        </p:spPr>
+        <p:style>
+          <a:lnRef idx="1">
+            <a:schemeClr val="accent1"/>
+          </a:lnRef>
+          <a:fillRef idx="3">
+            <a:schemeClr val="accent1"/>
+          </a:fillRef>
+          <a:effectRef idx="2">
+            <a:schemeClr val="accent1"/>
+          </a:effectRef>
+          <a:fontRef idx="minor">
+            <a:schemeClr val="lt1"/>
+          </a:fontRef>
+        </p:style>
+        <p:txBody>
+          <a:bodyPr rtlCol="0" anchor="ctr"/>
+          <a:lstStyle/>
+          <a:p>
+            <a:pPr algn="ctr"/>
+          </a:p>
+        </p:txBody>
+      </p:sp>
+      <p:sp>
+        <p:nvSpPr>
+          <p:cNvPr id="9" name="TextBox 8"/>
+          <p:cNvSpPr txBox="1"/>
+          <p:nvPr/>
+        </p:nvSpPr>
+        <p:spPr>
+          <a:xfrm>
+            <a:off x="932688" y="1591056"/>
+            <a:ext cx="10241280" cy="256032"/>
+          </a:xfrm>
+          <a:prstGeom prst="rect">
+            <a:avLst/>
+          </a:prstGeom>
+          <a:noFill/>
+        </p:spPr>
+        <p:txBody>
+          <a:bodyPr wrap="square" lIns="45720" rIns="45720" tIns="36576" bIns="36576" anchor="t">
+            <a:spAutoFit/>
+          </a:bodyPr>
+          <a:lstStyle/>
+          <a:p>
+            <a:pPr algn="l">
+              <a:defRPr sz="1300" b="1">
+                <a:solidFill>
+                  <a:srgbClr val="FFFFFF"/>
+                </a:solidFill>
+                <a:latin typeface="Aptos"/>
+              </a:defRPr>
+            </a:pPr>
+            <a:r>
+              <a:t>PREGUNTA O DECISIÓN DE SALIDA</a:t>
+            </a:r>
+          </a:p>
+        </p:txBody>
+      </p:sp>
+      <p:sp>
+        <p:nvSpPr>
+          <p:cNvPr id="10" name="TextBox 9"/>
+          <p:cNvSpPr txBox="1"/>
+          <p:nvPr/>
+        </p:nvSpPr>
+        <p:spPr>
+          <a:xfrm>
+            <a:off x="932688" y="1975104"/>
+            <a:ext cx="10058400" cy="822960"/>
+          </a:xfrm>
+          <a:prstGeom prst="rect">
+            <a:avLst/>
+          </a:prstGeom>
+          <a:noFill/>
+        </p:spPr>
+        <p:txBody>
+          <a:bodyPr wrap="square" lIns="45720" rIns="45720" tIns="36576" bIns="36576" anchor="t">
+            <a:spAutoFit/>
+          </a:bodyPr>
+          <a:lstStyle/>
+          <a:p>
+            <a:pPr algn="l">
+              <a:defRPr sz="2500" b="1">
+                <a:solidFill>
+                  <a:srgbClr val="FFFFFF"/>
+                </a:solidFill>
+                <a:latin typeface="Aptos"/>
+              </a:defRPr>
+            </a:pPr>
+            <a:r>
+              <a:t>La condición para revisar la función después de la torre</a:t>
+            </a:r>
+          </a:p>
+        </p:txBody>
+      </p:sp>
+      <p:sp>
+        <p:nvSpPr>
+          <p:cNvPr id="11" name="TextBox 10"/>
+          <p:cNvSpPr txBox="1"/>
+          <p:nvPr/>
+        </p:nvSpPr>
+        <p:spPr>
+          <a:xfrm>
+            <a:off x="749808" y="3584448"/>
+            <a:ext cx="10607040" cy="2148840"/>
+          </a:xfrm>
+          <a:prstGeom prst="rect">
+            <a:avLst/>
+          </a:prstGeom>
+          <a:noFill/>
+        </p:spPr>
+        <p:txBody>
+          <a:bodyPr wrap="square" lIns="73152" rIns="45720" tIns="36576">
+            <a:spAutoFit/>
+          </a:bodyPr>
+          <a:lstStyle/>
+          <a:p>
+            <a:pPr>
+              <a:spcAft>
+                <a:spcPts val="900"/>
+              </a:spcAft>
+              <a:defRPr sz="1800">
+                <a:solidFill>
+                  <a:srgbClr val="1C2330"/>
+                </a:solidFill>
+                <a:latin typeface="Aptos"/>
+              </a:defRPr>
+            </a:pPr>
+            <a:r>
+              <a:t>•  Mi responsabilidad inicial</a:t>
+            </a:r>
+          </a:p>
+          <a:p>
+            <a:pPr>
+              <a:spcAft>
+                <a:spcPts val="900"/>
+              </a:spcAft>
+              <a:defRPr sz="1800">
+                <a:solidFill>
+                  <a:srgbClr val="1C2330"/>
+                </a:solidFill>
+                <a:latin typeface="Aptos"/>
+              </a:defRPr>
+            </a:pPr>
+            <a:r>
+              <a:t>•  La conducta observable que demostrará que la cumplo</a:t>
+            </a:r>
+          </a:p>
+          <a:p>
+            <a:pPr>
+              <a:spcAft>
+                <a:spcPts val="900"/>
+              </a:spcAft>
+              <a:defRPr sz="1800">
+                <a:solidFill>
+                  <a:srgbClr val="1C2330"/>
+                </a:solidFill>
+                <a:latin typeface="Aptos"/>
+              </a:defRPr>
+            </a:pPr>
+            <a:r>
+              <a:t>•  Una tarea compartida en la que también participaré</a:t>
             </a:r>
           </a:p>
         </p:txBody>
@@ -3514,16 +6549,16 @@
         </p:nvSpPr>
         <p:spPr>
           <a:xfrm>
-            <a:off x="502920" y="310896"/>
-            <a:ext cx="5029200" cy="256032"/>
-          </a:xfrm>
-          <a:prstGeom prst="rect">
-            <a:avLst/>
-          </a:prstGeom>
-          <a:noFill/>
-        </p:spPr>
-        <p:txBody>
-          <a:bodyPr wrap="square" lIns="36576" rIns="36576" tIns="27432" bIns="27432">
+            <a:off x="502920" y="274320"/>
+            <a:ext cx="5486400" cy="256032"/>
+          </a:xfrm>
+          <a:prstGeom prst="rect">
+            <a:avLst/>
+          </a:prstGeom>
+          <a:noFill/>
+        </p:spPr>
+        <p:txBody>
+          <a:bodyPr wrap="square" lIns="45720" rIns="45720" tIns="36576" bIns="36576" anchor="t">
             <a:spAutoFit/>
           </a:bodyPr>
           <a:lstStyle/>
@@ -3550,7 +6585,7 @@
         </p:nvSpPr>
         <p:spPr>
           <a:xfrm>
-            <a:off x="502920" y="621792"/>
+            <a:off x="502920" y="603504"/>
             <a:ext cx="11064240" cy="530352"/>
           </a:xfrm>
           <a:prstGeom prst="rect">
@@ -3559,7 +6594,7 @@
           <a:noFill/>
         </p:spPr>
         <p:txBody>
-          <a:bodyPr wrap="square" lIns="36576" rIns="36576" tIns="27432" bIns="27432">
+          <a:bodyPr wrap="square" lIns="45720" rIns="45720" tIns="36576" bIns="36576" anchor="t">
             <a:spAutoFit/>
           </a:bodyPr>
           <a:lstStyle/>
@@ -3573,7 +6608,7 @@
               </a:defRPr>
             </a:pPr>
             <a:r>
-              <a:t>Qué vamos a conseguir</a:t>
+              <a:t>Qué debe conseguirse</a:t>
             </a:r>
           </a:p>
         </p:txBody>
@@ -3638,7 +6673,7 @@
           <a:noFill/>
         </p:spPr>
         <p:txBody>
-          <a:bodyPr wrap="square" lIns="36576" rIns="36576" tIns="27432" bIns="27432">
+          <a:bodyPr wrap="square" lIns="45720" rIns="45720" tIns="36576" bIns="36576" anchor="t">
             <a:spAutoFit/>
           </a:bodyPr>
           <a:lstStyle/>
@@ -3652,7 +6687,7 @@
               </a:defRPr>
             </a:pPr>
             <a:r>
-              <a:t>MiniJarvis · 1.º DAW · Sesión 203 · H0</a:t>
+              <a:t>MiniJarvis · 1.º DAW · Sesión 203 · H0 — Formación y prueba de equipos Scrum mediante la torre de papel</a:t>
             </a:r>
           </a:p>
         </p:txBody>
@@ -3665,8 +6700,8 @@
         </p:nvSpPr>
         <p:spPr>
           <a:xfrm>
-            <a:off x="594360" y="1417320"/>
-            <a:ext cx="5349240" cy="4343400"/>
+            <a:off x="594360" y="1389888"/>
+            <a:ext cx="5184648" cy="4297680"/>
           </a:xfrm>
           <a:prstGeom prst="roundRect">
             <a:avLst/>
@@ -3676,7 +6711,7 @@
           </a:solidFill>
           <a:ln>
             <a:solidFill>
-              <a:srgbClr val="EBEEF2"/>
+              <a:srgbClr val="E5E9EF"/>
             </a:solidFill>
           </a:ln>
         </p:spPr>
@@ -3711,93 +6746,21 @@
         <p:spPr>
           <a:xfrm>
             <a:off x="822960" y="1618488"/>
-            <a:ext cx="438912" cy="411480"/>
-          </a:xfrm>
-          <a:prstGeom prst="rect">
-            <a:avLst/>
-          </a:prstGeom>
-          <a:noFill/>
-        </p:spPr>
-        <p:txBody>
-          <a:bodyPr wrap="square" lIns="36576" rIns="36576" tIns="27432" bIns="27432">
-            <a:spAutoFit/>
-          </a:bodyPr>
-          <a:lstStyle/>
-          <a:p>
-            <a:pPr algn="ctr">
-              <a:defRPr sz="2400" b="1">
-                <a:solidFill>
-                  <a:srgbClr val="CC4F3E"/>
-                </a:solidFill>
-                <a:latin typeface="Aptos"/>
-              </a:defRPr>
-            </a:pPr>
-            <a:r>
-              <a:t>01</a:t>
-            </a:r>
-          </a:p>
-        </p:txBody>
-      </p:sp>
-      <p:sp>
-        <p:nvSpPr>
-          <p:cNvPr id="10" name="TextBox 9"/>
-          <p:cNvSpPr txBox="1"/>
-          <p:nvPr/>
-        </p:nvSpPr>
-        <p:spPr>
-          <a:xfrm>
-            <a:off x="1344168" y="1645920"/>
-            <a:ext cx="4389120" cy="365760"/>
-          </a:xfrm>
-          <a:prstGeom prst="rect">
-            <a:avLst/>
-          </a:prstGeom>
-          <a:noFill/>
-        </p:spPr>
-        <p:txBody>
-          <a:bodyPr wrap="square" lIns="36576" rIns="36576" tIns="27432" bIns="27432">
+            <a:ext cx="4727448" cy="3840480"/>
+          </a:xfrm>
+          <a:prstGeom prst="rect">
+            <a:avLst/>
+          </a:prstGeom>
+          <a:noFill/>
+        </p:spPr>
+        <p:txBody>
+          <a:bodyPr wrap="square" lIns="45720" rIns="45720" tIns="36576" bIns="36576" anchor="t">
             <a:spAutoFit/>
           </a:bodyPr>
           <a:lstStyle/>
           <a:p>
             <a:pPr algn="l">
-              <a:defRPr sz="1700" b="1">
-                <a:solidFill>
-                  <a:srgbClr val="CC4F3E"/>
-                </a:solidFill>
-                <a:latin typeface="Aptos"/>
-              </a:defRPr>
-            </a:pPr>
-            <a:r>
-              <a:t>Hoy vas a…</a:t>
-            </a:r>
-          </a:p>
-        </p:txBody>
-      </p:sp>
-      <p:sp>
-        <p:nvSpPr>
-          <p:cNvPr id="11" name="TextBox 10"/>
-          <p:cNvSpPr txBox="1"/>
-          <p:nvPr/>
-        </p:nvSpPr>
-        <p:spPr>
-          <a:xfrm>
-            <a:off x="868680" y="2286000"/>
-            <a:ext cx="4800600" cy="3246120"/>
-          </a:xfrm>
-          <a:prstGeom prst="rect">
-            <a:avLst/>
-          </a:prstGeom>
-          <a:noFill/>
-        </p:spPr>
-        <p:txBody>
-          <a:bodyPr wrap="square" lIns="36576" rIns="36576" tIns="27432" bIns="27432">
-            <a:spAutoFit/>
-          </a:bodyPr>
-          <a:lstStyle/>
-          <a:p>
-            <a:pPr algn="l">
-              <a:defRPr sz="2200" b="0">
+              <a:defRPr sz="2100" b="1">
                 <a:solidFill>
                   <a:srgbClr val="1C2330"/>
                 </a:solidFill>
@@ -3805,21 +6768,21 @@
               </a:defRPr>
             </a:pPr>
             <a:r>
-              <a:t>Comprender y aplicar el objetivo de la sesión.</a:t>
-            </a:r>
-          </a:p>
-        </p:txBody>
-      </p:sp>
-      <p:sp>
-        <p:nvSpPr>
-          <p:cNvPr id="12" name="Rounded Rectangle 11"/>
+              <a:t>Objetivo: Mapa HADA de equipo, funciones justificadas, reglas de participación y backlog inicial de la torre</a:t>
+            </a:r>
+          </a:p>
+        </p:txBody>
+      </p:sp>
+      <p:sp>
+        <p:nvSpPr>
+          <p:cNvPr id="10" name="Rounded Rectangle 9"/>
           <p:cNvSpPr/>
           <p:nvPr/>
         </p:nvSpPr>
         <p:spPr>
           <a:xfrm>
-            <a:off x="6236208" y="1417320"/>
-            <a:ext cx="5349240" cy="4343400"/>
+            <a:off x="6035040" y="1389888"/>
+            <a:ext cx="5184648" cy="4297680"/>
           </a:xfrm>
           <a:prstGeom prst="roundRect">
             <a:avLst/>
@@ -3829,7 +6792,7 @@
           </a:solidFill>
           <a:ln>
             <a:solidFill>
-              <a:srgbClr val="EBEEF2"/>
+              <a:srgbClr val="E5E9EF"/>
             </a:solidFill>
           </a:ln>
         </p:spPr>
@@ -3857,100 +6820,28 @@
       </p:sp>
       <p:sp>
         <p:nvSpPr>
-          <p:cNvPr id="13" name="TextBox 12"/>
-          <p:cNvSpPr txBox="1"/>
-          <p:nvPr/>
-        </p:nvSpPr>
-        <p:spPr>
-          <a:xfrm>
-            <a:off x="6464808" y="1618488"/>
-            <a:ext cx="438912" cy="411480"/>
-          </a:xfrm>
-          <a:prstGeom prst="rect">
-            <a:avLst/>
-          </a:prstGeom>
-          <a:noFill/>
-        </p:spPr>
-        <p:txBody>
-          <a:bodyPr wrap="square" lIns="36576" rIns="36576" tIns="27432" bIns="27432">
-            <a:spAutoFit/>
-          </a:bodyPr>
-          <a:lstStyle/>
-          <a:p>
-            <a:pPr algn="ctr">
-              <a:defRPr sz="2400" b="1">
-                <a:solidFill>
-                  <a:srgbClr val="CC4F3E"/>
-                </a:solidFill>
-                <a:latin typeface="Aptos"/>
-              </a:defRPr>
-            </a:pPr>
-            <a:r>
-              <a:t>02</a:t>
-            </a:r>
-          </a:p>
-        </p:txBody>
-      </p:sp>
-      <p:sp>
-        <p:nvSpPr>
-          <p:cNvPr id="14" name="TextBox 13"/>
-          <p:cNvSpPr txBox="1"/>
-          <p:nvPr/>
-        </p:nvSpPr>
-        <p:spPr>
-          <a:xfrm>
-            <a:off x="6986016" y="1645920"/>
-            <a:ext cx="4389120" cy="365760"/>
-          </a:xfrm>
-          <a:prstGeom prst="rect">
-            <a:avLst/>
-          </a:prstGeom>
-          <a:noFill/>
-        </p:spPr>
-        <p:txBody>
-          <a:bodyPr wrap="square" lIns="36576" rIns="36576" tIns="27432" bIns="27432">
+          <p:cNvPr id="11" name="TextBox 10"/>
+          <p:cNvSpPr txBox="1"/>
+          <p:nvPr/>
+        </p:nvSpPr>
+        <p:spPr>
+          <a:xfrm>
+            <a:off x="6263640" y="1618488"/>
+            <a:ext cx="4727448" cy="3840480"/>
+          </a:xfrm>
+          <a:prstGeom prst="rect">
+            <a:avLst/>
+          </a:prstGeom>
+          <a:noFill/>
+        </p:spPr>
+        <p:txBody>
+          <a:bodyPr wrap="square" lIns="45720" rIns="45720" tIns="36576" bIns="36576" anchor="t">
             <a:spAutoFit/>
           </a:bodyPr>
           <a:lstStyle/>
           <a:p>
             <a:pPr algn="l">
-              <a:defRPr sz="1700" b="1">
-                <a:solidFill>
-                  <a:srgbClr val="CC4F3E"/>
-                </a:solidFill>
-                <a:latin typeface="Aptos"/>
-              </a:defRPr>
-            </a:pPr>
-            <a:r>
-              <a:t>Debe quedar…</a:t>
-            </a:r>
-          </a:p>
-        </p:txBody>
-      </p:sp>
-      <p:sp>
-        <p:nvSpPr>
-          <p:cNvPr id="15" name="TextBox 14"/>
-          <p:cNvSpPr txBox="1"/>
-          <p:nvPr/>
-        </p:nvSpPr>
-        <p:spPr>
-          <a:xfrm>
-            <a:off x="6510528" y="2286000"/>
-            <a:ext cx="4800600" cy="3246120"/>
-          </a:xfrm>
-          <a:prstGeom prst="rect">
-            <a:avLst/>
-          </a:prstGeom>
-          <a:noFill/>
-        </p:spPr>
-        <p:txBody>
-          <a:bodyPr wrap="square" lIns="36576" rIns="36576" tIns="27432" bIns="27432">
-            <a:spAutoFit/>
-          </a:bodyPr>
-          <a:lstStyle/>
-          <a:p>
-            <a:pPr algn="l">
-              <a:defRPr sz="2200" b="0">
+              <a:defRPr sz="2100" b="1">
                 <a:solidFill>
                   <a:srgbClr val="1C2330"/>
                 </a:solidFill>
@@ -3958,7 +6849,7 @@
               </a:defRPr>
             </a:pPr>
             <a:r>
-              <a:t>Una evidencia comprobable y defendible.</a:t>
+              <a:t>Evidencia: Aportación inicial, función que se desea practicar y criterio para revisar la asignación</a:t>
             </a:r>
           </a:p>
         </p:txBody>
@@ -4075,16 +6966,16 @@
         </p:nvSpPr>
         <p:spPr>
           <a:xfrm>
-            <a:off x="502920" y="310896"/>
-            <a:ext cx="5029200" cy="256032"/>
-          </a:xfrm>
-          <a:prstGeom prst="rect">
-            <a:avLst/>
-          </a:prstGeom>
-          <a:noFill/>
-        </p:spPr>
-        <p:txBody>
-          <a:bodyPr wrap="square" lIns="36576" rIns="36576" tIns="27432" bIns="27432">
+            <a:off x="502920" y="274320"/>
+            <a:ext cx="5486400" cy="256032"/>
+          </a:xfrm>
+          <a:prstGeom prst="rect">
+            <a:avLst/>
+          </a:prstGeom>
+          <a:noFill/>
+        </p:spPr>
+        <p:txBody>
+          <a:bodyPr wrap="square" lIns="45720" rIns="45720" tIns="36576" bIns="36576" anchor="t">
             <a:spAutoFit/>
           </a:bodyPr>
           <a:lstStyle/>
@@ -4098,7 +6989,7 @@
               </a:defRPr>
             </a:pPr>
             <a:r>
-              <a:t>PASO A PASO</a:t>
+              <a:t>RITMO DE LA SESIÓN</a:t>
             </a:r>
           </a:p>
         </p:txBody>
@@ -4111,7 +7002,7 @@
         </p:nvSpPr>
         <p:spPr>
           <a:xfrm>
-            <a:off x="502920" y="621792"/>
+            <a:off x="502920" y="603504"/>
             <a:ext cx="11064240" cy="530352"/>
           </a:xfrm>
           <a:prstGeom prst="rect">
@@ -4120,7 +7011,7 @@
           <a:noFill/>
         </p:spPr>
         <p:txBody>
-          <a:bodyPr wrap="square" lIns="36576" rIns="36576" tIns="27432" bIns="27432">
+          <a:bodyPr wrap="square" lIns="45720" rIns="45720" tIns="36576" bIns="36576" anchor="t">
             <a:spAutoFit/>
           </a:bodyPr>
           <a:lstStyle/>
@@ -4134,7 +7025,7 @@
               </a:defRPr>
             </a:pPr>
             <a:r>
-              <a:t>Ruta de trabajo</a:t>
+              <a:t>Secuencia de aula · tramo 1</a:t>
             </a:r>
           </a:p>
         </p:txBody>
@@ -4199,7 +7090,7 @@
           <a:noFill/>
         </p:spPr>
         <p:txBody>
-          <a:bodyPr wrap="square" lIns="36576" rIns="36576" tIns="27432" bIns="27432">
+          <a:bodyPr wrap="square" lIns="45720" rIns="45720" tIns="36576" bIns="36576" anchor="t">
             <a:spAutoFit/>
           </a:bodyPr>
           <a:lstStyle/>
@@ -4213,7 +7104,7 @@
               </a:defRPr>
             </a:pPr>
             <a:r>
-              <a:t>MiniJarvis · 1.º DAW · Sesión 203 · H0</a:t>
+              <a:t>MiniJarvis · 1.º DAW · Sesión 203 · H0 — Formación y prueba de equipos Scrum mediante la torre de papel</a:t>
             </a:r>
           </a:p>
         </p:txBody>
@@ -4226,8 +7117,8 @@
         </p:nvSpPr>
         <p:spPr>
           <a:xfrm>
-            <a:off x="685800" y="1325880"/>
-            <a:ext cx="502920" cy="502920"/>
+            <a:off x="658368" y="1280160"/>
+            <a:ext cx="475488" cy="475488"/>
           </a:xfrm>
           <a:prstGeom prst="ellipse">
             <a:avLst/>
@@ -4269,22 +7160,22 @@
         </p:nvSpPr>
         <p:spPr>
           <a:xfrm>
-            <a:off x="685800" y="1435607"/>
-            <a:ext cx="502920" cy="201168"/>
-          </a:xfrm>
-          <a:prstGeom prst="rect">
-            <a:avLst/>
-          </a:prstGeom>
-          <a:noFill/>
-        </p:spPr>
-        <p:txBody>
-          <a:bodyPr wrap="square" lIns="36576" rIns="36576" tIns="27432" bIns="27432">
+            <a:off x="658368" y="1380744"/>
+            <a:ext cx="475488" cy="201168"/>
+          </a:xfrm>
+          <a:prstGeom prst="rect">
+            <a:avLst/>
+          </a:prstGeom>
+          <a:noFill/>
+        </p:spPr>
+        <p:txBody>
+          <a:bodyPr wrap="square" lIns="45720" rIns="45720" tIns="36576" bIns="36576" anchor="t">
             <a:spAutoFit/>
           </a:bodyPr>
           <a:lstStyle/>
           <a:p>
             <a:pPr algn="ctr">
-              <a:defRPr sz="1400" b="1">
+              <a:defRPr sz="1300" b="1">
                 <a:solidFill>
                   <a:srgbClr val="FFFFFF"/>
                 </a:solidFill>
@@ -4305,22 +7196,22 @@
         </p:nvSpPr>
         <p:spPr>
           <a:xfrm>
-            <a:off x="1417320" y="1344168"/>
-            <a:ext cx="9875520" cy="548640"/>
-          </a:xfrm>
-          <a:prstGeom prst="rect">
-            <a:avLst/>
-          </a:prstGeom>
-          <a:noFill/>
-        </p:spPr>
-        <p:txBody>
-          <a:bodyPr wrap="square" lIns="36576" rIns="36576" tIns="27432" bIns="27432">
+            <a:off x="1389888" y="1261872"/>
+            <a:ext cx="10058400" cy="772668"/>
+          </a:xfrm>
+          <a:prstGeom prst="rect">
+            <a:avLst/>
+          </a:prstGeom>
+          <a:noFill/>
+        </p:spPr>
+        <p:txBody>
+          <a:bodyPr wrap="square" lIns="45720" rIns="45720" tIns="36576" bIns="36576" anchor="t">
             <a:spAutoFit/>
           </a:bodyPr>
           <a:lstStyle/>
           <a:p>
             <a:pPr algn="l">
-              <a:defRPr sz="2000" b="0">
+              <a:defRPr sz="1400" b="0">
                 <a:solidFill>
                   <a:srgbClr val="1C2330"/>
                 </a:solidFill>
@@ -4328,7 +7219,7 @@
               </a:defRPr>
             </a:pPr>
             <a:r>
-              <a:t>Comprender y aplicar el objetivo de la sesión.</a:t>
+              <a:t>0–4 min — Recuperar el sentido: Ayer obtuvimos una hipótesis individual.</a:t>
             </a:r>
           </a:p>
         </p:txBody>
@@ -4341,8 +7232,8 @@
         </p:nvSpPr>
         <p:spPr>
           <a:xfrm>
-            <a:off x="685800" y="2258568"/>
-            <a:ext cx="502920" cy="502920"/>
+            <a:off x="658368" y="2125979"/>
+            <a:ext cx="475488" cy="475488"/>
           </a:xfrm>
           <a:prstGeom prst="ellipse">
             <a:avLst/>
@@ -4384,22 +7275,22 @@
         </p:nvSpPr>
         <p:spPr>
           <a:xfrm>
-            <a:off x="685800" y="2368296"/>
-            <a:ext cx="502920" cy="201168"/>
-          </a:xfrm>
-          <a:prstGeom prst="rect">
-            <a:avLst/>
-          </a:prstGeom>
-          <a:noFill/>
-        </p:spPr>
-        <p:txBody>
-          <a:bodyPr wrap="square" lIns="36576" rIns="36576" tIns="27432" bIns="27432">
+            <a:off x="658368" y="2226563"/>
+            <a:ext cx="475488" cy="201168"/>
+          </a:xfrm>
+          <a:prstGeom prst="rect">
+            <a:avLst/>
+          </a:prstGeom>
+          <a:noFill/>
+        </p:spPr>
+        <p:txBody>
+          <a:bodyPr wrap="square" lIns="45720" rIns="45720" tIns="36576" bIns="36576" anchor="t">
             <a:spAutoFit/>
           </a:bodyPr>
           <a:lstStyle/>
           <a:p>
             <a:pPr algn="ctr">
-              <a:defRPr sz="1400" b="1">
+              <a:defRPr sz="1300" b="1">
                 <a:solidFill>
                   <a:srgbClr val="FFFFFF"/>
                 </a:solidFill>
@@ -4420,22 +7311,22 @@
         </p:nvSpPr>
         <p:spPr>
           <a:xfrm>
-            <a:off x="1417320" y="2276856"/>
-            <a:ext cx="9875520" cy="548640"/>
-          </a:xfrm>
-          <a:prstGeom prst="rect">
-            <a:avLst/>
-          </a:prstGeom>
-          <a:noFill/>
-        </p:spPr>
-        <p:txBody>
-          <a:bodyPr wrap="square" lIns="36576" rIns="36576" tIns="27432" bIns="27432">
+            <a:off x="1389888" y="2107691"/>
+            <a:ext cx="10058400" cy="772668"/>
+          </a:xfrm>
+          <a:prstGeom prst="rect">
+            <a:avLst/>
+          </a:prstGeom>
+          <a:noFill/>
+        </p:spPr>
+        <p:txBody>
+          <a:bodyPr wrap="square" lIns="45720" rIns="45720" tIns="36576" bIns="36576" anchor="t">
             <a:spAutoFit/>
           </a:bodyPr>
           <a:lstStyle/>
           <a:p>
             <a:pPr algn="l">
-              <a:defRPr sz="2000" b="0">
+              <a:defRPr sz="1400" b="0">
                 <a:solidFill>
                   <a:srgbClr val="1C2330"/>
                 </a:solidFill>
@@ -4443,7 +7334,7 @@
               </a:defRPr>
             </a:pPr>
             <a:r>
-              <a:t>Realiza una prueba observable.</a:t>
+              <a:t>4–8 min — Anunciar equipos con seguridad: Anuncia únicamente nombres y ubicación de los equipos.</a:t>
             </a:r>
           </a:p>
         </p:txBody>
@@ -4456,8 +7347,8 @@
         </p:nvSpPr>
         <p:spPr>
           <a:xfrm>
-            <a:off x="685800" y="3191256"/>
-            <a:ext cx="502920" cy="502920"/>
+            <a:off x="658368" y="2971799"/>
+            <a:ext cx="475488" cy="475488"/>
           </a:xfrm>
           <a:prstGeom prst="ellipse">
             <a:avLst/>
@@ -4499,22 +7390,22 @@
         </p:nvSpPr>
         <p:spPr>
           <a:xfrm>
-            <a:off x="685800" y="3300984"/>
-            <a:ext cx="502920" cy="201168"/>
-          </a:xfrm>
-          <a:prstGeom prst="rect">
-            <a:avLst/>
-          </a:prstGeom>
-          <a:noFill/>
-        </p:spPr>
-        <p:txBody>
-          <a:bodyPr wrap="square" lIns="36576" rIns="36576" tIns="27432" bIns="27432">
+            <a:off x="658368" y="3072383"/>
+            <a:ext cx="475488" cy="201168"/>
+          </a:xfrm>
+          <a:prstGeom prst="rect">
+            <a:avLst/>
+          </a:prstGeom>
+          <a:noFill/>
+        </p:spPr>
+        <p:txBody>
+          <a:bodyPr wrap="square" lIns="45720" rIns="45720" tIns="36576" bIns="36576" anchor="t">
             <a:spAutoFit/>
           </a:bodyPr>
           <a:lstStyle/>
           <a:p>
             <a:pPr algn="ctr">
-              <a:defRPr sz="1400" b="1">
+              <a:defRPr sz="1300" b="1">
                 <a:solidFill>
                   <a:srgbClr val="FFFFFF"/>
                 </a:solidFill>
@@ -4535,22 +7426,22 @@
         </p:nvSpPr>
         <p:spPr>
           <a:xfrm>
-            <a:off x="1417320" y="3209544"/>
-            <a:ext cx="9875520" cy="548640"/>
-          </a:xfrm>
-          <a:prstGeom prst="rect">
-            <a:avLst/>
-          </a:prstGeom>
-          <a:noFill/>
-        </p:spPr>
-        <p:txBody>
-          <a:bodyPr wrap="square" lIns="36576" rIns="36576" tIns="27432" bIns="27432">
+            <a:off x="1389888" y="2953511"/>
+            <a:ext cx="10058400" cy="772668"/>
+          </a:xfrm>
+          <a:prstGeom prst="rect">
+            <a:avLst/>
+          </a:prstGeom>
+          <a:noFill/>
+        </p:spPr>
+        <p:txBody>
+          <a:bodyPr wrap="square" lIns="45720" rIns="45720" tIns="36576" bIns="36576" anchor="t">
             <a:spAutoFit/>
           </a:bodyPr>
           <a:lstStyle/>
           <a:p>
             <a:pPr algn="l">
-              <a:defRPr sz="2000" b="0">
+              <a:defRPr sz="1400" b="0">
                 <a:solidFill>
                   <a:srgbClr val="1C2330"/>
                 </a:solidFill>
@@ -4558,7 +7449,352 @@
               </a:defRPr>
             </a:pPr>
             <a:r>
-              <a:t>Guarda la evidencia y prepárate para explicarla.</a:t>
+              <a:t>8–14 min — Compartir preferencias, no puntuaciones: Cada persona dispone de un minuto para completar oralmente o por escrito: Una aportación que creo que puedo iniciar es...</a:t>
+            </a:r>
+          </a:p>
+        </p:txBody>
+      </p:sp>
+      <p:sp>
+        <p:nvSpPr>
+          <p:cNvPr id="17" name="Oval 16"/>
+          <p:cNvSpPr/>
+          <p:nvPr/>
+        </p:nvSpPr>
+        <p:spPr>
+          <a:xfrm>
+            <a:off x="658368" y="3817620"/>
+            <a:ext cx="475488" cy="475488"/>
+          </a:xfrm>
+          <a:prstGeom prst="ellipse">
+            <a:avLst/>
+          </a:prstGeom>
+          <a:solidFill>
+            <a:srgbClr val="CC4F3E"/>
+          </a:solidFill>
+          <a:ln>
+            <a:noFill/>
+          </a:ln>
+        </p:spPr>
+        <p:style>
+          <a:lnRef idx="1">
+            <a:schemeClr val="accent1"/>
+          </a:lnRef>
+          <a:fillRef idx="3">
+            <a:schemeClr val="accent1"/>
+          </a:fillRef>
+          <a:effectRef idx="2">
+            <a:schemeClr val="accent1"/>
+          </a:effectRef>
+          <a:fontRef idx="minor">
+            <a:schemeClr val="lt1"/>
+          </a:fontRef>
+        </p:style>
+        <p:txBody>
+          <a:bodyPr rtlCol="0" anchor="ctr"/>
+          <a:lstStyle/>
+          <a:p>
+            <a:pPr algn="ctr"/>
+          </a:p>
+        </p:txBody>
+      </p:sp>
+      <p:sp>
+        <p:nvSpPr>
+          <p:cNvPr id="18" name="TextBox 17"/>
+          <p:cNvSpPr txBox="1"/>
+          <p:nvPr/>
+        </p:nvSpPr>
+        <p:spPr>
+          <a:xfrm>
+            <a:off x="658368" y="3918204"/>
+            <a:ext cx="475488" cy="201168"/>
+          </a:xfrm>
+          <a:prstGeom prst="rect">
+            <a:avLst/>
+          </a:prstGeom>
+          <a:noFill/>
+        </p:spPr>
+        <p:txBody>
+          <a:bodyPr wrap="square" lIns="45720" rIns="45720" tIns="36576" bIns="36576" anchor="t">
+            <a:spAutoFit/>
+          </a:bodyPr>
+          <a:lstStyle/>
+          <a:p>
+            <a:pPr algn="ctr">
+              <a:defRPr sz="1300" b="1">
+                <a:solidFill>
+                  <a:srgbClr val="FFFFFF"/>
+                </a:solidFill>
+                <a:latin typeface="Aptos"/>
+              </a:defRPr>
+            </a:pPr>
+            <a:r>
+              <a:t>4</a:t>
+            </a:r>
+          </a:p>
+        </p:txBody>
+      </p:sp>
+      <p:sp>
+        <p:nvSpPr>
+          <p:cNvPr id="19" name="TextBox 18"/>
+          <p:cNvSpPr txBox="1"/>
+          <p:nvPr/>
+        </p:nvSpPr>
+        <p:spPr>
+          <a:xfrm>
+            <a:off x="1389888" y="3799332"/>
+            <a:ext cx="10058400" cy="772668"/>
+          </a:xfrm>
+          <a:prstGeom prst="rect">
+            <a:avLst/>
+          </a:prstGeom>
+          <a:noFill/>
+        </p:spPr>
+        <p:txBody>
+          <a:bodyPr wrap="square" lIns="45720" rIns="45720" tIns="36576" bIns="36576" anchor="t">
+            <a:spAutoFit/>
+          </a:bodyPr>
+          <a:lstStyle/>
+          <a:p>
+            <a:pPr algn="l">
+              <a:defRPr sz="1400" b="0">
+                <a:solidFill>
+                  <a:srgbClr val="1C2330"/>
+                </a:solidFill>
+                <a:latin typeface="Aptos"/>
+              </a:defRPr>
+            </a:pPr>
+            <a:r>
+              <a:t>14–20 min — Diagnóstico de la composición: El equipo responde: ¿Qué capacidad parece estar bien cubierta?, ¿Qué capacidad puede necesitar atención consciente?, ¿Qué riesgo tendría ignorarla durante la torre?, ¿Qué función o regla podría compensarlo?</a:t>
+            </a:r>
+          </a:p>
+        </p:txBody>
+      </p:sp>
+      <p:sp>
+        <p:nvSpPr>
+          <p:cNvPr id="20" name="Oval 19"/>
+          <p:cNvSpPr/>
+          <p:nvPr/>
+        </p:nvSpPr>
+        <p:spPr>
+          <a:xfrm>
+            <a:off x="658368" y="4663440"/>
+            <a:ext cx="475488" cy="475488"/>
+          </a:xfrm>
+          <a:prstGeom prst="ellipse">
+            <a:avLst/>
+          </a:prstGeom>
+          <a:solidFill>
+            <a:srgbClr val="CC4F3E"/>
+          </a:solidFill>
+          <a:ln>
+            <a:noFill/>
+          </a:ln>
+        </p:spPr>
+        <p:style>
+          <a:lnRef idx="1">
+            <a:schemeClr val="accent1"/>
+          </a:lnRef>
+          <a:fillRef idx="3">
+            <a:schemeClr val="accent1"/>
+          </a:fillRef>
+          <a:effectRef idx="2">
+            <a:schemeClr val="accent1"/>
+          </a:effectRef>
+          <a:fontRef idx="minor">
+            <a:schemeClr val="lt1"/>
+          </a:fontRef>
+        </p:style>
+        <p:txBody>
+          <a:bodyPr rtlCol="0" anchor="ctr"/>
+          <a:lstStyle/>
+          <a:p>
+            <a:pPr algn="ctr"/>
+          </a:p>
+        </p:txBody>
+      </p:sp>
+      <p:sp>
+        <p:nvSpPr>
+          <p:cNvPr id="21" name="TextBox 20"/>
+          <p:cNvSpPr txBox="1"/>
+          <p:nvPr/>
+        </p:nvSpPr>
+        <p:spPr>
+          <a:xfrm>
+            <a:off x="658368" y="4764024"/>
+            <a:ext cx="475488" cy="201168"/>
+          </a:xfrm>
+          <a:prstGeom prst="rect">
+            <a:avLst/>
+          </a:prstGeom>
+          <a:noFill/>
+        </p:spPr>
+        <p:txBody>
+          <a:bodyPr wrap="square" lIns="45720" rIns="45720" tIns="36576" bIns="36576" anchor="t">
+            <a:spAutoFit/>
+          </a:bodyPr>
+          <a:lstStyle/>
+          <a:p>
+            <a:pPr algn="ctr">
+              <a:defRPr sz="1300" b="1">
+                <a:solidFill>
+                  <a:srgbClr val="FFFFFF"/>
+                </a:solidFill>
+                <a:latin typeface="Aptos"/>
+              </a:defRPr>
+            </a:pPr>
+            <a:r>
+              <a:t>5</a:t>
+            </a:r>
+          </a:p>
+        </p:txBody>
+      </p:sp>
+      <p:sp>
+        <p:nvSpPr>
+          <p:cNvPr id="22" name="TextBox 21"/>
+          <p:cNvSpPr txBox="1"/>
+          <p:nvPr/>
+        </p:nvSpPr>
+        <p:spPr>
+          <a:xfrm>
+            <a:off x="1389888" y="4645152"/>
+            <a:ext cx="10058400" cy="772668"/>
+          </a:xfrm>
+          <a:prstGeom prst="rect">
+            <a:avLst/>
+          </a:prstGeom>
+          <a:noFill/>
+        </p:spPr>
+        <p:txBody>
+          <a:bodyPr wrap="square" lIns="45720" rIns="45720" tIns="36576" bIns="36576" anchor="t">
+            <a:spAutoFit/>
+          </a:bodyPr>
+          <a:lstStyle/>
+          <a:p>
+            <a:pPr algn="l">
+              <a:defRPr sz="1400" b="0">
+                <a:solidFill>
+                  <a:srgbClr val="1C2330"/>
+                </a:solidFill>
+                <a:latin typeface="Aptos"/>
+              </a:defRPr>
+            </a:pPr>
+            <a:r>
+              <a:t>20–25 min — Explicar las cuatro funciones: Presenta la tabla de funciones y repite: Tener una función no concede mando ni excluye a los demás.</a:t>
+            </a:r>
+          </a:p>
+        </p:txBody>
+      </p:sp>
+      <p:sp>
+        <p:nvSpPr>
+          <p:cNvPr id="23" name="Oval 22"/>
+          <p:cNvSpPr/>
+          <p:nvPr/>
+        </p:nvSpPr>
+        <p:spPr>
+          <a:xfrm>
+            <a:off x="658368" y="5509259"/>
+            <a:ext cx="475488" cy="475488"/>
+          </a:xfrm>
+          <a:prstGeom prst="ellipse">
+            <a:avLst/>
+          </a:prstGeom>
+          <a:solidFill>
+            <a:srgbClr val="CC4F3E"/>
+          </a:solidFill>
+          <a:ln>
+            <a:noFill/>
+          </a:ln>
+        </p:spPr>
+        <p:style>
+          <a:lnRef idx="1">
+            <a:schemeClr val="accent1"/>
+          </a:lnRef>
+          <a:fillRef idx="3">
+            <a:schemeClr val="accent1"/>
+          </a:fillRef>
+          <a:effectRef idx="2">
+            <a:schemeClr val="accent1"/>
+          </a:effectRef>
+          <a:fontRef idx="minor">
+            <a:schemeClr val="lt1"/>
+          </a:fontRef>
+        </p:style>
+        <p:txBody>
+          <a:bodyPr rtlCol="0" anchor="ctr"/>
+          <a:lstStyle/>
+          <a:p>
+            <a:pPr algn="ctr"/>
+          </a:p>
+        </p:txBody>
+      </p:sp>
+      <p:sp>
+        <p:nvSpPr>
+          <p:cNvPr id="24" name="TextBox 23"/>
+          <p:cNvSpPr txBox="1"/>
+          <p:nvPr/>
+        </p:nvSpPr>
+        <p:spPr>
+          <a:xfrm>
+            <a:off x="658368" y="5609844"/>
+            <a:ext cx="475488" cy="201168"/>
+          </a:xfrm>
+          <a:prstGeom prst="rect">
+            <a:avLst/>
+          </a:prstGeom>
+          <a:noFill/>
+        </p:spPr>
+        <p:txBody>
+          <a:bodyPr wrap="square" lIns="45720" rIns="45720" tIns="36576" bIns="36576" anchor="t">
+            <a:spAutoFit/>
+          </a:bodyPr>
+          <a:lstStyle/>
+          <a:p>
+            <a:pPr algn="ctr">
+              <a:defRPr sz="1300" b="1">
+                <a:solidFill>
+                  <a:srgbClr val="FFFFFF"/>
+                </a:solidFill>
+                <a:latin typeface="Aptos"/>
+              </a:defRPr>
+            </a:pPr>
+            <a:r>
+              <a:t>6</a:t>
+            </a:r>
+          </a:p>
+        </p:txBody>
+      </p:sp>
+      <p:sp>
+        <p:nvSpPr>
+          <p:cNvPr id="25" name="TextBox 24"/>
+          <p:cNvSpPr txBox="1"/>
+          <p:nvPr/>
+        </p:nvSpPr>
+        <p:spPr>
+          <a:xfrm>
+            <a:off x="1389888" y="5490972"/>
+            <a:ext cx="10058400" cy="772668"/>
+          </a:xfrm>
+          <a:prstGeom prst="rect">
+            <a:avLst/>
+          </a:prstGeom>
+          <a:noFill/>
+        </p:spPr>
+        <p:txBody>
+          <a:bodyPr wrap="square" lIns="45720" rIns="45720" tIns="36576" bIns="36576" anchor="t">
+            <a:spAutoFit/>
+          </a:bodyPr>
+          <a:lstStyle/>
+          <a:p>
+            <a:pPr algn="l">
+              <a:defRPr sz="1400" b="0">
+                <a:solidFill>
+                  <a:srgbClr val="1C2330"/>
+                </a:solidFill>
+                <a:latin typeface="Aptos"/>
+              </a:defRPr>
+            </a:pPr>
+            <a:r>
+              <a:t>25–31 min — Acuerdo de funciones: Cada equipo asigna responsables iniciales y escribe una justificación basada en: una preferencia que puede aprovecharse, una capacidad que necesita compensación, una función nueva que alguien quiere practicar.</a:t>
             </a:r>
           </a:p>
         </p:txBody>
@@ -4675,16 +7911,16 @@
         </p:nvSpPr>
         <p:spPr>
           <a:xfrm>
-            <a:off x="502920" y="310896"/>
-            <a:ext cx="5029200" cy="256032"/>
-          </a:xfrm>
-          <a:prstGeom prst="rect">
-            <a:avLst/>
-          </a:prstGeom>
-          <a:noFill/>
-        </p:spPr>
-        <p:txBody>
-          <a:bodyPr wrap="square" lIns="36576" rIns="36576" tIns="27432" bIns="27432">
+            <a:off x="502920" y="274320"/>
+            <a:ext cx="5486400" cy="256032"/>
+          </a:xfrm>
+          <a:prstGeom prst="rect">
+            <a:avLst/>
+          </a:prstGeom>
+          <a:noFill/>
+        </p:spPr>
+        <p:txBody>
+          <a:bodyPr wrap="square" lIns="45720" rIns="45720" tIns="36576" bIns="36576" anchor="t">
             <a:spAutoFit/>
           </a:bodyPr>
           <a:lstStyle/>
@@ -4698,7 +7934,7 @@
               </a:defRPr>
             </a:pPr>
             <a:r>
-              <a:t>COMPRENDER Y APLICAR</a:t>
+              <a:t>RITMO DE LA SESIÓN</a:t>
             </a:r>
           </a:p>
         </p:txBody>
@@ -4711,7 +7947,7 @@
         </p:nvSpPr>
         <p:spPr>
           <a:xfrm>
-            <a:off x="502920" y="621792"/>
+            <a:off x="502920" y="603504"/>
             <a:ext cx="11064240" cy="530352"/>
           </a:xfrm>
           <a:prstGeom prst="rect">
@@ -4720,7 +7956,7 @@
           <a:noFill/>
         </p:spPr>
         <p:txBody>
-          <a:bodyPr wrap="square" lIns="36576" rIns="36576" tIns="27432" bIns="27432">
+          <a:bodyPr wrap="square" lIns="45720" rIns="45720" tIns="36576" bIns="36576" anchor="t">
             <a:spAutoFit/>
           </a:bodyPr>
           <a:lstStyle/>
@@ -4734,7 +7970,7 @@
               </a:defRPr>
             </a:pPr>
             <a:r>
-              <a:t>Claves para avanzar</a:t>
+              <a:t>Secuencia de aula · tramo 2</a:t>
             </a:r>
           </a:p>
         </p:txBody>
@@ -4799,7 +8035,7 @@
           <a:noFill/>
         </p:spPr>
         <p:txBody>
-          <a:bodyPr wrap="square" lIns="36576" rIns="36576" tIns="27432" bIns="27432">
+          <a:bodyPr wrap="square" lIns="45720" rIns="45720" tIns="36576" bIns="36576" anchor="t">
             <a:spAutoFit/>
           </a:bodyPr>
           <a:lstStyle/>
@@ -4813,32 +8049,30 @@
               </a:defRPr>
             </a:pPr>
             <a:r>
-              <a:t>MiniJarvis · 1.º DAW · Sesión 203 · H0</a:t>
-            </a:r>
-          </a:p>
-        </p:txBody>
-      </p:sp>
-      <p:sp>
-        <p:nvSpPr>
-          <p:cNvPr id="8" name="Rounded Rectangle 7"/>
+              <a:t>MiniJarvis · 1.º DAW · Sesión 203 · H0 — Formación y prueba de equipos Scrum mediante la torre de papel</a:t>
+            </a:r>
+          </a:p>
+        </p:txBody>
+      </p:sp>
+      <p:sp>
+        <p:nvSpPr>
+          <p:cNvPr id="8" name="Oval 7"/>
           <p:cNvSpPr/>
           <p:nvPr/>
         </p:nvSpPr>
         <p:spPr>
           <a:xfrm>
-            <a:off x="594360" y="1325880"/>
-            <a:ext cx="5257800" cy="4526280"/>
-          </a:xfrm>
-          <a:prstGeom prst="roundRect">
+            <a:off x="658368" y="1280160"/>
+            <a:ext cx="475488" cy="475488"/>
+          </a:xfrm>
+          <a:prstGeom prst="ellipse">
             <a:avLst/>
           </a:prstGeom>
           <a:solidFill>
-            <a:srgbClr val="FFFFFF"/>
+            <a:srgbClr val="CC4F3E"/>
           </a:solidFill>
           <a:ln>
-            <a:solidFill>
-              <a:srgbClr val="EBEEF2"/>
-            </a:solidFill>
+            <a:noFill/>
           </a:ln>
         </p:spPr>
         <p:style>
@@ -4865,25 +8099,95 @@
       </p:sp>
       <p:sp>
         <p:nvSpPr>
-          <p:cNvPr id="9" name="Rounded Rectangle 8"/>
+          <p:cNvPr id="9" name="TextBox 8"/>
+          <p:cNvSpPr txBox="1"/>
+          <p:nvPr/>
+        </p:nvSpPr>
+        <p:spPr>
+          <a:xfrm>
+            <a:off x="658368" y="1380744"/>
+            <a:ext cx="475488" cy="201168"/>
+          </a:xfrm>
+          <a:prstGeom prst="rect">
+            <a:avLst/>
+          </a:prstGeom>
+          <a:noFill/>
+        </p:spPr>
+        <p:txBody>
+          <a:bodyPr wrap="square" lIns="45720" rIns="45720" tIns="36576" bIns="36576" anchor="t">
+            <a:spAutoFit/>
+          </a:bodyPr>
+          <a:lstStyle/>
+          <a:p>
+            <a:pPr algn="ctr">
+              <a:defRPr sz="1300" b="1">
+                <a:solidFill>
+                  <a:srgbClr val="FFFFFF"/>
+                </a:solidFill>
+                <a:latin typeface="Aptos"/>
+              </a:defRPr>
+            </a:pPr>
+            <a:r>
+              <a:t>1</a:t>
+            </a:r>
+          </a:p>
+        </p:txBody>
+      </p:sp>
+      <p:sp>
+        <p:nvSpPr>
+          <p:cNvPr id="10" name="TextBox 9"/>
+          <p:cNvSpPr txBox="1"/>
+          <p:nvPr/>
+        </p:nvSpPr>
+        <p:spPr>
+          <a:xfrm>
+            <a:off x="1389888" y="1261872"/>
+            <a:ext cx="10058400" cy="859536"/>
+          </a:xfrm>
+          <a:prstGeom prst="rect">
+            <a:avLst/>
+          </a:prstGeom>
+          <a:noFill/>
+        </p:spPr>
+        <p:txBody>
+          <a:bodyPr wrap="square" lIns="45720" rIns="45720" tIns="36576" bIns="36576" anchor="t">
+            <a:spAutoFit/>
+          </a:bodyPr>
+          <a:lstStyle/>
+          <a:p>
+            <a:pPr algn="l">
+              <a:defRPr sz="1600" b="0">
+                <a:solidFill>
+                  <a:srgbClr val="1C2330"/>
+                </a:solidFill>
+                <a:latin typeface="Aptos"/>
+              </a:defRPr>
+            </a:pPr>
+            <a:r>
+              <a:t>31–40 min — Microprueba de planificación de la torre: Presenta el reto, sin permitir todavía la construcción: Ciclo 1: 6 hojas A4 reutilizadas, tijeras y regla, sin conectores.</a:t>
+            </a:r>
+          </a:p>
+        </p:txBody>
+      </p:sp>
+      <p:sp>
+        <p:nvSpPr>
+          <p:cNvPr id="11" name="Oval 10"/>
           <p:cNvSpPr/>
           <p:nvPr/>
         </p:nvSpPr>
         <p:spPr>
           <a:xfrm>
-            <a:off x="6172200" y="1325880"/>
-            <a:ext cx="5413248" cy="4526280"/>
-          </a:xfrm>
-          <a:prstGeom prst="roundRect">
+            <a:off x="658368" y="2212848"/>
+            <a:ext cx="475488" cy="475488"/>
+          </a:xfrm>
+          <a:prstGeom prst="ellipse">
             <a:avLst/>
           </a:prstGeom>
           <a:solidFill>
-            <a:srgbClr val="FFFFFF"/>
+            <a:srgbClr val="CC4F3E"/>
           </a:solidFill>
           <a:ln>
-            <a:solidFill>
-              <a:srgbClr val="EBEEF2"/>
-            </a:solidFill>
+            <a:noFill/>
           </a:ln>
         </p:spPr>
         <p:style>
@@ -4910,67 +8214,64 @@
       </p:sp>
       <p:sp>
         <p:nvSpPr>
-          <p:cNvPr id="10" name="TextBox 9"/>
-          <p:cNvSpPr txBox="1"/>
-          <p:nvPr/>
-        </p:nvSpPr>
-        <p:spPr>
-          <a:xfrm>
-            <a:off x="868680" y="1600200"/>
-            <a:ext cx="4663440" cy="365760"/>
-          </a:xfrm>
-          <a:prstGeom prst="rect">
-            <a:avLst/>
-          </a:prstGeom>
-          <a:noFill/>
-        </p:spPr>
-        <p:txBody>
-          <a:bodyPr wrap="square" lIns="36576" rIns="36576" tIns="27432" bIns="27432">
+          <p:cNvPr id="12" name="TextBox 11"/>
+          <p:cNvSpPr txBox="1"/>
+          <p:nvPr/>
+        </p:nvSpPr>
+        <p:spPr>
+          <a:xfrm>
+            <a:off x="658368" y="2313432"/>
+            <a:ext cx="475488" cy="201168"/>
+          </a:xfrm>
+          <a:prstGeom prst="rect">
+            <a:avLst/>
+          </a:prstGeom>
+          <a:noFill/>
+        </p:spPr>
+        <p:txBody>
+          <a:bodyPr wrap="square" lIns="45720" rIns="45720" tIns="36576" bIns="36576" anchor="t">
+            <a:spAutoFit/>
+          </a:bodyPr>
+          <a:lstStyle/>
+          <a:p>
+            <a:pPr algn="ctr">
+              <a:defRPr sz="1300" b="1">
+                <a:solidFill>
+                  <a:srgbClr val="FFFFFF"/>
+                </a:solidFill>
+                <a:latin typeface="Aptos"/>
+              </a:defRPr>
+            </a:pPr>
+            <a:r>
+              <a:t>2</a:t>
+            </a:r>
+          </a:p>
+        </p:txBody>
+      </p:sp>
+      <p:sp>
+        <p:nvSpPr>
+          <p:cNvPr id="13" name="TextBox 12"/>
+          <p:cNvSpPr txBox="1"/>
+          <p:nvPr/>
+        </p:nvSpPr>
+        <p:spPr>
+          <a:xfrm>
+            <a:off x="1389888" y="2194560"/>
+            <a:ext cx="10058400" cy="859536"/>
+          </a:xfrm>
+          <a:prstGeom prst="rect">
+            <a:avLst/>
+          </a:prstGeom>
+          <a:noFill/>
+        </p:spPr>
+        <p:txBody>
+          <a:bodyPr wrap="square" lIns="45720" rIns="45720" tIns="36576" bIns="36576" anchor="t">
             <a:spAutoFit/>
           </a:bodyPr>
           <a:lstStyle/>
           <a:p>
             <a:pPr algn="l">
-              <a:defRPr sz="1600" b="1">
-                <a:solidFill>
-                  <a:srgbClr val="CC4F3E"/>
-                </a:solidFill>
-                <a:latin typeface="Aptos"/>
-              </a:defRPr>
-            </a:pPr>
-            <a:r>
-              <a:t>IDEAS CLAVE</a:t>
-            </a:r>
-          </a:p>
-        </p:txBody>
-      </p:sp>
-      <p:sp>
-        <p:nvSpPr>
-          <p:cNvPr id="11" name="TextBox 10"/>
-          <p:cNvSpPr txBox="1"/>
-          <p:nvPr/>
-        </p:nvSpPr>
-        <p:spPr>
-          <a:xfrm>
-            <a:off x="868680" y="2121408"/>
-            <a:ext cx="4572000" cy="3337560"/>
-          </a:xfrm>
-          <a:prstGeom prst="rect">
-            <a:avLst/>
-          </a:prstGeom>
-          <a:noFill/>
-        </p:spPr>
-        <p:txBody>
-          <a:bodyPr wrap="square" lIns="73152" rIns="45720" tIns="36576">
-            <a:spAutoFit/>
-          </a:bodyPr>
-          <a:lstStyle/>
-          <a:p>
-            <a:pPr>
-              <a:spcAft>
-                <a:spcPts val="1000"/>
-              </a:spcAft>
-              <a:defRPr sz="1800">
+              <a:defRPr sz="1600" b="0">
                 <a:solidFill>
                   <a:srgbClr val="1C2330"/>
                 </a:solidFill>
@@ -4978,15 +8279,114 @@
               </a:defRPr>
             </a:pPr>
             <a:r>
-              <a:t>•  Comprender y aplicar el objetivo de la sesión.</a:t>
-            </a:r>
-          </a:p>
-          <a:p>
-            <a:pPr>
-              <a:spcAft>
-                <a:spcPts val="1000"/>
-              </a:spcAft>
-              <a:defRPr sz="1800">
+              <a:t>40–43 min — Defensa cruzada y ajuste: Elige al azar una persona por equipo, evitando que siempre hable quien figura como responsable de comunicación.</a:t>
+            </a:r>
+          </a:p>
+        </p:txBody>
+      </p:sp>
+      <p:sp>
+        <p:nvSpPr>
+          <p:cNvPr id="14" name="Oval 13"/>
+          <p:cNvSpPr/>
+          <p:nvPr/>
+        </p:nvSpPr>
+        <p:spPr>
+          <a:xfrm>
+            <a:off x="658368" y="3145536"/>
+            <a:ext cx="475488" cy="475488"/>
+          </a:xfrm>
+          <a:prstGeom prst="ellipse">
+            <a:avLst/>
+          </a:prstGeom>
+          <a:solidFill>
+            <a:srgbClr val="CC4F3E"/>
+          </a:solidFill>
+          <a:ln>
+            <a:noFill/>
+          </a:ln>
+        </p:spPr>
+        <p:style>
+          <a:lnRef idx="1">
+            <a:schemeClr val="accent1"/>
+          </a:lnRef>
+          <a:fillRef idx="3">
+            <a:schemeClr val="accent1"/>
+          </a:fillRef>
+          <a:effectRef idx="2">
+            <a:schemeClr val="accent1"/>
+          </a:effectRef>
+          <a:fontRef idx="minor">
+            <a:schemeClr val="lt1"/>
+          </a:fontRef>
+        </p:style>
+        <p:txBody>
+          <a:bodyPr rtlCol="0" anchor="ctr"/>
+          <a:lstStyle/>
+          <a:p>
+            <a:pPr algn="ctr"/>
+          </a:p>
+        </p:txBody>
+      </p:sp>
+      <p:sp>
+        <p:nvSpPr>
+          <p:cNvPr id="15" name="TextBox 14"/>
+          <p:cNvSpPr txBox="1"/>
+          <p:nvPr/>
+        </p:nvSpPr>
+        <p:spPr>
+          <a:xfrm>
+            <a:off x="658368" y="3246120"/>
+            <a:ext cx="475488" cy="201168"/>
+          </a:xfrm>
+          <a:prstGeom prst="rect">
+            <a:avLst/>
+          </a:prstGeom>
+          <a:noFill/>
+        </p:spPr>
+        <p:txBody>
+          <a:bodyPr wrap="square" lIns="45720" rIns="45720" tIns="36576" bIns="36576" anchor="t">
+            <a:spAutoFit/>
+          </a:bodyPr>
+          <a:lstStyle/>
+          <a:p>
+            <a:pPr algn="ctr">
+              <a:defRPr sz="1300" b="1">
+                <a:solidFill>
+                  <a:srgbClr val="FFFFFF"/>
+                </a:solidFill>
+                <a:latin typeface="Aptos"/>
+              </a:defRPr>
+            </a:pPr>
+            <a:r>
+              <a:t>3</a:t>
+            </a:r>
+          </a:p>
+        </p:txBody>
+      </p:sp>
+      <p:sp>
+        <p:nvSpPr>
+          <p:cNvPr id="16" name="TextBox 15"/>
+          <p:cNvSpPr txBox="1"/>
+          <p:nvPr/>
+        </p:nvSpPr>
+        <p:spPr>
+          <a:xfrm>
+            <a:off x="1389888" y="3127248"/>
+            <a:ext cx="10058400" cy="859536"/>
+          </a:xfrm>
+          <a:prstGeom prst="rect">
+            <a:avLst/>
+          </a:prstGeom>
+          <a:noFill/>
+        </p:spPr>
+        <p:txBody>
+          <a:bodyPr wrap="square" lIns="45720" rIns="45720" tIns="36576" bIns="36576" anchor="t">
+            <a:spAutoFit/>
+          </a:bodyPr>
+          <a:lstStyle/>
+          <a:p>
+            <a:pPr algn="l">
+              <a:defRPr sz="1600" b="0">
                 <a:solidFill>
                   <a:srgbClr val="1C2330"/>
                 </a:solidFill>
@@ -4994,98 +8394,7 @@
               </a:defRPr>
             </a:pPr>
             <a:r>
-              <a:t>•  Relaciona el producto con el proceso, la prueba y la explicación.</a:t>
-            </a:r>
-          </a:p>
-          <a:p>
-            <a:pPr>
-              <a:spcAft>
-                <a:spcPts val="1000"/>
-              </a:spcAft>
-              <a:defRPr sz="1800">
-                <a:solidFill>
-                  <a:srgbClr val="1C2330"/>
-                </a:solidFill>
-                <a:latin typeface="Aptos"/>
-              </a:defRPr>
-            </a:pPr>
-            <a:r>
-              <a:t>•  La evidencia esperada es: Una evidencia comprobable y defendible.</a:t>
-            </a:r>
-          </a:p>
-        </p:txBody>
-      </p:sp>
-      <p:sp>
-        <p:nvSpPr>
-          <p:cNvPr id="12" name="TextBox 11"/>
-          <p:cNvSpPr txBox="1"/>
-          <p:nvPr/>
-        </p:nvSpPr>
-        <p:spPr>
-          <a:xfrm>
-            <a:off x="6446520" y="1600200"/>
-            <a:ext cx="4572000" cy="365760"/>
-          </a:xfrm>
-          <a:prstGeom prst="rect">
-            <a:avLst/>
-          </a:prstGeom>
-          <a:noFill/>
-        </p:spPr>
-        <p:txBody>
-          <a:bodyPr wrap="square" lIns="36576" rIns="36576" tIns="27432" bIns="27432">
-            <a:spAutoFit/>
-          </a:bodyPr>
-          <a:lstStyle/>
-          <a:p>
-            <a:pPr algn="l">
-              <a:defRPr sz="1600" b="1">
-                <a:solidFill>
-                  <a:srgbClr val="CC4F3E"/>
-                </a:solidFill>
-                <a:latin typeface="Aptos"/>
-              </a:defRPr>
-            </a:pPr>
-            <a:r>
-              <a:t>ACTIVIDAD CENTRAL</a:t>
-            </a:r>
-          </a:p>
-        </p:txBody>
-      </p:sp>
-      <p:sp>
-        <p:nvSpPr>
-          <p:cNvPr id="13" name="TextBox 12"/>
-          <p:cNvSpPr txBox="1"/>
-          <p:nvPr/>
-        </p:nvSpPr>
-        <p:spPr>
-          <a:xfrm>
-            <a:off x="6446520" y="2121408"/>
-            <a:ext cx="4617720" cy="3337560"/>
-          </a:xfrm>
-          <a:prstGeom prst="rect">
-            <a:avLst/>
-          </a:prstGeom>
-          <a:noFill/>
-        </p:spPr>
-        <p:txBody>
-          <a:bodyPr wrap="square" lIns="73152" rIns="45720" tIns="36576">
-            <a:spAutoFit/>
-          </a:bodyPr>
-          <a:lstStyle/>
-          <a:p>
-            <a:pPr>
-              <a:spcAft>
-                <a:spcPts val="1000"/>
-              </a:spcAft>
-              <a:defRPr sz="1800">
-                <a:solidFill>
-                  <a:srgbClr val="1C2330"/>
-                </a:solidFill>
-                <a:latin typeface="Aptos"/>
-              </a:defRPr>
-            </a:pPr>
-            <a:r>
-              <a:t>•  Sigue la consigna indicada en clase.</a:t>
+              <a:t>43–45 min — Cierre individual: Cada estudiante completa: Mi responsabilidad inicial es...</a:t>
             </a:r>
           </a:p>
         </p:txBody>
@@ -5202,16 +8511,16 @@
         </p:nvSpPr>
         <p:spPr>
           <a:xfrm>
-            <a:off x="502920" y="310896"/>
-            <a:ext cx="5029200" cy="256032"/>
-          </a:xfrm>
-          <a:prstGeom prst="rect">
-            <a:avLst/>
-          </a:prstGeom>
-          <a:noFill/>
-        </p:spPr>
-        <p:txBody>
-          <a:bodyPr wrap="square" lIns="36576" rIns="36576" tIns="27432" bIns="27432">
+            <a:off x="502920" y="274320"/>
+            <a:ext cx="5486400" cy="256032"/>
+          </a:xfrm>
+          <a:prstGeom prst="rect">
+            <a:avLst/>
+          </a:prstGeom>
+          <a:noFill/>
+        </p:spPr>
+        <p:txBody>
+          <a:bodyPr wrap="square" lIns="45720" rIns="45720" tIns="36576" bIns="36576" anchor="t">
             <a:spAutoFit/>
           </a:bodyPr>
           <a:lstStyle/>
@@ -5225,7 +8534,7 @@
               </a:defRPr>
             </a:pPr>
             <a:r>
-              <a:t>EVIDENCIA MÍNIMA</a:t>
+              <a:t>COMPRENDER</a:t>
             </a:r>
           </a:p>
         </p:txBody>
@@ -5238,7 +8547,7 @@
         </p:nvSpPr>
         <p:spPr>
           <a:xfrm>
-            <a:off x="502920" y="621792"/>
+            <a:off x="502920" y="603504"/>
             <a:ext cx="11064240" cy="530352"/>
           </a:xfrm>
           <a:prstGeom prst="rect">
@@ -5247,7 +8556,7 @@
           <a:noFill/>
         </p:spPr>
         <p:txBody>
-          <a:bodyPr wrap="square" lIns="36576" rIns="36576" tIns="27432" bIns="27432">
+          <a:bodyPr wrap="square" lIns="45720" rIns="45720" tIns="36576" bIns="36576" anchor="t">
             <a:spAutoFit/>
           </a:bodyPr>
           <a:lstStyle/>
@@ -5261,7 +8570,7 @@
               </a:defRPr>
             </a:pPr>
             <a:r>
-              <a:t>Antes de salir, comprueba</a:t>
+              <a:t>Claves para explicar · 1</a:t>
             </a:r>
           </a:p>
         </p:txBody>
@@ -5326,7 +8635,7 @@
           <a:noFill/>
         </p:spPr>
         <p:txBody>
-          <a:bodyPr wrap="square" lIns="36576" rIns="36576" tIns="27432" bIns="27432">
+          <a:bodyPr wrap="square" lIns="45720" rIns="45720" tIns="36576" bIns="36576" anchor="t">
             <a:spAutoFit/>
           </a:bodyPr>
           <a:lstStyle/>
@@ -5340,7 +8649,7 @@
               </a:defRPr>
             </a:pPr>
             <a:r>
-              <a:t>MiniJarvis · 1.º DAW · Sesión 203 · H0</a:t>
+              <a:t>MiniJarvis · 1.º DAW · Sesión 203 · H0 — Formación y prueba de equipos Scrum mediante la torre de papel</a:t>
             </a:r>
           </a:p>
         </p:txBody>
@@ -5353,8 +8662,8 @@
         </p:nvSpPr>
         <p:spPr>
           <a:xfrm>
-            <a:off x="713232" y="1371600"/>
-            <a:ext cx="420624" cy="420624"/>
+            <a:off x="566928" y="1261872"/>
+            <a:ext cx="3398520" cy="1399032"/>
           </a:xfrm>
           <a:prstGeom prst="roundRect">
             <a:avLst/>
@@ -5364,7 +8673,7 @@
           </a:solidFill>
           <a:ln>
             <a:solidFill>
-              <a:srgbClr val="CC4F3E"/>
+              <a:srgbClr val="E5E9EF"/>
             </a:solidFill>
           </a:ln>
         </p:spPr>
@@ -5398,22 +8707,58 @@
         </p:nvSpPr>
         <p:spPr>
           <a:xfrm>
-            <a:off x="1389888" y="1362456"/>
-            <a:ext cx="9784080" cy="594360"/>
-          </a:xfrm>
-          <a:prstGeom prst="rect">
-            <a:avLst/>
-          </a:prstGeom>
-          <a:noFill/>
-        </p:spPr>
-        <p:txBody>
-          <a:bodyPr wrap="square" lIns="36576" rIns="36576" tIns="27432" bIns="27432">
+            <a:off x="768096" y="1426463"/>
+            <a:ext cx="384048" cy="347472"/>
+          </a:xfrm>
+          <a:prstGeom prst="rect">
+            <a:avLst/>
+          </a:prstGeom>
+          <a:noFill/>
+        </p:spPr>
+        <p:txBody>
+          <a:bodyPr wrap="square" lIns="45720" rIns="45720" tIns="36576" bIns="36576" anchor="t">
             <a:spAutoFit/>
           </a:bodyPr>
           <a:lstStyle/>
           <a:p>
             <a:pPr algn="l">
-              <a:defRPr sz="2000" b="0">
+              <a:defRPr sz="1500" b="1">
+                <a:solidFill>
+                  <a:srgbClr val="CC4F3E"/>
+                </a:solidFill>
+                <a:latin typeface="Aptos"/>
+              </a:defRPr>
+            </a:pPr>
+            <a:r>
+              <a:t>01</a:t>
+            </a:r>
+          </a:p>
+        </p:txBody>
+      </p:sp>
+      <p:sp>
+        <p:nvSpPr>
+          <p:cNvPr id="10" name="TextBox 9"/>
+          <p:cNvSpPr txBox="1"/>
+          <p:nvPr/>
+        </p:nvSpPr>
+        <p:spPr>
+          <a:xfrm>
+            <a:off x="1225295" y="1426463"/>
+            <a:ext cx="2621280" cy="1161288"/>
+          </a:xfrm>
+          <a:prstGeom prst="rect">
+            <a:avLst/>
+          </a:prstGeom>
+          <a:noFill/>
+        </p:spPr>
+        <p:txBody>
+          <a:bodyPr wrap="square" lIns="45720" rIns="45720" tIns="36576" bIns="36576" anchor="t">
+            <a:spAutoFit/>
+          </a:bodyPr>
+          <a:lstStyle/>
+          <a:p>
+            <a:pPr algn="l">
+              <a:defRPr sz="1300" b="0">
                 <a:solidFill>
                   <a:srgbClr val="1C2330"/>
                 </a:solidFill>
@@ -5421,21 +8766,21 @@
               </a:defRPr>
             </a:pPr>
             <a:r>
-              <a:t>He producido o actualizado: Una evidencia comprobable y defendible.</a:t>
-            </a:r>
-          </a:p>
-        </p:txBody>
-      </p:sp>
-      <p:sp>
-        <p:nvSpPr>
-          <p:cNvPr id="10" name="Rounded Rectangle 9"/>
+              <a:t>HADA describe tendencias de contribución: Gestor, Colaborador, Desarrollador, Analista.</a:t>
+            </a:r>
+          </a:p>
+        </p:txBody>
+      </p:sp>
+      <p:sp>
+        <p:nvSpPr>
+          <p:cNvPr id="11" name="Rounded Rectangle 10"/>
           <p:cNvSpPr/>
           <p:nvPr/>
         </p:nvSpPr>
         <p:spPr>
           <a:xfrm>
-            <a:off x="713232" y="2267712"/>
-            <a:ext cx="420624" cy="420624"/>
+            <a:off x="4194048" y="1261872"/>
+            <a:ext cx="3398520" cy="1399032"/>
           </a:xfrm>
           <a:prstGeom prst="roundRect">
             <a:avLst/>
@@ -5445,7 +8790,7 @@
           </a:solidFill>
           <a:ln>
             <a:solidFill>
-              <a:srgbClr val="CC4F3E"/>
+              <a:srgbClr val="E5E9EF"/>
             </a:solidFill>
           </a:ln>
         </p:spPr>
@@ -5473,28 +8818,64 @@
       </p:sp>
       <p:sp>
         <p:nvSpPr>
-          <p:cNvPr id="11" name="TextBox 10"/>
-          <p:cNvSpPr txBox="1"/>
-          <p:nvPr/>
-        </p:nvSpPr>
-        <p:spPr>
-          <a:xfrm>
-            <a:off x="1389888" y="2258568"/>
-            <a:ext cx="9784080" cy="594360"/>
-          </a:xfrm>
-          <a:prstGeom prst="rect">
-            <a:avLst/>
-          </a:prstGeom>
-          <a:noFill/>
-        </p:spPr>
-        <p:txBody>
-          <a:bodyPr wrap="square" lIns="36576" rIns="36576" tIns="27432" bIns="27432">
+          <p:cNvPr id="12" name="TextBox 11"/>
+          <p:cNvSpPr txBox="1"/>
+          <p:nvPr/>
+        </p:nvSpPr>
+        <p:spPr>
+          <a:xfrm>
+            <a:off x="4395216" y="1426463"/>
+            <a:ext cx="384048" cy="347472"/>
+          </a:xfrm>
+          <a:prstGeom prst="rect">
+            <a:avLst/>
+          </a:prstGeom>
+          <a:noFill/>
+        </p:spPr>
+        <p:txBody>
+          <a:bodyPr wrap="square" lIns="45720" rIns="45720" tIns="36576" bIns="36576" anchor="t">
             <a:spAutoFit/>
           </a:bodyPr>
           <a:lstStyle/>
           <a:p>
             <a:pPr algn="l">
-              <a:defRPr sz="2000" b="0">
+              <a:defRPr sz="1500" b="1">
+                <a:solidFill>
+                  <a:srgbClr val="CC4F3E"/>
+                </a:solidFill>
+                <a:latin typeface="Aptos"/>
+              </a:defRPr>
+            </a:pPr>
+            <a:r>
+              <a:t>02</a:t>
+            </a:r>
+          </a:p>
+        </p:txBody>
+      </p:sp>
+      <p:sp>
+        <p:nvSpPr>
+          <p:cNvPr id="13" name="TextBox 12"/>
+          <p:cNvSpPr txBox="1"/>
+          <p:nvPr/>
+        </p:nvSpPr>
+        <p:spPr>
+          <a:xfrm>
+            <a:off x="4852416" y="1426463"/>
+            <a:ext cx="2621280" cy="1161288"/>
+          </a:xfrm>
+          <a:prstGeom prst="rect">
+            <a:avLst/>
+          </a:prstGeom>
+          <a:noFill/>
+        </p:spPr>
+        <p:txBody>
+          <a:bodyPr wrap="square" lIns="45720" rIns="45720" tIns="36576" bIns="36576" anchor="t">
+            <a:spAutoFit/>
+          </a:bodyPr>
+          <a:lstStyle/>
+          <a:p>
+            <a:pPr algn="l">
+              <a:defRPr sz="1300" b="0">
                 <a:solidFill>
                   <a:srgbClr val="1C2330"/>
                 </a:solidFill>
@@ -5502,21 +8883,21 @@
               </a:defRPr>
             </a:pPr>
             <a:r>
-              <a:t>Puedo señalar dónde está.</a:t>
-            </a:r>
-          </a:p>
-        </p:txBody>
-      </p:sp>
-      <p:sp>
-        <p:nvSpPr>
-          <p:cNvPr id="12" name="Rounded Rectangle 11"/>
+              <a:t>No crea una jerarquía ni obliga a desempeñar una función concreta.</a:t>
+            </a:r>
+          </a:p>
+        </p:txBody>
+      </p:sp>
+      <p:sp>
+        <p:nvSpPr>
+          <p:cNvPr id="14" name="Rounded Rectangle 13"/>
           <p:cNvSpPr/>
           <p:nvPr/>
         </p:nvSpPr>
         <p:spPr>
           <a:xfrm>
-            <a:off x="713232" y="3163824"/>
-            <a:ext cx="420624" cy="420624"/>
+            <a:off x="7821167" y="1261872"/>
+            <a:ext cx="3398520" cy="1399032"/>
           </a:xfrm>
           <a:prstGeom prst="roundRect">
             <a:avLst/>
@@ -5526,7 +8907,7 @@
           </a:solidFill>
           <a:ln>
             <a:solidFill>
-              <a:srgbClr val="CC4F3E"/>
+              <a:srgbClr val="E5E9EF"/>
             </a:solidFill>
           </a:ln>
         </p:spPr>
@@ -5554,28 +8935,64 @@
       </p:sp>
       <p:sp>
         <p:nvSpPr>
-          <p:cNvPr id="13" name="TextBox 12"/>
-          <p:cNvSpPr txBox="1"/>
-          <p:nvPr/>
-        </p:nvSpPr>
-        <p:spPr>
-          <a:xfrm>
-            <a:off x="1389888" y="3154680"/>
-            <a:ext cx="9784080" cy="594360"/>
-          </a:xfrm>
-          <a:prstGeom prst="rect">
-            <a:avLst/>
-          </a:prstGeom>
-          <a:noFill/>
-        </p:spPr>
-        <p:txBody>
-          <a:bodyPr wrap="square" lIns="36576" rIns="36576" tIns="27432" bIns="27432">
+          <p:cNvPr id="15" name="TextBox 14"/>
+          <p:cNvSpPr txBox="1"/>
+          <p:nvPr/>
+        </p:nvSpPr>
+        <p:spPr>
+          <a:xfrm>
+            <a:off x="8022336" y="1426463"/>
+            <a:ext cx="384048" cy="347472"/>
+          </a:xfrm>
+          <a:prstGeom prst="rect">
+            <a:avLst/>
+          </a:prstGeom>
+          <a:noFill/>
+        </p:spPr>
+        <p:txBody>
+          <a:bodyPr wrap="square" lIns="45720" rIns="45720" tIns="36576" bIns="36576" anchor="t">
             <a:spAutoFit/>
           </a:bodyPr>
           <a:lstStyle/>
           <a:p>
             <a:pPr algn="l">
-              <a:defRPr sz="2000" b="0">
+              <a:defRPr sz="1500" b="1">
+                <a:solidFill>
+                  <a:srgbClr val="CC4F3E"/>
+                </a:solidFill>
+                <a:latin typeface="Aptos"/>
+              </a:defRPr>
+            </a:pPr>
+            <a:r>
+              <a:t>03</a:t>
+            </a:r>
+          </a:p>
+        </p:txBody>
+      </p:sp>
+      <p:sp>
+        <p:nvSpPr>
+          <p:cNvPr id="16" name="TextBox 15"/>
+          <p:cNvSpPr txBox="1"/>
+          <p:nvPr/>
+        </p:nvSpPr>
+        <p:spPr>
+          <a:xfrm>
+            <a:off x="8479536" y="1426463"/>
+            <a:ext cx="2621280" cy="1161288"/>
+          </a:xfrm>
+          <a:prstGeom prst="rect">
+            <a:avLst/>
+          </a:prstGeom>
+          <a:noFill/>
+        </p:spPr>
+        <p:txBody>
+          <a:bodyPr wrap="square" lIns="45720" rIns="45720" tIns="36576" bIns="36576" anchor="t">
+            <a:spAutoFit/>
+          </a:bodyPr>
+          <a:lstStyle/>
+          <a:p>
+            <a:pPr algn="l">
+              <a:defRPr sz="1300" b="0">
                 <a:solidFill>
                   <a:srgbClr val="1C2330"/>
                 </a:solidFill>
@@ -5583,21 +9000,21 @@
               </a:defRPr>
             </a:pPr>
             <a:r>
-              <a:t>Puedo explicar una decisión.</a:t>
-            </a:r>
-          </a:p>
-        </p:txBody>
-      </p:sp>
-      <p:sp>
-        <p:nvSpPr>
-          <p:cNvPr id="14" name="Rounded Rectangle 13"/>
+              <a:t>Responsabilidades Scrum: En Scrum existen Product Owner, Scrum Master y Developers. En esta experiencia escolar se utilizan equivalentes didácticos limitados:</a:t>
+            </a:r>
+          </a:p>
+        </p:txBody>
+      </p:sp>
+      <p:sp>
+        <p:nvSpPr>
+          <p:cNvPr id="17" name="Rounded Rectangle 16"/>
           <p:cNvSpPr/>
           <p:nvPr/>
         </p:nvSpPr>
         <p:spPr>
           <a:xfrm>
-            <a:off x="713232" y="4059935"/>
-            <a:ext cx="420624" cy="420624"/>
+            <a:off x="566928" y="2862072"/>
+            <a:ext cx="3398520" cy="1399032"/>
           </a:xfrm>
           <a:prstGeom prst="roundRect">
             <a:avLst/>
@@ -5607,7 +9024,7 @@
           </a:solidFill>
           <a:ln>
             <a:solidFill>
-              <a:srgbClr val="CC4F3E"/>
+              <a:srgbClr val="E5E9EF"/>
             </a:solidFill>
           </a:ln>
         </p:spPr>
@@ -5635,28 +9052,64 @@
       </p:sp>
       <p:sp>
         <p:nvSpPr>
-          <p:cNvPr id="15" name="TextBox 14"/>
-          <p:cNvSpPr txBox="1"/>
-          <p:nvPr/>
-        </p:nvSpPr>
-        <p:spPr>
-          <a:xfrm>
-            <a:off x="1389888" y="4050791"/>
-            <a:ext cx="9784080" cy="594360"/>
-          </a:xfrm>
-          <a:prstGeom prst="rect">
-            <a:avLst/>
-          </a:prstGeom>
-          <a:noFill/>
-        </p:spPr>
-        <p:txBody>
-          <a:bodyPr wrap="square" lIns="36576" rIns="36576" tIns="27432" bIns="27432">
+          <p:cNvPr id="18" name="TextBox 17"/>
+          <p:cNvSpPr txBox="1"/>
+          <p:nvPr/>
+        </p:nvSpPr>
+        <p:spPr>
+          <a:xfrm>
+            <a:off x="768096" y="3026664"/>
+            <a:ext cx="384048" cy="347472"/>
+          </a:xfrm>
+          <a:prstGeom prst="rect">
+            <a:avLst/>
+          </a:prstGeom>
+          <a:noFill/>
+        </p:spPr>
+        <p:txBody>
+          <a:bodyPr wrap="square" lIns="45720" rIns="45720" tIns="36576" bIns="36576" anchor="t">
             <a:spAutoFit/>
           </a:bodyPr>
           <a:lstStyle/>
           <a:p>
             <a:pPr algn="l">
-              <a:defRPr sz="2000" b="0">
+              <a:defRPr sz="1500" b="1">
+                <a:solidFill>
+                  <a:srgbClr val="CC4F3E"/>
+                </a:solidFill>
+                <a:latin typeface="Aptos"/>
+              </a:defRPr>
+            </a:pPr>
+            <a:r>
+              <a:t>04</a:t>
+            </a:r>
+          </a:p>
+        </p:txBody>
+      </p:sp>
+      <p:sp>
+        <p:nvSpPr>
+          <p:cNvPr id="19" name="TextBox 18"/>
+          <p:cNvSpPr txBox="1"/>
+          <p:nvPr/>
+        </p:nvSpPr>
+        <p:spPr>
+          <a:xfrm>
+            <a:off x="1225295" y="3026664"/>
+            <a:ext cx="2621280" cy="1161288"/>
+          </a:xfrm>
+          <a:prstGeom prst="rect">
+            <a:avLst/>
+          </a:prstGeom>
+          <a:noFill/>
+        </p:spPr>
+        <p:txBody>
+          <a:bodyPr wrap="square" lIns="45720" rIns="45720" tIns="36576" bIns="36576" anchor="t">
+            <a:spAutoFit/>
+          </a:bodyPr>
+          <a:lstStyle/>
+          <a:p>
+            <a:pPr algn="l">
+              <a:defRPr sz="1300" b="0">
                 <a:solidFill>
                   <a:srgbClr val="1C2330"/>
                 </a:solidFill>
@@ -5664,7 +9117,358 @@
               </a:defRPr>
             </a:pPr>
             <a:r>
-              <a:t>Puedo mostrar una prueba.</a:t>
+              <a:t>el foco de valor y backlog recoge parte de la preocupación del Product Owner, el foco de facilitación recoge parte de la preocupación del Scrum Master;</a:t>
+            </a:r>
+          </a:p>
+        </p:txBody>
+      </p:sp>
+      <p:sp>
+        <p:nvSpPr>
+          <p:cNvPr id="20" name="Rounded Rectangle 19"/>
+          <p:cNvSpPr/>
+          <p:nvPr/>
+        </p:nvSpPr>
+        <p:spPr>
+          <a:xfrm>
+            <a:off x="4194048" y="2862072"/>
+            <a:ext cx="3398520" cy="1399032"/>
+          </a:xfrm>
+          <a:prstGeom prst="roundRect">
+            <a:avLst/>
+          </a:prstGeom>
+          <a:solidFill>
+            <a:srgbClr val="FFFFFF"/>
+          </a:solidFill>
+          <a:ln>
+            <a:solidFill>
+              <a:srgbClr val="E5E9EF"/>
+            </a:solidFill>
+          </a:ln>
+        </p:spPr>
+        <p:style>
+          <a:lnRef idx="1">
+            <a:schemeClr val="accent1"/>
+          </a:lnRef>
+          <a:fillRef idx="3">
+            <a:schemeClr val="accent1"/>
+          </a:fillRef>
+          <a:effectRef idx="2">
+            <a:schemeClr val="accent1"/>
+          </a:effectRef>
+          <a:fontRef idx="minor">
+            <a:schemeClr val="lt1"/>
+          </a:fontRef>
+        </p:style>
+        <p:txBody>
+          <a:bodyPr rtlCol="0" anchor="ctr"/>
+          <a:lstStyle/>
+          <a:p>
+            <a:pPr algn="ctr"/>
+          </a:p>
+        </p:txBody>
+      </p:sp>
+      <p:sp>
+        <p:nvSpPr>
+          <p:cNvPr id="21" name="TextBox 20"/>
+          <p:cNvSpPr txBox="1"/>
+          <p:nvPr/>
+        </p:nvSpPr>
+        <p:spPr>
+          <a:xfrm>
+            <a:off x="4395216" y="3026664"/>
+            <a:ext cx="384048" cy="347472"/>
+          </a:xfrm>
+          <a:prstGeom prst="rect">
+            <a:avLst/>
+          </a:prstGeom>
+          <a:noFill/>
+        </p:spPr>
+        <p:txBody>
+          <a:bodyPr wrap="square" lIns="45720" rIns="45720" tIns="36576" bIns="36576" anchor="t">
+            <a:spAutoFit/>
+          </a:bodyPr>
+          <a:lstStyle/>
+          <a:p>
+            <a:pPr algn="l">
+              <a:defRPr sz="1500" b="1">
+                <a:solidFill>
+                  <a:srgbClr val="CC4F3E"/>
+                </a:solidFill>
+                <a:latin typeface="Aptos"/>
+              </a:defRPr>
+            </a:pPr>
+            <a:r>
+              <a:t>05</a:t>
+            </a:r>
+          </a:p>
+        </p:txBody>
+      </p:sp>
+      <p:sp>
+        <p:nvSpPr>
+          <p:cNvPr id="22" name="TextBox 21"/>
+          <p:cNvSpPr txBox="1"/>
+          <p:nvPr/>
+        </p:nvSpPr>
+        <p:spPr>
+          <a:xfrm>
+            <a:off x="4852416" y="3026664"/>
+            <a:ext cx="2621280" cy="1161288"/>
+          </a:xfrm>
+          <a:prstGeom prst="rect">
+            <a:avLst/>
+          </a:prstGeom>
+          <a:noFill/>
+        </p:spPr>
+        <p:txBody>
+          <a:bodyPr wrap="square" lIns="45720" rIns="45720" tIns="36576" bIns="36576" anchor="t">
+            <a:spAutoFit/>
+          </a:bodyPr>
+          <a:lstStyle/>
+          <a:p>
+            <a:pPr algn="l">
+              <a:defRPr sz="1300" b="0">
+                <a:solidFill>
+                  <a:srgbClr val="1C2330"/>
+                </a:solidFill>
+                <a:latin typeface="Aptos"/>
+              </a:defRPr>
+            </a:pPr>
+            <a:r>
+              <a:t>todo el equipo actúa como desarrollador del producto físico.</a:t>
+            </a:r>
+          </a:p>
+        </p:txBody>
+      </p:sp>
+      <p:sp>
+        <p:nvSpPr>
+          <p:cNvPr id="23" name="Rounded Rectangle 22"/>
+          <p:cNvSpPr/>
+          <p:nvPr/>
+        </p:nvSpPr>
+        <p:spPr>
+          <a:xfrm>
+            <a:off x="7821167" y="2862072"/>
+            <a:ext cx="3398520" cy="1399032"/>
+          </a:xfrm>
+          <a:prstGeom prst="roundRect">
+            <a:avLst/>
+          </a:prstGeom>
+          <a:solidFill>
+            <a:srgbClr val="FFFFFF"/>
+          </a:solidFill>
+          <a:ln>
+            <a:solidFill>
+              <a:srgbClr val="E5E9EF"/>
+            </a:solidFill>
+          </a:ln>
+        </p:spPr>
+        <p:style>
+          <a:lnRef idx="1">
+            <a:schemeClr val="accent1"/>
+          </a:lnRef>
+          <a:fillRef idx="3">
+            <a:schemeClr val="accent1"/>
+          </a:fillRef>
+          <a:effectRef idx="2">
+            <a:schemeClr val="accent1"/>
+          </a:effectRef>
+          <a:fontRef idx="minor">
+            <a:schemeClr val="lt1"/>
+          </a:fontRef>
+        </p:style>
+        <p:txBody>
+          <a:bodyPr rtlCol="0" anchor="ctr"/>
+          <a:lstStyle/>
+          <a:p>
+            <a:pPr algn="ctr"/>
+          </a:p>
+        </p:txBody>
+      </p:sp>
+      <p:sp>
+        <p:nvSpPr>
+          <p:cNvPr id="24" name="TextBox 23"/>
+          <p:cNvSpPr txBox="1"/>
+          <p:nvPr/>
+        </p:nvSpPr>
+        <p:spPr>
+          <a:xfrm>
+            <a:off x="8022336" y="3026664"/>
+            <a:ext cx="384048" cy="347472"/>
+          </a:xfrm>
+          <a:prstGeom prst="rect">
+            <a:avLst/>
+          </a:prstGeom>
+          <a:noFill/>
+        </p:spPr>
+        <p:txBody>
+          <a:bodyPr wrap="square" lIns="45720" rIns="45720" tIns="36576" bIns="36576" anchor="t">
+            <a:spAutoFit/>
+          </a:bodyPr>
+          <a:lstStyle/>
+          <a:p>
+            <a:pPr algn="l">
+              <a:defRPr sz="1500" b="1">
+                <a:solidFill>
+                  <a:srgbClr val="CC4F3E"/>
+                </a:solidFill>
+                <a:latin typeface="Aptos"/>
+              </a:defRPr>
+            </a:pPr>
+            <a:r>
+              <a:t>06</a:t>
+            </a:r>
+          </a:p>
+        </p:txBody>
+      </p:sp>
+      <p:sp>
+        <p:nvSpPr>
+          <p:cNvPr id="25" name="TextBox 24"/>
+          <p:cNvSpPr txBox="1"/>
+          <p:nvPr/>
+        </p:nvSpPr>
+        <p:spPr>
+          <a:xfrm>
+            <a:off x="8479536" y="3026664"/>
+            <a:ext cx="2621280" cy="1161288"/>
+          </a:xfrm>
+          <a:prstGeom prst="rect">
+            <a:avLst/>
+          </a:prstGeom>
+          <a:noFill/>
+        </p:spPr>
+        <p:txBody>
+          <a:bodyPr wrap="square" lIns="45720" rIns="45720" tIns="36576" bIns="36576" anchor="t">
+            <a:spAutoFit/>
+          </a:bodyPr>
+          <a:lstStyle/>
+          <a:p>
+            <a:pPr algn="l">
+              <a:defRPr sz="1300" b="0">
+                <a:solidFill>
+                  <a:srgbClr val="1C2330"/>
+                </a:solidFill>
+                <a:latin typeface="Aptos"/>
+              </a:defRPr>
+            </a:pPr>
+            <a:r>
+              <a:t>No presentes los cuatro focos operativos como los cuatro roles oficiales de Scrum. Calidad y evidencias son funciones educativas añadidas para garantizar participación, prueba y trazabilidad.</a:t>
+            </a:r>
+          </a:p>
+        </p:txBody>
+      </p:sp>
+      <p:sp>
+        <p:nvSpPr>
+          <p:cNvPr id="26" name="Rounded Rectangle 25"/>
+          <p:cNvSpPr/>
+          <p:nvPr/>
+        </p:nvSpPr>
+        <p:spPr>
+          <a:xfrm>
+            <a:off x="566928" y="4462272"/>
+            <a:ext cx="3398520" cy="1399032"/>
+          </a:xfrm>
+          <a:prstGeom prst="roundRect">
+            <a:avLst/>
+          </a:prstGeom>
+          <a:solidFill>
+            <a:srgbClr val="FFFFFF"/>
+          </a:solidFill>
+          <a:ln>
+            <a:solidFill>
+              <a:srgbClr val="E5E9EF"/>
+            </a:solidFill>
+          </a:ln>
+        </p:spPr>
+        <p:style>
+          <a:lnRef idx="1">
+            <a:schemeClr val="accent1"/>
+          </a:lnRef>
+          <a:fillRef idx="3">
+            <a:schemeClr val="accent1"/>
+          </a:fillRef>
+          <a:effectRef idx="2">
+            <a:schemeClr val="accent1"/>
+          </a:effectRef>
+          <a:fontRef idx="minor">
+            <a:schemeClr val="lt1"/>
+          </a:fontRef>
+        </p:style>
+        <p:txBody>
+          <a:bodyPr rtlCol="0" anchor="ctr"/>
+          <a:lstStyle/>
+          <a:p>
+            <a:pPr algn="ctr"/>
+          </a:p>
+        </p:txBody>
+      </p:sp>
+      <p:sp>
+        <p:nvSpPr>
+          <p:cNvPr id="27" name="TextBox 26"/>
+          <p:cNvSpPr txBox="1"/>
+          <p:nvPr/>
+        </p:nvSpPr>
+        <p:spPr>
+          <a:xfrm>
+            <a:off x="768096" y="4626864"/>
+            <a:ext cx="384048" cy="347472"/>
+          </a:xfrm>
+          <a:prstGeom prst="rect">
+            <a:avLst/>
+          </a:prstGeom>
+          <a:noFill/>
+        </p:spPr>
+        <p:txBody>
+          <a:bodyPr wrap="square" lIns="45720" rIns="45720" tIns="36576" bIns="36576" anchor="t">
+            <a:spAutoFit/>
+          </a:bodyPr>
+          <a:lstStyle/>
+          <a:p>
+            <a:pPr algn="l">
+              <a:defRPr sz="1500" b="1">
+                <a:solidFill>
+                  <a:srgbClr val="CC4F3E"/>
+                </a:solidFill>
+                <a:latin typeface="Aptos"/>
+              </a:defRPr>
+            </a:pPr>
+            <a:r>
+              <a:t>07</a:t>
+            </a:r>
+          </a:p>
+        </p:txBody>
+      </p:sp>
+      <p:sp>
+        <p:nvSpPr>
+          <p:cNvPr id="28" name="TextBox 27"/>
+          <p:cNvSpPr txBox="1"/>
+          <p:nvPr/>
+        </p:nvSpPr>
+        <p:spPr>
+          <a:xfrm>
+            <a:off x="1225295" y="4626864"/>
+            <a:ext cx="2621280" cy="1161288"/>
+          </a:xfrm>
+          <a:prstGeom prst="rect">
+            <a:avLst/>
+          </a:prstGeom>
+          <a:noFill/>
+        </p:spPr>
+        <p:txBody>
+          <a:bodyPr wrap="square" lIns="45720" rIns="45720" tIns="36576" bIns="36576" anchor="t">
+            <a:spAutoFit/>
+          </a:bodyPr>
+          <a:lstStyle/>
+          <a:p>
+            <a:pPr algn="l">
+              <a:defRPr sz="1300" b="0">
+                <a:solidFill>
+                  <a:srgbClr val="1C2330"/>
+                </a:solidFill>
+                <a:latin typeface="Aptos"/>
+              </a:defRPr>
+            </a:pPr>
+            <a:r>
+              <a:t>Valor y backlog — Mantiene objetivo, prioridades, tareas y criterio de aceptación visibles. — No decide todo ni reparte órdenes.</a:t>
             </a:r>
           </a:p>
         </p:txBody>
@@ -5781,16 +9585,16 @@
         </p:nvSpPr>
         <p:spPr>
           <a:xfrm>
-            <a:off x="502920" y="310896"/>
-            <a:ext cx="5029200" cy="256032"/>
-          </a:xfrm>
-          <a:prstGeom prst="rect">
-            <a:avLst/>
-          </a:prstGeom>
-          <a:noFill/>
-        </p:spPr>
-        <p:txBody>
-          <a:bodyPr wrap="square" lIns="36576" rIns="36576" tIns="27432" bIns="27432">
+            <a:off x="502920" y="274320"/>
+            <a:ext cx="5486400" cy="256032"/>
+          </a:xfrm>
+          <a:prstGeom prst="rect">
+            <a:avLst/>
+          </a:prstGeom>
+          <a:noFill/>
+        </p:spPr>
+        <p:txBody>
+          <a:bodyPr wrap="square" lIns="45720" rIns="45720" tIns="36576" bIns="36576" anchor="t">
             <a:spAutoFit/>
           </a:bodyPr>
           <a:lstStyle/>
@@ -5804,7 +9608,7 @@
               </a:defRPr>
             </a:pPr>
             <a:r>
-              <a:t>COMPRUEBA Y EXPLICA</a:t>
+              <a:t>COMPRENDER</a:t>
             </a:r>
           </a:p>
         </p:txBody>
@@ -5817,7 +9621,7 @@
         </p:nvSpPr>
         <p:spPr>
           <a:xfrm>
-            <a:off x="502920" y="621792"/>
+            <a:off x="502920" y="603504"/>
             <a:ext cx="11064240" cy="530352"/>
           </a:xfrm>
           <a:prstGeom prst="rect">
@@ -5826,7 +9630,7 @@
           <a:noFill/>
         </p:spPr>
         <p:txBody>
-          <a:bodyPr wrap="square" lIns="36576" rIns="36576" tIns="27432" bIns="27432">
+          <a:bodyPr wrap="square" lIns="45720" rIns="45720" tIns="36576" bIns="36576" anchor="t">
             <a:spAutoFit/>
           </a:bodyPr>
           <a:lstStyle/>
@@ -5840,7 +9644,7 @@
               </a:defRPr>
             </a:pPr>
             <a:r>
-              <a:t>Cierre de la sesión</a:t>
+              <a:t>Claves para explicar · 2</a:t>
             </a:r>
           </a:p>
         </p:txBody>
@@ -5905,7 +9709,7 @@
           <a:noFill/>
         </p:spPr>
         <p:txBody>
-          <a:bodyPr wrap="square" lIns="36576" rIns="36576" tIns="27432" bIns="27432">
+          <a:bodyPr wrap="square" lIns="45720" rIns="45720" tIns="36576" bIns="36576" anchor="t">
             <a:spAutoFit/>
           </a:bodyPr>
           <a:lstStyle/>
@@ -5919,7 +9723,7 @@
               </a:defRPr>
             </a:pPr>
             <a:r>
-              <a:t>MiniJarvis · 1.º DAW · Sesión 203 · H0</a:t>
+              <a:t>MiniJarvis · 1.º DAW · Sesión 203 · H0 — Formación y prueba de equipos Scrum mediante la torre de papel</a:t>
             </a:r>
           </a:p>
         </p:txBody>
@@ -5932,10 +9736,656 @@
         </p:nvSpPr>
         <p:spPr>
           <a:xfrm>
-            <a:off x="621792" y="1298448"/>
-            <a:ext cx="10927080" cy="1965960"/>
+            <a:off x="566928" y="1261872"/>
+            <a:ext cx="3398520" cy="2199132"/>
           </a:xfrm>
           <a:prstGeom prst="roundRect">
+            <a:avLst/>
+          </a:prstGeom>
+          <a:solidFill>
+            <a:srgbClr val="FFFFFF"/>
+          </a:solidFill>
+          <a:ln>
+            <a:solidFill>
+              <a:srgbClr val="E5E9EF"/>
+            </a:solidFill>
+          </a:ln>
+        </p:spPr>
+        <p:style>
+          <a:lnRef idx="1">
+            <a:schemeClr val="accent1"/>
+          </a:lnRef>
+          <a:fillRef idx="3">
+            <a:schemeClr val="accent1"/>
+          </a:fillRef>
+          <a:effectRef idx="2">
+            <a:schemeClr val="accent1"/>
+          </a:effectRef>
+          <a:fontRef idx="minor">
+            <a:schemeClr val="lt1"/>
+          </a:fontRef>
+        </p:style>
+        <p:txBody>
+          <a:bodyPr rtlCol="0" anchor="ctr"/>
+          <a:lstStyle/>
+          <a:p>
+            <a:pPr algn="ctr"/>
+          </a:p>
+        </p:txBody>
+      </p:sp>
+      <p:sp>
+        <p:nvSpPr>
+          <p:cNvPr id="9" name="TextBox 8"/>
+          <p:cNvSpPr txBox="1"/>
+          <p:nvPr/>
+        </p:nvSpPr>
+        <p:spPr>
+          <a:xfrm>
+            <a:off x="768096" y="1426463"/>
+            <a:ext cx="384048" cy="347472"/>
+          </a:xfrm>
+          <a:prstGeom prst="rect">
+            <a:avLst/>
+          </a:prstGeom>
+          <a:noFill/>
+        </p:spPr>
+        <p:txBody>
+          <a:bodyPr wrap="square" lIns="45720" rIns="45720" tIns="36576" bIns="36576" anchor="t">
+            <a:spAutoFit/>
+          </a:bodyPr>
+          <a:lstStyle/>
+          <a:p>
+            <a:pPr algn="l">
+              <a:defRPr sz="1500" b="1">
+                <a:solidFill>
+                  <a:srgbClr val="CC4F3E"/>
+                </a:solidFill>
+                <a:latin typeface="Aptos"/>
+              </a:defRPr>
+            </a:pPr>
+            <a:r>
+              <a:t>01</a:t>
+            </a:r>
+          </a:p>
+        </p:txBody>
+      </p:sp>
+      <p:sp>
+        <p:nvSpPr>
+          <p:cNvPr id="10" name="TextBox 9"/>
+          <p:cNvSpPr txBox="1"/>
+          <p:nvPr/>
+        </p:nvSpPr>
+        <p:spPr>
+          <a:xfrm>
+            <a:off x="1225295" y="1426463"/>
+            <a:ext cx="2621280" cy="1961388"/>
+          </a:xfrm>
+          <a:prstGeom prst="rect">
+            <a:avLst/>
+          </a:prstGeom>
+          <a:noFill/>
+        </p:spPr>
+        <p:txBody>
+          <a:bodyPr wrap="square" lIns="45720" rIns="45720" tIns="36576" bIns="36576" anchor="t">
+            <a:spAutoFit/>
+          </a:bodyPr>
+          <a:lstStyle/>
+          <a:p>
+            <a:pPr algn="l">
+              <a:defRPr sz="1300" b="0">
+                <a:solidFill>
+                  <a:srgbClr val="1C2330"/>
+                </a:solidFill>
+                <a:latin typeface="Aptos"/>
+              </a:defRPr>
+            </a:pPr>
+            <a:r>
+              <a:t>Facilitación y tiempo — Facilita turnos, hace visibles bloqueos y avisa de hitos temporales. — No es jefe ni controla a las personas.</a:t>
+            </a:r>
+          </a:p>
+        </p:txBody>
+      </p:sp>
+      <p:sp>
+        <p:nvSpPr>
+          <p:cNvPr id="11" name="Rounded Rectangle 10"/>
+          <p:cNvSpPr/>
+          <p:nvPr/>
+        </p:nvSpPr>
+        <p:spPr>
+          <a:xfrm>
+            <a:off x="4194048" y="1261872"/>
+            <a:ext cx="3398520" cy="2199132"/>
+          </a:xfrm>
+          <a:prstGeom prst="roundRect">
+            <a:avLst/>
+          </a:prstGeom>
+          <a:solidFill>
+            <a:srgbClr val="FFFFFF"/>
+          </a:solidFill>
+          <a:ln>
+            <a:solidFill>
+              <a:srgbClr val="E5E9EF"/>
+            </a:solidFill>
+          </a:ln>
+        </p:spPr>
+        <p:style>
+          <a:lnRef idx="1">
+            <a:schemeClr val="accent1"/>
+          </a:lnRef>
+          <a:fillRef idx="3">
+            <a:schemeClr val="accent1"/>
+          </a:fillRef>
+          <a:effectRef idx="2">
+            <a:schemeClr val="accent1"/>
+          </a:effectRef>
+          <a:fontRef idx="minor">
+            <a:schemeClr val="lt1"/>
+          </a:fontRef>
+        </p:style>
+        <p:txBody>
+          <a:bodyPr rtlCol="0" anchor="ctr"/>
+          <a:lstStyle/>
+          <a:p>
+            <a:pPr algn="ctr"/>
+          </a:p>
+        </p:txBody>
+      </p:sp>
+      <p:sp>
+        <p:nvSpPr>
+          <p:cNvPr id="12" name="TextBox 11"/>
+          <p:cNvSpPr txBox="1"/>
+          <p:nvPr/>
+        </p:nvSpPr>
+        <p:spPr>
+          <a:xfrm>
+            <a:off x="4395216" y="1426463"/>
+            <a:ext cx="384048" cy="347472"/>
+          </a:xfrm>
+          <a:prstGeom prst="rect">
+            <a:avLst/>
+          </a:prstGeom>
+          <a:noFill/>
+        </p:spPr>
+        <p:txBody>
+          <a:bodyPr wrap="square" lIns="45720" rIns="45720" tIns="36576" bIns="36576" anchor="t">
+            <a:spAutoFit/>
+          </a:bodyPr>
+          <a:lstStyle/>
+          <a:p>
+            <a:pPr algn="l">
+              <a:defRPr sz="1500" b="1">
+                <a:solidFill>
+                  <a:srgbClr val="CC4F3E"/>
+                </a:solidFill>
+                <a:latin typeface="Aptos"/>
+              </a:defRPr>
+            </a:pPr>
+            <a:r>
+              <a:t>02</a:t>
+            </a:r>
+          </a:p>
+        </p:txBody>
+      </p:sp>
+      <p:sp>
+        <p:nvSpPr>
+          <p:cNvPr id="13" name="TextBox 12"/>
+          <p:cNvSpPr txBox="1"/>
+          <p:nvPr/>
+        </p:nvSpPr>
+        <p:spPr>
+          <a:xfrm>
+            <a:off x="4852416" y="1426463"/>
+            <a:ext cx="2621280" cy="1961388"/>
+          </a:xfrm>
+          <a:prstGeom prst="rect">
+            <a:avLst/>
+          </a:prstGeom>
+          <a:noFill/>
+        </p:spPr>
+        <p:txBody>
+          <a:bodyPr wrap="square" lIns="45720" rIns="45720" tIns="36576" bIns="36576" anchor="t">
+            <a:spAutoFit/>
+          </a:bodyPr>
+          <a:lstStyle/>
+          <a:p>
+            <a:pPr algn="l">
+              <a:defRPr sz="1300" b="0">
+                <a:solidFill>
+                  <a:srgbClr val="1C2330"/>
+                </a:solidFill>
+                <a:latin typeface="Aptos"/>
+              </a:defRPr>
+            </a:pPr>
+            <a:r>
+              <a:t>Calidad y pruebas — Recuerda restricciones, prepara pruebas, mide y registra resultados. — No es la única persona que comprueba.</a:t>
+            </a:r>
+          </a:p>
+        </p:txBody>
+      </p:sp>
+      <p:sp>
+        <p:nvSpPr>
+          <p:cNvPr id="14" name="Rounded Rectangle 13"/>
+          <p:cNvSpPr/>
+          <p:nvPr/>
+        </p:nvSpPr>
+        <p:spPr>
+          <a:xfrm>
+            <a:off x="7821167" y="1261872"/>
+            <a:ext cx="3398520" cy="2199132"/>
+          </a:xfrm>
+          <a:prstGeom prst="roundRect">
+            <a:avLst/>
+          </a:prstGeom>
+          <a:solidFill>
+            <a:srgbClr val="FFFFFF"/>
+          </a:solidFill>
+          <a:ln>
+            <a:solidFill>
+              <a:srgbClr val="E5E9EF"/>
+            </a:solidFill>
+          </a:ln>
+        </p:spPr>
+        <p:style>
+          <a:lnRef idx="1">
+            <a:schemeClr val="accent1"/>
+          </a:lnRef>
+          <a:fillRef idx="3">
+            <a:schemeClr val="accent1"/>
+          </a:fillRef>
+          <a:effectRef idx="2">
+            <a:schemeClr val="accent1"/>
+          </a:effectRef>
+          <a:fontRef idx="minor">
+            <a:schemeClr val="lt1"/>
+          </a:fontRef>
+        </p:style>
+        <p:txBody>
+          <a:bodyPr rtlCol="0" anchor="ctr"/>
+          <a:lstStyle/>
+          <a:p>
+            <a:pPr algn="ctr"/>
+          </a:p>
+        </p:txBody>
+      </p:sp>
+      <p:sp>
+        <p:nvSpPr>
+          <p:cNvPr id="15" name="TextBox 14"/>
+          <p:cNvSpPr txBox="1"/>
+          <p:nvPr/>
+        </p:nvSpPr>
+        <p:spPr>
+          <a:xfrm>
+            <a:off x="8022336" y="1426463"/>
+            <a:ext cx="384048" cy="347472"/>
+          </a:xfrm>
+          <a:prstGeom prst="rect">
+            <a:avLst/>
+          </a:prstGeom>
+          <a:noFill/>
+        </p:spPr>
+        <p:txBody>
+          <a:bodyPr wrap="square" lIns="45720" rIns="45720" tIns="36576" bIns="36576" anchor="t">
+            <a:spAutoFit/>
+          </a:bodyPr>
+          <a:lstStyle/>
+          <a:p>
+            <a:pPr algn="l">
+              <a:defRPr sz="1500" b="1">
+                <a:solidFill>
+                  <a:srgbClr val="CC4F3E"/>
+                </a:solidFill>
+                <a:latin typeface="Aptos"/>
+              </a:defRPr>
+            </a:pPr>
+            <a:r>
+              <a:t>03</a:t>
+            </a:r>
+          </a:p>
+        </p:txBody>
+      </p:sp>
+      <p:sp>
+        <p:nvSpPr>
+          <p:cNvPr id="16" name="TextBox 15"/>
+          <p:cNvSpPr txBox="1"/>
+          <p:nvPr/>
+        </p:nvSpPr>
+        <p:spPr>
+          <a:xfrm>
+            <a:off x="8479536" y="1426463"/>
+            <a:ext cx="2621280" cy="1961388"/>
+          </a:xfrm>
+          <a:prstGeom prst="rect">
+            <a:avLst/>
+          </a:prstGeom>
+          <a:noFill/>
+        </p:spPr>
+        <p:txBody>
+          <a:bodyPr wrap="square" lIns="45720" rIns="45720" tIns="36576" bIns="36576" anchor="t">
+            <a:spAutoFit/>
+          </a:bodyPr>
+          <a:lstStyle/>
+          <a:p>
+            <a:pPr algn="l">
+              <a:defRPr sz="1300" b="0">
+                <a:solidFill>
+                  <a:srgbClr val="1C2330"/>
+                </a:solidFill>
+                <a:latin typeface="Aptos"/>
+              </a:defRPr>
+            </a:pPr>
+            <a:r>
+              <a:t>Evidencias y comunicación — Registra decisiones, cambios y aportaciones; prepara la explicación final. — No es secretario pasivo ni único portavoz.</a:t>
+            </a:r>
+          </a:p>
+        </p:txBody>
+      </p:sp>
+      <p:sp>
+        <p:nvSpPr>
+          <p:cNvPr id="17" name="Rounded Rectangle 16"/>
+          <p:cNvSpPr/>
+          <p:nvPr/>
+        </p:nvSpPr>
+        <p:spPr>
+          <a:xfrm>
+            <a:off x="566928" y="3662172"/>
+            <a:ext cx="3398520" cy="2199132"/>
+          </a:xfrm>
+          <a:prstGeom prst="roundRect">
+            <a:avLst/>
+          </a:prstGeom>
+          <a:solidFill>
+            <a:srgbClr val="FFFFFF"/>
+          </a:solidFill>
+          <a:ln>
+            <a:solidFill>
+              <a:srgbClr val="E5E9EF"/>
+            </a:solidFill>
+          </a:ln>
+        </p:spPr>
+        <p:style>
+          <a:lnRef idx="1">
+            <a:schemeClr val="accent1"/>
+          </a:lnRef>
+          <a:fillRef idx="3">
+            <a:schemeClr val="accent1"/>
+          </a:fillRef>
+          <a:effectRef idx="2">
+            <a:schemeClr val="accent1"/>
+          </a:effectRef>
+          <a:fontRef idx="minor">
+            <a:schemeClr val="lt1"/>
+          </a:fontRef>
+        </p:style>
+        <p:txBody>
+          <a:bodyPr rtlCol="0" anchor="ctr"/>
+          <a:lstStyle/>
+          <a:p>
+            <a:pPr algn="ctr"/>
+          </a:p>
+        </p:txBody>
+      </p:sp>
+      <p:sp>
+        <p:nvSpPr>
+          <p:cNvPr id="18" name="TextBox 17"/>
+          <p:cNvSpPr txBox="1"/>
+          <p:nvPr/>
+        </p:nvSpPr>
+        <p:spPr>
+          <a:xfrm>
+            <a:off x="768096" y="3826763"/>
+            <a:ext cx="384048" cy="347472"/>
+          </a:xfrm>
+          <a:prstGeom prst="rect">
+            <a:avLst/>
+          </a:prstGeom>
+          <a:noFill/>
+        </p:spPr>
+        <p:txBody>
+          <a:bodyPr wrap="square" lIns="45720" rIns="45720" tIns="36576" bIns="36576" anchor="t">
+            <a:spAutoFit/>
+          </a:bodyPr>
+          <a:lstStyle/>
+          <a:p>
+            <a:pPr algn="l">
+              <a:defRPr sz="1500" b="1">
+                <a:solidFill>
+                  <a:srgbClr val="CC4F3E"/>
+                </a:solidFill>
+                <a:latin typeface="Aptos"/>
+              </a:defRPr>
+            </a:pPr>
+            <a:r>
+              <a:t>04</a:t>
+            </a:r>
+          </a:p>
+        </p:txBody>
+      </p:sp>
+      <p:sp>
+        <p:nvSpPr>
+          <p:cNvPr id="19" name="TextBox 18"/>
+          <p:cNvSpPr txBox="1"/>
+          <p:nvPr/>
+        </p:nvSpPr>
+        <p:spPr>
+          <a:xfrm>
+            <a:off x="1225295" y="3826763"/>
+            <a:ext cx="2621280" cy="1961388"/>
+          </a:xfrm>
+          <a:prstGeom prst="rect">
+            <a:avLst/>
+          </a:prstGeom>
+          <a:noFill/>
+        </p:spPr>
+        <p:txBody>
+          <a:bodyPr wrap="square" lIns="45720" rIns="45720" tIns="36576" bIns="36576" anchor="t">
+            <a:spAutoFit/>
+          </a:bodyPr>
+          <a:lstStyle/>
+          <a:p>
+            <a:pPr algn="l">
+              <a:defRPr sz="1300" b="0">
+                <a:solidFill>
+                  <a:srgbClr val="1C2330"/>
+                </a:solidFill>
+                <a:latin typeface="Aptos"/>
+              </a:defRPr>
+            </a:pPr>
+            <a:r>
+              <a:t>Todas las personas: aportan ideas, manipulan material en algún momento, ayudan a comprobar, pueden explicar una decisión.</a:t>
+            </a:r>
+          </a:p>
+        </p:txBody>
+      </p:sp>
+      <p:sp>
+        <p:nvSpPr>
+          <p:cNvPr id="20" name="Rounded Rectangle 19"/>
+          <p:cNvSpPr/>
+          <p:nvPr/>
+        </p:nvSpPr>
+        <p:spPr>
+          <a:xfrm>
+            <a:off x="4194048" y="3662172"/>
+            <a:ext cx="3398520" cy="2199132"/>
+          </a:xfrm>
+          <a:prstGeom prst="roundRect">
+            <a:avLst/>
+          </a:prstGeom>
+          <a:solidFill>
+            <a:srgbClr val="FFFFFF"/>
+          </a:solidFill>
+          <a:ln>
+            <a:solidFill>
+              <a:srgbClr val="E5E9EF"/>
+            </a:solidFill>
+          </a:ln>
+        </p:spPr>
+        <p:style>
+          <a:lnRef idx="1">
+            <a:schemeClr val="accent1"/>
+          </a:lnRef>
+          <a:fillRef idx="3">
+            <a:schemeClr val="accent1"/>
+          </a:fillRef>
+          <a:effectRef idx="2">
+            <a:schemeClr val="accent1"/>
+          </a:effectRef>
+          <a:fontRef idx="minor">
+            <a:schemeClr val="lt1"/>
+          </a:fontRef>
+        </p:style>
+        <p:txBody>
+          <a:bodyPr rtlCol="0" anchor="ctr"/>
+          <a:lstStyle/>
+          <a:p>
+            <a:pPr algn="ctr"/>
+          </a:p>
+        </p:txBody>
+      </p:sp>
+      <p:sp>
+        <p:nvSpPr>
+          <p:cNvPr id="21" name="TextBox 20"/>
+          <p:cNvSpPr txBox="1"/>
+          <p:nvPr/>
+        </p:nvSpPr>
+        <p:spPr>
+          <a:xfrm>
+            <a:off x="4395216" y="3826763"/>
+            <a:ext cx="384048" cy="347472"/>
+          </a:xfrm>
+          <a:prstGeom prst="rect">
+            <a:avLst/>
+          </a:prstGeom>
+          <a:noFill/>
+        </p:spPr>
+        <p:txBody>
+          <a:bodyPr wrap="square" lIns="45720" rIns="45720" tIns="36576" bIns="36576" anchor="t">
+            <a:spAutoFit/>
+          </a:bodyPr>
+          <a:lstStyle/>
+          <a:p>
+            <a:pPr algn="l">
+              <a:defRPr sz="1500" b="1">
+                <a:solidFill>
+                  <a:srgbClr val="CC4F3E"/>
+                </a:solidFill>
+                <a:latin typeface="Aptos"/>
+              </a:defRPr>
+            </a:pPr>
+            <a:r>
+              <a:t>05</a:t>
+            </a:r>
+          </a:p>
+        </p:txBody>
+      </p:sp>
+      <p:sp>
+        <p:nvSpPr>
+          <p:cNvPr id="22" name="TextBox 21"/>
+          <p:cNvSpPr txBox="1"/>
+          <p:nvPr/>
+        </p:nvSpPr>
+        <p:spPr>
+          <a:xfrm>
+            <a:off x="4852416" y="3826763"/>
+            <a:ext cx="2621280" cy="1961388"/>
+          </a:xfrm>
+          <a:prstGeom prst="rect">
+            <a:avLst/>
+          </a:prstGeom>
+          <a:noFill/>
+        </p:spPr>
+        <p:txBody>
+          <a:bodyPr wrap="square" lIns="45720" rIns="45720" tIns="36576" bIns="36576" anchor="t">
+            <a:spAutoFit/>
+          </a:bodyPr>
+          <a:lstStyle/>
+          <a:p>
+            <a:pPr algn="l">
+              <a:defRPr sz="1300" b="0">
+                <a:solidFill>
+                  <a:srgbClr val="1C2330"/>
+                </a:solidFill>
+                <a:latin typeface="Aptos"/>
+              </a:defRPr>
+            </a:pPr>
+            <a:r>
+              <a:t>Equipos de tres: Combina temporalmente valor y backlog con evidencias y comunicación, o la combinación que el equipo justifique. No elimines calidad/prueba ni facilitación.</a:t>
+            </a:r>
+          </a:p>
+        </p:txBody>
+      </p:sp>
+    </p:spTree>
+  </p:cSld>
+  <p:clrMapOvr>
+    <a:masterClrMapping/>
+  </p:clrMapOvr>
+</p:sld>
+</file>
+
+<file path=ppt/slides/slide7.xml><?xml version="1.0" encoding="utf-8"?>
+<p:sld xmlns:a="http://schemas.openxmlformats.org/drawingml/2006/main" xmlns:p="http://schemas.openxmlformats.org/presentationml/2006/main" xmlns:r="http://schemas.openxmlformats.org/officeDocument/2006/relationships">
+  <p:cSld>
+    <p:spTree>
+      <p:nvGrpSpPr>
+        <p:cNvPr id="1" name=""/>
+        <p:cNvGrpSpPr/>
+        <p:nvPr/>
+      </p:nvGrpSpPr>
+      <p:grpSpPr/>
+      <p:sp>
+        <p:nvSpPr>
+          <p:cNvPr id="2" name="Rectangle 1"/>
+          <p:cNvSpPr/>
+          <p:nvPr/>
+        </p:nvSpPr>
+        <p:spPr>
+          <a:xfrm>
+            <a:off x="0" y="0"/>
+            <a:ext cx="12191695" cy="6858000"/>
+          </a:xfrm>
+          <a:prstGeom prst="rect">
+            <a:avLst/>
+          </a:prstGeom>
+          <a:solidFill>
+            <a:srgbClr val="F9F7F2"/>
+          </a:solidFill>
+          <a:ln>
+            <a:noFill/>
+          </a:ln>
+        </p:spPr>
+        <p:style>
+          <a:lnRef idx="1">
+            <a:schemeClr val="accent1"/>
+          </a:lnRef>
+          <a:fillRef idx="3">
+            <a:schemeClr val="accent1"/>
+          </a:fillRef>
+          <a:effectRef idx="2">
+            <a:schemeClr val="accent1"/>
+          </a:effectRef>
+          <a:fontRef idx="minor">
+            <a:schemeClr val="lt1"/>
+          </a:fontRef>
+        </p:style>
+        <p:txBody>
+          <a:bodyPr rtlCol="0" anchor="ctr"/>
+          <a:lstStyle/>
+          <a:p>
+            <a:pPr algn="ctr"/>
+          </a:p>
+        </p:txBody>
+      </p:sp>
+      <p:sp>
+        <p:nvSpPr>
+          <p:cNvPr id="3" name="Rectangle 2"/>
+          <p:cNvSpPr/>
+          <p:nvPr/>
+        </p:nvSpPr>
+        <p:spPr>
+          <a:xfrm>
+            <a:off x="0" y="0"/>
+            <a:ext cx="164592" cy="6858000"/>
+          </a:xfrm>
+          <a:prstGeom prst="rect">
             <a:avLst/>
           </a:prstGeom>
           <a:solidFill>
@@ -5969,28 +10419,143 @@
       </p:sp>
       <p:sp>
         <p:nvSpPr>
-          <p:cNvPr id="9" name="TextBox 8"/>
-          <p:cNvSpPr txBox="1"/>
-          <p:nvPr/>
-        </p:nvSpPr>
-        <p:spPr>
-          <a:xfrm>
-            <a:off x="960120" y="1618488"/>
-            <a:ext cx="10195560" cy="320040"/>
-          </a:xfrm>
-          <a:prstGeom prst="rect">
-            <a:avLst/>
-          </a:prstGeom>
-          <a:noFill/>
-        </p:spPr>
-        <p:txBody>
-          <a:bodyPr wrap="square" lIns="36576" rIns="36576" tIns="27432" bIns="27432">
+          <p:cNvPr id="4" name="TextBox 3"/>
+          <p:cNvSpPr txBox="1"/>
+          <p:nvPr/>
+        </p:nvSpPr>
+        <p:spPr>
+          <a:xfrm>
+            <a:off x="502920" y="274320"/>
+            <a:ext cx="5486400" cy="256032"/>
+          </a:xfrm>
+          <a:prstGeom prst="rect">
+            <a:avLst/>
+          </a:prstGeom>
+          <a:noFill/>
+        </p:spPr>
+        <p:txBody>
+          <a:bodyPr wrap="square" lIns="45720" rIns="45720" tIns="36576" bIns="36576" anchor="t">
             <a:spAutoFit/>
           </a:bodyPr>
           <a:lstStyle/>
           <a:p>
             <a:pPr algn="l">
-              <a:defRPr sz="1400" b="1">
+              <a:defRPr sz="1000" b="1">
+                <a:solidFill>
+                  <a:srgbClr val="CC4F3E"/>
+                </a:solidFill>
+                <a:latin typeface="Aptos"/>
+              </a:defRPr>
+            </a:pPr>
+            <a:r>
+              <a:t>RELACIONAR SIN ENCASILLAR</a:t>
+            </a:r>
+          </a:p>
+        </p:txBody>
+      </p:sp>
+      <p:sp>
+        <p:nvSpPr>
+          <p:cNvPr id="5" name="TextBox 4"/>
+          <p:cNvSpPr txBox="1"/>
+          <p:nvPr/>
+        </p:nvSpPr>
+        <p:spPr>
+          <a:xfrm>
+            <a:off x="502920" y="603504"/>
+            <a:ext cx="11064240" cy="530352"/>
+          </a:xfrm>
+          <a:prstGeom prst="rect">
+            <a:avLst/>
+          </a:prstGeom>
+          <a:noFill/>
+        </p:spPr>
+        <p:txBody>
+          <a:bodyPr wrap="square" lIns="45720" rIns="45720" tIns="36576" bIns="36576" anchor="t">
+            <a:spAutoFit/>
+          </a:bodyPr>
+          <a:lstStyle/>
+          <a:p>
+            <a:pPr algn="l">
+              <a:defRPr sz="2800" b="1">
+                <a:solidFill>
+                  <a:srgbClr val="1C2330"/>
+                </a:solidFill>
+                <a:latin typeface="Aptos"/>
+              </a:defRPr>
+            </a:pPr>
+            <a:r>
+              <a:t>HADA orienta; las funciones se acuerdan</a:t>
+            </a:r>
+          </a:p>
+        </p:txBody>
+      </p:sp>
+      <p:sp>
+        <p:nvSpPr>
+          <p:cNvPr id="6" name="Rectangle 5"/>
+          <p:cNvSpPr/>
+          <p:nvPr/>
+        </p:nvSpPr>
+        <p:spPr>
+          <a:xfrm>
+            <a:off x="0" y="6601968"/>
+            <a:ext cx="12191695" cy="256032"/>
+          </a:xfrm>
+          <a:prstGeom prst="rect">
+            <a:avLst/>
+          </a:prstGeom>
+          <a:solidFill>
+            <a:srgbClr val="CC4F3E"/>
+          </a:solidFill>
+          <a:ln>
+            <a:noFill/>
+          </a:ln>
+        </p:spPr>
+        <p:style>
+          <a:lnRef idx="1">
+            <a:schemeClr val="accent1"/>
+          </a:lnRef>
+          <a:fillRef idx="3">
+            <a:schemeClr val="accent1"/>
+          </a:fillRef>
+          <a:effectRef idx="2">
+            <a:schemeClr val="accent1"/>
+          </a:effectRef>
+          <a:fontRef idx="minor">
+            <a:schemeClr val="lt1"/>
+          </a:fontRef>
+        </p:style>
+        <p:txBody>
+          <a:bodyPr rtlCol="0" anchor="ctr"/>
+          <a:lstStyle/>
+          <a:p>
+            <a:pPr algn="ctr"/>
+          </a:p>
+        </p:txBody>
+      </p:sp>
+      <p:sp>
+        <p:nvSpPr>
+          <p:cNvPr id="7" name="TextBox 6"/>
+          <p:cNvSpPr txBox="1"/>
+          <p:nvPr/>
+        </p:nvSpPr>
+        <p:spPr>
+          <a:xfrm>
+            <a:off x="411480" y="6629400"/>
+            <a:ext cx="11247120" cy="164592"/>
+          </a:xfrm>
+          <a:prstGeom prst="rect">
+            <a:avLst/>
+          </a:prstGeom>
+          <a:noFill/>
+        </p:spPr>
+        <p:txBody>
+          <a:bodyPr wrap="square" lIns="45720" rIns="45720" tIns="36576" bIns="36576" anchor="t">
+            <a:spAutoFit/>
+          </a:bodyPr>
+          <a:lstStyle/>
+          <a:p>
+            <a:pPr algn="l">
+              <a:defRPr sz="900" b="0">
                 <a:solidFill>
                   <a:srgbClr val="FFFFFF"/>
                 </a:solidFill>
@@ -5998,164 +10563,21 @@
               </a:defRPr>
             </a:pPr>
             <a:r>
-              <a:t>PREGUNTA DE SALIDA</a:t>
-            </a:r>
-          </a:p>
-        </p:txBody>
-      </p:sp>
-      <p:sp>
-        <p:nvSpPr>
-          <p:cNvPr id="10" name="TextBox 9"/>
-          <p:cNvSpPr txBox="1"/>
-          <p:nvPr/>
-        </p:nvSpPr>
-        <p:spPr>
-          <a:xfrm>
-            <a:off x="960120" y="2057400"/>
-            <a:ext cx="10058400" cy="822960"/>
-          </a:xfrm>
-          <a:prstGeom prst="rect">
-            <a:avLst/>
-          </a:prstGeom>
-          <a:noFill/>
-        </p:spPr>
-        <p:txBody>
-          <a:bodyPr wrap="square" lIns="36576" rIns="36576" tIns="27432" bIns="27432">
-            <a:spAutoFit/>
-          </a:bodyPr>
-          <a:lstStyle/>
-          <a:p>
-            <a:pPr algn="l">
-              <a:defRPr sz="2700" b="1">
-                <a:solidFill>
-                  <a:srgbClr val="FFFFFF"/>
-                </a:solidFill>
-                <a:latin typeface="Aptos"/>
-              </a:defRPr>
-            </a:pPr>
-            <a:r>
-              <a:t>¿Qué has hecho y cómo sabes que funciona?</a:t>
-            </a:r>
-          </a:p>
-        </p:txBody>
-      </p:sp>
-      <p:sp>
-        <p:nvSpPr>
-          <p:cNvPr id="11" name="TextBox 10"/>
-          <p:cNvSpPr txBox="1"/>
-          <p:nvPr/>
-        </p:nvSpPr>
-        <p:spPr>
-          <a:xfrm>
-            <a:off x="713232" y="3703320"/>
-            <a:ext cx="3749039" cy="320040"/>
-          </a:xfrm>
-          <a:prstGeom prst="rect">
-            <a:avLst/>
-          </a:prstGeom>
-          <a:noFill/>
-        </p:spPr>
-        <p:txBody>
-          <a:bodyPr wrap="square" lIns="36576" rIns="36576" tIns="27432" bIns="27432">
-            <a:spAutoFit/>
-          </a:bodyPr>
-          <a:lstStyle/>
-          <a:p>
-            <a:pPr algn="l">
-              <a:defRPr sz="1500" b="1">
-                <a:solidFill>
-                  <a:srgbClr val="CC4F3E"/>
-                </a:solidFill>
-                <a:latin typeface="Aptos"/>
-              </a:defRPr>
-            </a:pPr>
-            <a:r>
-              <a:t>RECUERDA</a:t>
-            </a:r>
-          </a:p>
-        </p:txBody>
-      </p:sp>
-      <p:sp>
-        <p:nvSpPr>
-          <p:cNvPr id="12" name="TextBox 11"/>
-          <p:cNvSpPr txBox="1"/>
-          <p:nvPr/>
-        </p:nvSpPr>
-        <p:spPr>
-          <a:xfrm>
-            <a:off x="713232" y="4114800"/>
-            <a:ext cx="6583680" cy="1691640"/>
-          </a:xfrm>
-          <a:prstGeom prst="rect">
-            <a:avLst/>
-          </a:prstGeom>
-          <a:noFill/>
-        </p:spPr>
-        <p:txBody>
-          <a:bodyPr wrap="square" lIns="73152" rIns="45720" tIns="36576">
-            <a:spAutoFit/>
-          </a:bodyPr>
-          <a:lstStyle/>
-          <a:p>
-            <a:pPr>
-              <a:spcAft>
-                <a:spcPts val="1000"/>
-              </a:spcAft>
-              <a:defRPr sz="1700">
-                <a:solidFill>
-                  <a:srgbClr val="1C2330"/>
-                </a:solidFill>
-                <a:latin typeface="Aptos"/>
-              </a:defRPr>
-            </a:pPr>
-            <a:r>
-              <a:t>•  Usa datos ficticios.</a:t>
-            </a:r>
-          </a:p>
-          <a:p>
-            <a:pPr>
-              <a:spcAft>
-                <a:spcPts val="1000"/>
-              </a:spcAft>
-              <a:defRPr sz="1700">
-                <a:solidFill>
-                  <a:srgbClr val="1C2330"/>
-                </a:solidFill>
-                <a:latin typeface="Aptos"/>
-              </a:defRPr>
-            </a:pPr>
-            <a:r>
-              <a:t>•  No compartas contraseñas ni claves.</a:t>
-            </a:r>
-          </a:p>
-          <a:p>
-            <a:pPr>
-              <a:spcAft>
-                <a:spcPts val="1000"/>
-              </a:spcAft>
-              <a:defRPr sz="1700">
-                <a:solidFill>
-                  <a:srgbClr val="1C2330"/>
-                </a:solidFill>
-                <a:latin typeface="Aptos"/>
-              </a:defRPr>
-            </a:pPr>
-            <a:r>
-              <a:t>•  Registra y valida cualquier uso de IA.</a:t>
-            </a:r>
-          </a:p>
-        </p:txBody>
-      </p:sp>
-      <p:sp>
-        <p:nvSpPr>
-          <p:cNvPr id="13" name="Rounded Rectangle 12"/>
+              <a:t>MiniJarvis · 1.º DAW · Sesión 203 · H0 — Formación y prueba de equipos Scrum mediante la torre de papel</a:t>
+            </a:r>
+          </a:p>
+        </p:txBody>
+      </p:sp>
+      <p:sp>
+        <p:nvSpPr>
+          <p:cNvPr id="8" name="Rounded Rectangle 7"/>
           <p:cNvSpPr/>
           <p:nvPr/>
         </p:nvSpPr>
         <p:spPr>
           <a:xfrm>
-            <a:off x="7726679" y="3794760"/>
-            <a:ext cx="3703320" cy="1600200"/>
+            <a:off x="621792" y="1298448"/>
+            <a:ext cx="5230368" cy="1700784"/>
           </a:xfrm>
           <a:prstGeom prst="roundRect">
             <a:avLst/>
@@ -6165,7 +10587,7 @@
           </a:solidFill>
           <a:ln>
             <a:solidFill>
-              <a:srgbClr val="EBEEF2"/>
+              <a:srgbClr val="E5E9EF"/>
             </a:solidFill>
           </a:ln>
         </p:spPr>
@@ -6193,36 +10615,1781 @@
       </p:sp>
       <p:sp>
         <p:nvSpPr>
-          <p:cNvPr id="14" name="TextBox 13"/>
-          <p:cNvSpPr txBox="1"/>
-          <p:nvPr/>
-        </p:nvSpPr>
-        <p:spPr>
-          <a:xfrm>
-            <a:off x="8028431" y="4087368"/>
-            <a:ext cx="3063240" cy="868680"/>
-          </a:xfrm>
-          <a:prstGeom prst="rect">
-            <a:avLst/>
-          </a:prstGeom>
-          <a:noFill/>
-        </p:spPr>
-        <p:txBody>
-          <a:bodyPr wrap="square" lIns="36576" rIns="36576" tIns="27432" bIns="27432">
+          <p:cNvPr id="9" name="TextBox 8"/>
+          <p:cNvSpPr txBox="1"/>
+          <p:nvPr/>
+        </p:nvSpPr>
+        <p:spPr>
+          <a:xfrm>
+            <a:off x="822960" y="1463039"/>
+            <a:ext cx="475488" cy="320040"/>
+          </a:xfrm>
+          <a:prstGeom prst="rect">
+            <a:avLst/>
+          </a:prstGeom>
+          <a:noFill/>
+        </p:spPr>
+        <p:txBody>
+          <a:bodyPr wrap="square" lIns="45720" rIns="45720" tIns="36576" bIns="36576" anchor="t">
+            <a:spAutoFit/>
+          </a:bodyPr>
+          <a:lstStyle/>
+          <a:p>
+            <a:pPr algn="l">
+              <a:defRPr sz="1400" b="1">
+                <a:solidFill>
+                  <a:srgbClr val="CC4F3E"/>
+                </a:solidFill>
+                <a:latin typeface="Aptos"/>
+              </a:defRPr>
+            </a:pPr>
+            <a:r>
+              <a:t>01</a:t>
+            </a:r>
+          </a:p>
+        </p:txBody>
+      </p:sp>
+      <p:sp>
+        <p:nvSpPr>
+          <p:cNvPr id="10" name="TextBox 9"/>
+          <p:cNvSpPr txBox="1"/>
+          <p:nvPr/>
+        </p:nvSpPr>
+        <p:spPr>
+          <a:xfrm>
+            <a:off x="1371600" y="1444751"/>
+            <a:ext cx="4224528" cy="1325880"/>
+          </a:xfrm>
+          <a:prstGeom prst="rect">
+            <a:avLst/>
+          </a:prstGeom>
+          <a:noFill/>
+        </p:spPr>
+        <p:txBody>
+          <a:bodyPr wrap="square" lIns="45720" rIns="45720" tIns="36576" bIns="36576" anchor="t">
+            <a:spAutoFit/>
+          </a:bodyPr>
+          <a:lstStyle/>
+          <a:p>
+            <a:pPr algn="l">
+              <a:defRPr sz="1600" b="0">
+                <a:solidFill>
+                  <a:srgbClr val="1C2330"/>
+                </a:solidFill>
+                <a:latin typeface="Aptos"/>
+              </a:defRPr>
+            </a:pPr>
+            <a:r>
+              <a:t>Gestor — natural: valor, backlog y tiempo · practicar: escucha y revisión</a:t>
+            </a:r>
+          </a:p>
+        </p:txBody>
+      </p:sp>
+      <p:sp>
+        <p:nvSpPr>
+          <p:cNvPr id="11" name="Rounded Rectangle 10"/>
+          <p:cNvSpPr/>
+          <p:nvPr/>
+        </p:nvSpPr>
+        <p:spPr>
+          <a:xfrm>
+            <a:off x="6144768" y="1298448"/>
+            <a:ext cx="5230368" cy="1700784"/>
+          </a:xfrm>
+          <a:prstGeom prst="roundRect">
+            <a:avLst/>
+          </a:prstGeom>
+          <a:solidFill>
+            <a:srgbClr val="FFFFFF"/>
+          </a:solidFill>
+          <a:ln>
+            <a:solidFill>
+              <a:srgbClr val="E5E9EF"/>
+            </a:solidFill>
+          </a:ln>
+        </p:spPr>
+        <p:style>
+          <a:lnRef idx="1">
+            <a:schemeClr val="accent1"/>
+          </a:lnRef>
+          <a:fillRef idx="3">
+            <a:schemeClr val="accent1"/>
+          </a:fillRef>
+          <a:effectRef idx="2">
+            <a:schemeClr val="accent1"/>
+          </a:effectRef>
+          <a:fontRef idx="minor">
+            <a:schemeClr val="lt1"/>
+          </a:fontRef>
+        </p:style>
+        <p:txBody>
+          <a:bodyPr rtlCol="0" anchor="ctr"/>
+          <a:lstStyle/>
+          <a:p>
+            <a:pPr algn="ctr"/>
+          </a:p>
+        </p:txBody>
+      </p:sp>
+      <p:sp>
+        <p:nvSpPr>
+          <p:cNvPr id="12" name="TextBox 11"/>
+          <p:cNvSpPr txBox="1"/>
+          <p:nvPr/>
+        </p:nvSpPr>
+        <p:spPr>
+          <a:xfrm>
+            <a:off x="6345936" y="1463039"/>
+            <a:ext cx="475488" cy="320040"/>
+          </a:xfrm>
+          <a:prstGeom prst="rect">
+            <a:avLst/>
+          </a:prstGeom>
+          <a:noFill/>
+        </p:spPr>
+        <p:txBody>
+          <a:bodyPr wrap="square" lIns="45720" rIns="45720" tIns="36576" bIns="36576" anchor="t">
+            <a:spAutoFit/>
+          </a:bodyPr>
+          <a:lstStyle/>
+          <a:p>
+            <a:pPr algn="l">
+              <a:defRPr sz="1400" b="1">
+                <a:solidFill>
+                  <a:srgbClr val="CC4F3E"/>
+                </a:solidFill>
+                <a:latin typeface="Aptos"/>
+              </a:defRPr>
+            </a:pPr>
+            <a:r>
+              <a:t>02</a:t>
+            </a:r>
+          </a:p>
+        </p:txBody>
+      </p:sp>
+      <p:sp>
+        <p:nvSpPr>
+          <p:cNvPr id="13" name="TextBox 12"/>
+          <p:cNvSpPr txBox="1"/>
+          <p:nvPr/>
+        </p:nvSpPr>
+        <p:spPr>
+          <a:xfrm>
+            <a:off x="6894576" y="1444751"/>
+            <a:ext cx="4224528" cy="1325880"/>
+          </a:xfrm>
+          <a:prstGeom prst="rect">
+            <a:avLst/>
+          </a:prstGeom>
+          <a:noFill/>
+        </p:spPr>
+        <p:txBody>
+          <a:bodyPr wrap="square" lIns="45720" rIns="45720" tIns="36576" bIns="36576" anchor="t">
+            <a:spAutoFit/>
+          </a:bodyPr>
+          <a:lstStyle/>
+          <a:p>
+            <a:pPr algn="l">
+              <a:defRPr sz="1600" b="0">
+                <a:solidFill>
+                  <a:srgbClr val="1C2330"/>
+                </a:solidFill>
+                <a:latin typeface="Aptos"/>
+              </a:defRPr>
+            </a:pPr>
+            <a:r>
+              <a:t>Colaborador — natural: facilitación y mediación · practicar: priorización y crítica</a:t>
+            </a:r>
+          </a:p>
+        </p:txBody>
+      </p:sp>
+      <p:sp>
+        <p:nvSpPr>
+          <p:cNvPr id="14" name="Rounded Rectangle 13"/>
+          <p:cNvSpPr/>
+          <p:nvPr/>
+        </p:nvSpPr>
+        <p:spPr>
+          <a:xfrm>
+            <a:off x="621792" y="3291840"/>
+            <a:ext cx="5230368" cy="1700784"/>
+          </a:xfrm>
+          <a:prstGeom prst="roundRect">
+            <a:avLst/>
+          </a:prstGeom>
+          <a:solidFill>
+            <a:srgbClr val="FFFFFF"/>
+          </a:solidFill>
+          <a:ln>
+            <a:solidFill>
+              <a:srgbClr val="E5E9EF"/>
+            </a:solidFill>
+          </a:ln>
+        </p:spPr>
+        <p:style>
+          <a:lnRef idx="1">
+            <a:schemeClr val="accent1"/>
+          </a:lnRef>
+          <a:fillRef idx="3">
+            <a:schemeClr val="accent1"/>
+          </a:fillRef>
+          <a:effectRef idx="2">
+            <a:schemeClr val="accent1"/>
+          </a:effectRef>
+          <a:fontRef idx="minor">
+            <a:schemeClr val="lt1"/>
+          </a:fontRef>
+        </p:style>
+        <p:txBody>
+          <a:bodyPr rtlCol="0" anchor="ctr"/>
+          <a:lstStyle/>
+          <a:p>
+            <a:pPr algn="ctr"/>
+          </a:p>
+        </p:txBody>
+      </p:sp>
+      <p:sp>
+        <p:nvSpPr>
+          <p:cNvPr id="15" name="TextBox 14"/>
+          <p:cNvSpPr txBox="1"/>
+          <p:nvPr/>
+        </p:nvSpPr>
+        <p:spPr>
+          <a:xfrm>
+            <a:off x="822960" y="3456432"/>
+            <a:ext cx="475488" cy="320040"/>
+          </a:xfrm>
+          <a:prstGeom prst="rect">
+            <a:avLst/>
+          </a:prstGeom>
+          <a:noFill/>
+        </p:spPr>
+        <p:txBody>
+          <a:bodyPr wrap="square" lIns="45720" rIns="45720" tIns="36576" bIns="36576" anchor="t">
+            <a:spAutoFit/>
+          </a:bodyPr>
+          <a:lstStyle/>
+          <a:p>
+            <a:pPr algn="l">
+              <a:defRPr sz="1400" b="1">
+                <a:solidFill>
+                  <a:srgbClr val="CC4F3E"/>
+                </a:solidFill>
+                <a:latin typeface="Aptos"/>
+              </a:defRPr>
+            </a:pPr>
+            <a:r>
+              <a:t>03</a:t>
+            </a:r>
+          </a:p>
+        </p:txBody>
+      </p:sp>
+      <p:sp>
+        <p:nvSpPr>
+          <p:cNvPr id="16" name="TextBox 15"/>
+          <p:cNvSpPr txBox="1"/>
+          <p:nvPr/>
+        </p:nvSpPr>
+        <p:spPr>
+          <a:xfrm>
+            <a:off x="1371600" y="3438144"/>
+            <a:ext cx="4224528" cy="1325880"/>
+          </a:xfrm>
+          <a:prstGeom prst="rect">
+            <a:avLst/>
+          </a:prstGeom>
+          <a:noFill/>
+        </p:spPr>
+        <p:txBody>
+          <a:bodyPr wrap="square" lIns="45720" rIns="45720" tIns="36576" bIns="36576" anchor="t">
+            <a:spAutoFit/>
+          </a:bodyPr>
+          <a:lstStyle/>
+          <a:p>
+            <a:pPr algn="l">
+              <a:defRPr sz="1600" b="0">
+                <a:solidFill>
+                  <a:srgbClr val="1C2330"/>
+                </a:solidFill>
+                <a:latin typeface="Aptos"/>
+              </a:defRPr>
+            </a:pPr>
+            <a:r>
+              <a:t>Desarrollador — natural: ideas y prototipado · practicar: cierre, prueba y documentación</a:t>
+            </a:r>
+          </a:p>
+        </p:txBody>
+      </p:sp>
+      <p:sp>
+        <p:nvSpPr>
+          <p:cNvPr id="17" name="Rounded Rectangle 16"/>
+          <p:cNvSpPr/>
+          <p:nvPr/>
+        </p:nvSpPr>
+        <p:spPr>
+          <a:xfrm>
+            <a:off x="6144768" y="3291840"/>
+            <a:ext cx="5230368" cy="1700784"/>
+          </a:xfrm>
+          <a:prstGeom prst="roundRect">
+            <a:avLst/>
+          </a:prstGeom>
+          <a:solidFill>
+            <a:srgbClr val="FFFFFF"/>
+          </a:solidFill>
+          <a:ln>
+            <a:solidFill>
+              <a:srgbClr val="E5E9EF"/>
+            </a:solidFill>
+          </a:ln>
+        </p:spPr>
+        <p:style>
+          <a:lnRef idx="1">
+            <a:schemeClr val="accent1"/>
+          </a:lnRef>
+          <a:fillRef idx="3">
+            <a:schemeClr val="accent1"/>
+          </a:fillRef>
+          <a:effectRef idx="2">
+            <a:schemeClr val="accent1"/>
+          </a:effectRef>
+          <a:fontRef idx="minor">
+            <a:schemeClr val="lt1"/>
+          </a:fontRef>
+        </p:style>
+        <p:txBody>
+          <a:bodyPr rtlCol="0" anchor="ctr"/>
+          <a:lstStyle/>
+          <a:p>
+            <a:pPr algn="ctr"/>
+          </a:p>
+        </p:txBody>
+      </p:sp>
+      <p:sp>
+        <p:nvSpPr>
+          <p:cNvPr id="18" name="TextBox 17"/>
+          <p:cNvSpPr txBox="1"/>
+          <p:nvPr/>
+        </p:nvSpPr>
+        <p:spPr>
+          <a:xfrm>
+            <a:off x="6345936" y="3456432"/>
+            <a:ext cx="475488" cy="320040"/>
+          </a:xfrm>
+          <a:prstGeom prst="rect">
+            <a:avLst/>
+          </a:prstGeom>
+          <a:noFill/>
+        </p:spPr>
+        <p:txBody>
+          <a:bodyPr wrap="square" lIns="45720" rIns="45720" tIns="36576" bIns="36576" anchor="t">
+            <a:spAutoFit/>
+          </a:bodyPr>
+          <a:lstStyle/>
+          <a:p>
+            <a:pPr algn="l">
+              <a:defRPr sz="1400" b="1">
+                <a:solidFill>
+                  <a:srgbClr val="CC4F3E"/>
+                </a:solidFill>
+                <a:latin typeface="Aptos"/>
+              </a:defRPr>
+            </a:pPr>
+            <a:r>
+              <a:t>04</a:t>
+            </a:r>
+          </a:p>
+        </p:txBody>
+      </p:sp>
+      <p:sp>
+        <p:nvSpPr>
+          <p:cNvPr id="19" name="TextBox 18"/>
+          <p:cNvSpPr txBox="1"/>
+          <p:nvPr/>
+        </p:nvSpPr>
+        <p:spPr>
+          <a:xfrm>
+            <a:off x="6894576" y="3438144"/>
+            <a:ext cx="4224528" cy="1325880"/>
+          </a:xfrm>
+          <a:prstGeom prst="rect">
+            <a:avLst/>
+          </a:prstGeom>
+          <a:noFill/>
+        </p:spPr>
+        <p:txBody>
+          <a:bodyPr wrap="square" lIns="45720" rIns="45720" tIns="36576" bIns="36576" anchor="t">
+            <a:spAutoFit/>
+          </a:bodyPr>
+          <a:lstStyle/>
+          <a:p>
+            <a:pPr algn="l">
+              <a:defRPr sz="1600" b="0">
+                <a:solidFill>
+                  <a:srgbClr val="1C2330"/>
+                </a:solidFill>
+                <a:latin typeface="Aptos"/>
+              </a:defRPr>
+            </a:pPr>
+            <a:r>
+              <a:t>Analista — natural: calidad y prueba · practicar: experimentación y comunicación</a:t>
+            </a:r>
+          </a:p>
+        </p:txBody>
+      </p:sp>
+      <p:sp>
+        <p:nvSpPr>
+          <p:cNvPr id="20" name="Rounded Rectangle 19"/>
+          <p:cNvSpPr/>
+          <p:nvPr/>
+        </p:nvSpPr>
+        <p:spPr>
+          <a:xfrm>
+            <a:off x="621792" y="5422392"/>
+            <a:ext cx="10927080" cy="758952"/>
+          </a:xfrm>
+          <a:prstGeom prst="roundRect">
+            <a:avLst/>
+          </a:prstGeom>
+          <a:solidFill>
+            <a:srgbClr val="CC4F3E"/>
+          </a:solidFill>
+          <a:ln>
+            <a:solidFill>
+              <a:srgbClr val="CC4F3E"/>
+            </a:solidFill>
+          </a:ln>
+        </p:spPr>
+        <p:style>
+          <a:lnRef idx="1">
+            <a:schemeClr val="accent1"/>
+          </a:lnRef>
+          <a:fillRef idx="3">
+            <a:schemeClr val="accent1"/>
+          </a:fillRef>
+          <a:effectRef idx="2">
+            <a:schemeClr val="accent1"/>
+          </a:effectRef>
+          <a:fontRef idx="minor">
+            <a:schemeClr val="lt1"/>
+          </a:fontRef>
+        </p:style>
+        <p:txBody>
+          <a:bodyPr rtlCol="0" anchor="ctr"/>
+          <a:lstStyle/>
+          <a:p>
+            <a:pPr algn="ctr"/>
+          </a:p>
+        </p:txBody>
+      </p:sp>
+      <p:sp>
+        <p:nvSpPr>
+          <p:cNvPr id="21" name="TextBox 20"/>
+          <p:cNvSpPr txBox="1"/>
+          <p:nvPr/>
+        </p:nvSpPr>
+        <p:spPr>
+          <a:xfrm>
+            <a:off x="877824" y="5596128"/>
+            <a:ext cx="10378440" cy="384048"/>
+          </a:xfrm>
+          <a:prstGeom prst="rect">
+            <a:avLst/>
+          </a:prstGeom>
+          <a:noFill/>
+        </p:spPr>
+        <p:txBody>
+          <a:bodyPr wrap="square" lIns="45720" rIns="45720" tIns="36576" bIns="36576" anchor="t">
             <a:spAutoFit/>
           </a:bodyPr>
           <a:lstStyle/>
           <a:p>
             <a:pPr algn="ctr">
-              <a:defRPr sz="1800" b="1">
-                <a:solidFill>
-                  <a:srgbClr val="247E5C"/>
-                </a:solidFill>
-                <a:latin typeface="Aptos"/>
-              </a:defRPr>
-            </a:pPr>
-            <a:r>
-              <a:t>La sesión termina cuando la evidencia existe, está comprobada y puedes defenderla.</a:t>
+              <a:defRPr sz="1600" b="1">
+                <a:solidFill>
+                  <a:srgbClr val="FFFFFF"/>
+                </a:solidFill>
+                <a:latin typeface="Aptos"/>
+              </a:defRPr>
+            </a:pPr>
+            <a:r>
+              <a:t>La tabla orienta una conversación; no asigna funciones automáticamente.</a:t>
+            </a:r>
+          </a:p>
+        </p:txBody>
+      </p:sp>
+    </p:spTree>
+  </p:cSld>
+  <p:clrMapOvr>
+    <a:masterClrMapping/>
+  </p:clrMapOvr>
+</p:sld>
+</file>
+
+<file path=ppt/slides/slide8.xml><?xml version="1.0" encoding="utf-8"?>
+<p:sld xmlns:a="http://schemas.openxmlformats.org/drawingml/2006/main" xmlns:p="http://schemas.openxmlformats.org/presentationml/2006/main" xmlns:r="http://schemas.openxmlformats.org/officeDocument/2006/relationships">
+  <p:cSld>
+    <p:spTree>
+      <p:nvGrpSpPr>
+        <p:cNvPr id="1" name=""/>
+        <p:cNvGrpSpPr/>
+        <p:nvPr/>
+      </p:nvGrpSpPr>
+      <p:grpSpPr/>
+      <p:sp>
+        <p:nvSpPr>
+          <p:cNvPr id="2" name="Rectangle 1"/>
+          <p:cNvSpPr/>
+          <p:nvPr/>
+        </p:nvSpPr>
+        <p:spPr>
+          <a:xfrm>
+            <a:off x="0" y="0"/>
+            <a:ext cx="12191695" cy="6858000"/>
+          </a:xfrm>
+          <a:prstGeom prst="rect">
+            <a:avLst/>
+          </a:prstGeom>
+          <a:solidFill>
+            <a:srgbClr val="F9F7F2"/>
+          </a:solidFill>
+          <a:ln>
+            <a:noFill/>
+          </a:ln>
+        </p:spPr>
+        <p:style>
+          <a:lnRef idx="1">
+            <a:schemeClr val="accent1"/>
+          </a:lnRef>
+          <a:fillRef idx="3">
+            <a:schemeClr val="accent1"/>
+          </a:fillRef>
+          <a:effectRef idx="2">
+            <a:schemeClr val="accent1"/>
+          </a:effectRef>
+          <a:fontRef idx="minor">
+            <a:schemeClr val="lt1"/>
+          </a:fontRef>
+        </p:style>
+        <p:txBody>
+          <a:bodyPr rtlCol="0" anchor="ctr"/>
+          <a:lstStyle/>
+          <a:p>
+            <a:pPr algn="ctr"/>
+          </a:p>
+        </p:txBody>
+      </p:sp>
+      <p:sp>
+        <p:nvSpPr>
+          <p:cNvPr id="3" name="Rectangle 2"/>
+          <p:cNvSpPr/>
+          <p:nvPr/>
+        </p:nvSpPr>
+        <p:spPr>
+          <a:xfrm>
+            <a:off x="0" y="0"/>
+            <a:ext cx="164592" cy="6858000"/>
+          </a:xfrm>
+          <a:prstGeom prst="rect">
+            <a:avLst/>
+          </a:prstGeom>
+          <a:solidFill>
+            <a:srgbClr val="CC4F3E"/>
+          </a:solidFill>
+          <a:ln>
+            <a:noFill/>
+          </a:ln>
+        </p:spPr>
+        <p:style>
+          <a:lnRef idx="1">
+            <a:schemeClr val="accent1"/>
+          </a:lnRef>
+          <a:fillRef idx="3">
+            <a:schemeClr val="accent1"/>
+          </a:fillRef>
+          <a:effectRef idx="2">
+            <a:schemeClr val="accent1"/>
+          </a:effectRef>
+          <a:fontRef idx="minor">
+            <a:schemeClr val="lt1"/>
+          </a:fontRef>
+        </p:style>
+        <p:txBody>
+          <a:bodyPr rtlCol="0" anchor="ctr"/>
+          <a:lstStyle/>
+          <a:p>
+            <a:pPr algn="ctr"/>
+          </a:p>
+        </p:txBody>
+      </p:sp>
+      <p:sp>
+        <p:nvSpPr>
+          <p:cNvPr id="4" name="TextBox 3"/>
+          <p:cNvSpPr txBox="1"/>
+          <p:nvPr/>
+        </p:nvSpPr>
+        <p:spPr>
+          <a:xfrm>
+            <a:off x="502920" y="274320"/>
+            <a:ext cx="5486400" cy="256032"/>
+          </a:xfrm>
+          <a:prstGeom prst="rect">
+            <a:avLst/>
+          </a:prstGeom>
+          <a:noFill/>
+        </p:spPr>
+        <p:txBody>
+          <a:bodyPr wrap="square" lIns="45720" rIns="45720" tIns="36576" bIns="36576" anchor="t">
+            <a:spAutoFit/>
+          </a:bodyPr>
+          <a:lstStyle/>
+          <a:p>
+            <a:pPr algn="l">
+              <a:defRPr sz="1000" b="1">
+                <a:solidFill>
+                  <a:srgbClr val="CC4F3E"/>
+                </a:solidFill>
+                <a:latin typeface="Aptos"/>
+              </a:defRPr>
+            </a:pPr>
+            <a:r>
+              <a:t>OBSERVAR ANTES DE ACTUAR</a:t>
+            </a:r>
+          </a:p>
+        </p:txBody>
+      </p:sp>
+      <p:sp>
+        <p:nvSpPr>
+          <p:cNvPr id="5" name="TextBox 4"/>
+          <p:cNvSpPr txBox="1"/>
+          <p:nvPr/>
+        </p:nvSpPr>
+        <p:spPr>
+          <a:xfrm>
+            <a:off x="502920" y="603504"/>
+            <a:ext cx="11064240" cy="530352"/>
+          </a:xfrm>
+          <a:prstGeom prst="rect">
+            <a:avLst/>
+          </a:prstGeom>
+          <a:noFill/>
+        </p:spPr>
+        <p:txBody>
+          <a:bodyPr wrap="square" lIns="45720" rIns="45720" tIns="36576" bIns="36576" anchor="t">
+            <a:spAutoFit/>
+          </a:bodyPr>
+          <a:lstStyle/>
+          <a:p>
+            <a:pPr algn="l">
+              <a:defRPr sz="2800" b="1">
+                <a:solidFill>
+                  <a:srgbClr val="1C2330"/>
+                </a:solidFill>
+                <a:latin typeface="Aptos"/>
+              </a:defRPr>
+            </a:pPr>
+            <a:r>
+              <a:t>Ejemplo o demostración</a:t>
+            </a:r>
+          </a:p>
+        </p:txBody>
+      </p:sp>
+      <p:sp>
+        <p:nvSpPr>
+          <p:cNvPr id="6" name="Rectangle 5"/>
+          <p:cNvSpPr/>
+          <p:nvPr/>
+        </p:nvSpPr>
+        <p:spPr>
+          <a:xfrm>
+            <a:off x="0" y="6601968"/>
+            <a:ext cx="12191695" cy="256032"/>
+          </a:xfrm>
+          <a:prstGeom prst="rect">
+            <a:avLst/>
+          </a:prstGeom>
+          <a:solidFill>
+            <a:srgbClr val="CC4F3E"/>
+          </a:solidFill>
+          <a:ln>
+            <a:noFill/>
+          </a:ln>
+        </p:spPr>
+        <p:style>
+          <a:lnRef idx="1">
+            <a:schemeClr val="accent1"/>
+          </a:lnRef>
+          <a:fillRef idx="3">
+            <a:schemeClr val="accent1"/>
+          </a:fillRef>
+          <a:effectRef idx="2">
+            <a:schemeClr val="accent1"/>
+          </a:effectRef>
+          <a:fontRef idx="minor">
+            <a:schemeClr val="lt1"/>
+          </a:fontRef>
+        </p:style>
+        <p:txBody>
+          <a:bodyPr rtlCol="0" anchor="ctr"/>
+          <a:lstStyle/>
+          <a:p>
+            <a:pPr algn="ctr"/>
+          </a:p>
+        </p:txBody>
+      </p:sp>
+      <p:sp>
+        <p:nvSpPr>
+          <p:cNvPr id="7" name="TextBox 6"/>
+          <p:cNvSpPr txBox="1"/>
+          <p:nvPr/>
+        </p:nvSpPr>
+        <p:spPr>
+          <a:xfrm>
+            <a:off x="411480" y="6629400"/>
+            <a:ext cx="11247120" cy="164592"/>
+          </a:xfrm>
+          <a:prstGeom prst="rect">
+            <a:avLst/>
+          </a:prstGeom>
+          <a:noFill/>
+        </p:spPr>
+        <p:txBody>
+          <a:bodyPr wrap="square" lIns="45720" rIns="45720" tIns="36576" bIns="36576" anchor="t">
+            <a:spAutoFit/>
+          </a:bodyPr>
+          <a:lstStyle/>
+          <a:p>
+            <a:pPr algn="l">
+              <a:defRPr sz="900" b="0">
+                <a:solidFill>
+                  <a:srgbClr val="FFFFFF"/>
+                </a:solidFill>
+                <a:latin typeface="Aptos"/>
+              </a:defRPr>
+            </a:pPr>
+            <a:r>
+              <a:t>MiniJarvis · 1.º DAW · Sesión 203 · H0 — Formación y prueba de equipos Scrum mediante la torre de papel</a:t>
+            </a:r>
+          </a:p>
+        </p:txBody>
+      </p:sp>
+      <p:sp>
+        <p:nvSpPr>
+          <p:cNvPr id="8" name="Rounded Rectangle 7"/>
+          <p:cNvSpPr/>
+          <p:nvPr/>
+        </p:nvSpPr>
+        <p:spPr>
+          <a:xfrm>
+            <a:off x="621792" y="1353312"/>
+            <a:ext cx="10927080" cy="4526280"/>
+          </a:xfrm>
+          <a:prstGeom prst="roundRect">
+            <a:avLst/>
+          </a:prstGeom>
+          <a:solidFill>
+            <a:srgbClr val="121824"/>
+          </a:solidFill>
+          <a:ln>
+            <a:noFill/>
+          </a:ln>
+        </p:spPr>
+        <p:style>
+          <a:lnRef idx="1">
+            <a:schemeClr val="accent1"/>
+          </a:lnRef>
+          <a:fillRef idx="3">
+            <a:schemeClr val="accent1"/>
+          </a:fillRef>
+          <a:effectRef idx="2">
+            <a:schemeClr val="accent1"/>
+          </a:effectRef>
+          <a:fontRef idx="minor">
+            <a:schemeClr val="lt1"/>
+          </a:fontRef>
+        </p:style>
+        <p:txBody>
+          <a:bodyPr rtlCol="0" anchor="ctr"/>
+          <a:lstStyle/>
+          <a:p>
+            <a:pPr algn="ctr"/>
+          </a:p>
+        </p:txBody>
+      </p:sp>
+      <p:sp>
+        <p:nvSpPr>
+          <p:cNvPr id="9" name="TextBox 8"/>
+          <p:cNvSpPr txBox="1"/>
+          <p:nvPr/>
+        </p:nvSpPr>
+        <p:spPr>
+          <a:xfrm>
+            <a:off x="932688" y="1627632"/>
+            <a:ext cx="2057400" cy="411480"/>
+          </a:xfrm>
+          <a:prstGeom prst="rect">
+            <a:avLst/>
+          </a:prstGeom>
+          <a:noFill/>
+        </p:spPr>
+        <p:txBody>
+          <a:bodyPr wrap="square" lIns="45720" rIns="45720" tIns="36576" bIns="36576" anchor="t">
+            <a:spAutoFit/>
+          </a:bodyPr>
+          <a:lstStyle/>
+          <a:p>
+            <a:pPr algn="l">
+              <a:defRPr sz="1300" b="1">
+                <a:solidFill>
+                  <a:srgbClr val="CC4F3E"/>
+                </a:solidFill>
+                <a:latin typeface="Aptos"/>
+              </a:defRPr>
+            </a:pPr>
+            <a:r>
+              <a:t>DEMOSTRACIÓN</a:t>
+            </a:r>
+          </a:p>
+        </p:txBody>
+      </p:sp>
+      <p:sp>
+        <p:nvSpPr>
+          <p:cNvPr id="10" name="TextBox 9"/>
+          <p:cNvSpPr txBox="1"/>
+          <p:nvPr/>
+        </p:nvSpPr>
+        <p:spPr>
+          <a:xfrm>
+            <a:off x="932688" y="2212848"/>
+            <a:ext cx="9966960" cy="3246120"/>
+          </a:xfrm>
+          <a:prstGeom prst="rect">
+            <a:avLst/>
+          </a:prstGeom>
+          <a:noFill/>
+        </p:spPr>
+        <p:txBody>
+          <a:bodyPr wrap="square" lIns="73152" rIns="45720" tIns="36576">
+            <a:spAutoFit/>
+          </a:bodyPr>
+          <a:lstStyle/>
+          <a:p>
+            <a:pPr>
+              <a:spcAft>
+                <a:spcPts val="900"/>
+              </a:spcAft>
+              <a:defRPr sz="1900">
+                <a:solidFill>
+                  <a:srgbClr val="FFFFFF"/>
+                </a:solidFill>
+                <a:latin typeface="Aptos"/>
+              </a:defRPr>
+            </a:pPr>
+            <a:r>
+              <a:t>•  S203 — Diseñamos el equipo que pondremos a prueba</a:t>
+            </a:r>
+          </a:p>
+          <a:p>
+            <a:pPr>
+              <a:spcAft>
+                <a:spcPts val="900"/>
+              </a:spcAft>
+              <a:defRPr sz="1900">
+                <a:solidFill>
+                  <a:srgbClr val="FFFFFF"/>
+                </a:solidFill>
+                <a:latin typeface="Aptos"/>
+              </a:defRPr>
+            </a:pPr>
+            <a:r>
+              <a:t>•  HADA orienta; la torre aporta evidencia.</a:t>
+            </a:r>
+          </a:p>
+          <a:p>
+            <a:pPr>
+              <a:spcAft>
+                <a:spcPts val="900"/>
+              </a:spcAft>
+              <a:defRPr sz="1900">
+                <a:solidFill>
+                  <a:srgbClr val="FFFFFF"/>
+                </a:solidFill>
+                <a:latin typeface="Aptos"/>
+              </a:defRPr>
+            </a:pPr>
+            <a:r>
+              <a:t>•  Una función = una responsabilidad visible, no poder sobre otras personas.</a:t>
+            </a:r>
+          </a:p>
+          <a:p>
+            <a:pPr>
+              <a:spcAft>
+                <a:spcPts val="900"/>
+              </a:spcAft>
+              <a:defRPr sz="1900">
+                <a:solidFill>
+                  <a:srgbClr val="FFFFFF"/>
+                </a:solidFill>
+                <a:latin typeface="Aptos"/>
+              </a:defRPr>
+            </a:pPr>
+            <a:r>
+              <a:t>•  Todas las personas diseñan, construyen, comprueban y explican.</a:t>
+            </a:r>
+          </a:p>
+          <a:p>
+            <a:pPr>
+              <a:spcAft>
+                <a:spcPts val="900"/>
+              </a:spcAft>
+              <a:defRPr sz="1900">
+                <a:solidFill>
+                  <a:srgbClr val="FFFFFF"/>
+                </a:solidFill>
+                <a:latin typeface="Aptos"/>
+              </a:defRPr>
+            </a:pPr>
+            <a:r>
+              <a:t>•  Deja también visibles los cuatro focos: Valor y backlog, Facilitación y tiempo, Calidad y pruebas, Evidencias y comunicación</a:t>
+            </a:r>
+          </a:p>
+        </p:txBody>
+      </p:sp>
+    </p:spTree>
+  </p:cSld>
+  <p:clrMapOvr>
+    <a:masterClrMapping/>
+  </p:clrMapOvr>
+</p:sld>
+</file>
+
+<file path=ppt/slides/slide9.xml><?xml version="1.0" encoding="utf-8"?>
+<p:sld xmlns:a="http://schemas.openxmlformats.org/drawingml/2006/main" xmlns:p="http://schemas.openxmlformats.org/presentationml/2006/main" xmlns:r="http://schemas.openxmlformats.org/officeDocument/2006/relationships">
+  <p:cSld>
+    <p:spTree>
+      <p:nvGrpSpPr>
+        <p:cNvPr id="1" name=""/>
+        <p:cNvGrpSpPr/>
+        <p:nvPr/>
+      </p:nvGrpSpPr>
+      <p:grpSpPr/>
+      <p:sp>
+        <p:nvSpPr>
+          <p:cNvPr id="2" name="Rectangle 1"/>
+          <p:cNvSpPr/>
+          <p:nvPr/>
+        </p:nvSpPr>
+        <p:spPr>
+          <a:xfrm>
+            <a:off x="0" y="0"/>
+            <a:ext cx="12191695" cy="6858000"/>
+          </a:xfrm>
+          <a:prstGeom prst="rect">
+            <a:avLst/>
+          </a:prstGeom>
+          <a:solidFill>
+            <a:srgbClr val="F9F7F2"/>
+          </a:solidFill>
+          <a:ln>
+            <a:noFill/>
+          </a:ln>
+        </p:spPr>
+        <p:style>
+          <a:lnRef idx="1">
+            <a:schemeClr val="accent1"/>
+          </a:lnRef>
+          <a:fillRef idx="3">
+            <a:schemeClr val="accent1"/>
+          </a:fillRef>
+          <a:effectRef idx="2">
+            <a:schemeClr val="accent1"/>
+          </a:effectRef>
+          <a:fontRef idx="minor">
+            <a:schemeClr val="lt1"/>
+          </a:fontRef>
+        </p:style>
+        <p:txBody>
+          <a:bodyPr rtlCol="0" anchor="ctr"/>
+          <a:lstStyle/>
+          <a:p>
+            <a:pPr algn="ctr"/>
+          </a:p>
+        </p:txBody>
+      </p:sp>
+      <p:sp>
+        <p:nvSpPr>
+          <p:cNvPr id="3" name="Rectangle 2"/>
+          <p:cNvSpPr/>
+          <p:nvPr/>
+        </p:nvSpPr>
+        <p:spPr>
+          <a:xfrm>
+            <a:off x="0" y="0"/>
+            <a:ext cx="164592" cy="6858000"/>
+          </a:xfrm>
+          <a:prstGeom prst="rect">
+            <a:avLst/>
+          </a:prstGeom>
+          <a:solidFill>
+            <a:srgbClr val="CC4F3E"/>
+          </a:solidFill>
+          <a:ln>
+            <a:noFill/>
+          </a:ln>
+        </p:spPr>
+        <p:style>
+          <a:lnRef idx="1">
+            <a:schemeClr val="accent1"/>
+          </a:lnRef>
+          <a:fillRef idx="3">
+            <a:schemeClr val="accent1"/>
+          </a:fillRef>
+          <a:effectRef idx="2">
+            <a:schemeClr val="accent1"/>
+          </a:effectRef>
+          <a:fontRef idx="minor">
+            <a:schemeClr val="lt1"/>
+          </a:fontRef>
+        </p:style>
+        <p:txBody>
+          <a:bodyPr rtlCol="0" anchor="ctr"/>
+          <a:lstStyle/>
+          <a:p>
+            <a:pPr algn="ctr"/>
+          </a:p>
+        </p:txBody>
+      </p:sp>
+      <p:sp>
+        <p:nvSpPr>
+          <p:cNvPr id="4" name="TextBox 3"/>
+          <p:cNvSpPr txBox="1"/>
+          <p:nvPr/>
+        </p:nvSpPr>
+        <p:spPr>
+          <a:xfrm>
+            <a:off x="502920" y="274320"/>
+            <a:ext cx="5486400" cy="256032"/>
+          </a:xfrm>
+          <a:prstGeom prst="rect">
+            <a:avLst/>
+          </a:prstGeom>
+          <a:noFill/>
+        </p:spPr>
+        <p:txBody>
+          <a:bodyPr wrap="square" lIns="45720" rIns="45720" tIns="36576" bIns="36576" anchor="t">
+            <a:spAutoFit/>
+          </a:bodyPr>
+          <a:lstStyle/>
+          <a:p>
+            <a:pPr algn="l">
+              <a:defRPr sz="1000" b="1">
+                <a:solidFill>
+                  <a:srgbClr val="CC4F3E"/>
+                </a:solidFill>
+                <a:latin typeface="Aptos"/>
+              </a:defRPr>
+            </a:pPr>
+            <a:r>
+              <a:t>APLICAR Y DECIDIR</a:t>
+            </a:r>
+          </a:p>
+        </p:txBody>
+      </p:sp>
+      <p:sp>
+        <p:nvSpPr>
+          <p:cNvPr id="5" name="TextBox 4"/>
+          <p:cNvSpPr txBox="1"/>
+          <p:nvPr/>
+        </p:nvSpPr>
+        <p:spPr>
+          <a:xfrm>
+            <a:off x="502920" y="603504"/>
+            <a:ext cx="11064240" cy="530352"/>
+          </a:xfrm>
+          <a:prstGeom prst="rect">
+            <a:avLst/>
+          </a:prstGeom>
+          <a:noFill/>
+        </p:spPr>
+        <p:txBody>
+          <a:bodyPr wrap="square" lIns="45720" rIns="45720" tIns="36576" bIns="36576" anchor="t">
+            <a:spAutoFit/>
+          </a:bodyPr>
+          <a:lstStyle/>
+          <a:p>
+            <a:pPr algn="l">
+              <a:defRPr sz="2800" b="1">
+                <a:solidFill>
+                  <a:srgbClr val="1C2330"/>
+                </a:solidFill>
+                <a:latin typeface="Aptos"/>
+              </a:defRPr>
+            </a:pPr>
+            <a:r>
+              <a:t>Actividad central · 1</a:t>
+            </a:r>
+          </a:p>
+        </p:txBody>
+      </p:sp>
+      <p:sp>
+        <p:nvSpPr>
+          <p:cNvPr id="6" name="Rectangle 5"/>
+          <p:cNvSpPr/>
+          <p:nvPr/>
+        </p:nvSpPr>
+        <p:spPr>
+          <a:xfrm>
+            <a:off x="0" y="6601968"/>
+            <a:ext cx="12191695" cy="256032"/>
+          </a:xfrm>
+          <a:prstGeom prst="rect">
+            <a:avLst/>
+          </a:prstGeom>
+          <a:solidFill>
+            <a:srgbClr val="CC4F3E"/>
+          </a:solidFill>
+          <a:ln>
+            <a:noFill/>
+          </a:ln>
+        </p:spPr>
+        <p:style>
+          <a:lnRef idx="1">
+            <a:schemeClr val="accent1"/>
+          </a:lnRef>
+          <a:fillRef idx="3">
+            <a:schemeClr val="accent1"/>
+          </a:fillRef>
+          <a:effectRef idx="2">
+            <a:schemeClr val="accent1"/>
+          </a:effectRef>
+          <a:fontRef idx="minor">
+            <a:schemeClr val="lt1"/>
+          </a:fontRef>
+        </p:style>
+        <p:txBody>
+          <a:bodyPr rtlCol="0" anchor="ctr"/>
+          <a:lstStyle/>
+          <a:p>
+            <a:pPr algn="ctr"/>
+          </a:p>
+        </p:txBody>
+      </p:sp>
+      <p:sp>
+        <p:nvSpPr>
+          <p:cNvPr id="7" name="TextBox 6"/>
+          <p:cNvSpPr txBox="1"/>
+          <p:nvPr/>
+        </p:nvSpPr>
+        <p:spPr>
+          <a:xfrm>
+            <a:off x="411480" y="6629400"/>
+            <a:ext cx="11247120" cy="164592"/>
+          </a:xfrm>
+          <a:prstGeom prst="rect">
+            <a:avLst/>
+          </a:prstGeom>
+          <a:noFill/>
+        </p:spPr>
+        <p:txBody>
+          <a:bodyPr wrap="square" lIns="45720" rIns="45720" tIns="36576" bIns="36576" anchor="t">
+            <a:spAutoFit/>
+          </a:bodyPr>
+          <a:lstStyle/>
+          <a:p>
+            <a:pPr algn="l">
+              <a:defRPr sz="900" b="0">
+                <a:solidFill>
+                  <a:srgbClr val="FFFFFF"/>
+                </a:solidFill>
+                <a:latin typeface="Aptos"/>
+              </a:defRPr>
+            </a:pPr>
+            <a:r>
+              <a:t>MiniJarvis · 1.º DAW · Sesión 203 · H0 — Formación y prueba de equipos Scrum mediante la torre de papel</a:t>
+            </a:r>
+          </a:p>
+        </p:txBody>
+      </p:sp>
+      <p:sp>
+        <p:nvSpPr>
+          <p:cNvPr id="8" name="Rounded Rectangle 7"/>
+          <p:cNvSpPr/>
+          <p:nvPr/>
+        </p:nvSpPr>
+        <p:spPr>
+          <a:xfrm>
+            <a:off x="658368" y="1307592"/>
+            <a:ext cx="10835640" cy="813816"/>
+          </a:xfrm>
+          <a:prstGeom prst="roundRect">
+            <a:avLst/>
+          </a:prstGeom>
+          <a:solidFill>
+            <a:srgbClr val="FFFFFF"/>
+          </a:solidFill>
+          <a:ln>
+            <a:solidFill>
+              <a:srgbClr val="E5E9EF"/>
+            </a:solidFill>
+          </a:ln>
+        </p:spPr>
+        <p:style>
+          <a:lnRef idx="1">
+            <a:schemeClr val="accent1"/>
+          </a:lnRef>
+          <a:fillRef idx="3">
+            <a:schemeClr val="accent1"/>
+          </a:fillRef>
+          <a:effectRef idx="2">
+            <a:schemeClr val="accent1"/>
+          </a:effectRef>
+          <a:fontRef idx="minor">
+            <a:schemeClr val="lt1"/>
+          </a:fontRef>
+        </p:style>
+        <p:txBody>
+          <a:bodyPr rtlCol="0" anchor="ctr"/>
+          <a:lstStyle/>
+          <a:p>
+            <a:pPr algn="ctr"/>
+          </a:p>
+        </p:txBody>
+      </p:sp>
+      <p:sp>
+        <p:nvSpPr>
+          <p:cNvPr id="9" name="TextBox 8"/>
+          <p:cNvSpPr txBox="1"/>
+          <p:nvPr/>
+        </p:nvSpPr>
+        <p:spPr>
+          <a:xfrm>
+            <a:off x="850392" y="1453895"/>
+            <a:ext cx="685800" cy="384048"/>
+          </a:xfrm>
+          <a:prstGeom prst="rect">
+            <a:avLst/>
+          </a:prstGeom>
+          <a:noFill/>
+        </p:spPr>
+        <p:txBody>
+          <a:bodyPr wrap="square" lIns="45720" rIns="45720" tIns="36576" bIns="36576" anchor="t">
+            <a:spAutoFit/>
+          </a:bodyPr>
+          <a:lstStyle/>
+          <a:p>
+            <a:pPr algn="l">
+              <a:defRPr sz="1200" b="1">
+                <a:solidFill>
+                  <a:srgbClr val="CC4F3E"/>
+                </a:solidFill>
+                <a:latin typeface="Aptos"/>
+              </a:defRPr>
+            </a:pPr>
+            <a:r>
+              <a:t>PASO 1</a:t>
+            </a:r>
+          </a:p>
+        </p:txBody>
+      </p:sp>
+      <p:sp>
+        <p:nvSpPr>
+          <p:cNvPr id="10" name="TextBox 9"/>
+          <p:cNvSpPr txBox="1"/>
+          <p:nvPr/>
+        </p:nvSpPr>
+        <p:spPr>
+          <a:xfrm>
+            <a:off x="1664208" y="1417319"/>
+            <a:ext cx="9464040" cy="594360"/>
+          </a:xfrm>
+          <a:prstGeom prst="rect">
+            <a:avLst/>
+          </a:prstGeom>
+          <a:noFill/>
+        </p:spPr>
+        <p:txBody>
+          <a:bodyPr wrap="square" lIns="45720" rIns="45720" tIns="36576" bIns="36576" anchor="t">
+            <a:spAutoFit/>
+          </a:bodyPr>
+          <a:lstStyle/>
+          <a:p>
+            <a:pPr algn="l">
+              <a:defRPr sz="1700" b="0">
+                <a:solidFill>
+                  <a:srgbClr val="1C2330"/>
+                </a:solidFill>
+                <a:latin typeface="Aptos"/>
+              </a:defRPr>
+            </a:pPr>
+            <a:r>
+              <a:t>Acuerdo de funciones — responsable, sustituto, razón basada en aporte o aprendizaje y conducta observable.</a:t>
+            </a:r>
+          </a:p>
+        </p:txBody>
+      </p:sp>
+      <p:sp>
+        <p:nvSpPr>
+          <p:cNvPr id="11" name="Rounded Rectangle 10"/>
+          <p:cNvSpPr/>
+          <p:nvPr/>
+        </p:nvSpPr>
+        <p:spPr>
+          <a:xfrm>
+            <a:off x="658368" y="2295144"/>
+            <a:ext cx="10835640" cy="813816"/>
+          </a:xfrm>
+          <a:prstGeom prst="roundRect">
+            <a:avLst/>
+          </a:prstGeom>
+          <a:solidFill>
+            <a:srgbClr val="FFFFFF"/>
+          </a:solidFill>
+          <a:ln>
+            <a:solidFill>
+              <a:srgbClr val="E5E9EF"/>
+            </a:solidFill>
+          </a:ln>
+        </p:spPr>
+        <p:style>
+          <a:lnRef idx="1">
+            <a:schemeClr val="accent1"/>
+          </a:lnRef>
+          <a:fillRef idx="3">
+            <a:schemeClr val="accent1"/>
+          </a:fillRef>
+          <a:effectRef idx="2">
+            <a:schemeClr val="accent1"/>
+          </a:effectRef>
+          <a:fontRef idx="minor">
+            <a:schemeClr val="lt1"/>
+          </a:fontRef>
+        </p:style>
+        <p:txBody>
+          <a:bodyPr rtlCol="0" anchor="ctr"/>
+          <a:lstStyle/>
+          <a:p>
+            <a:pPr algn="ctr"/>
+          </a:p>
+        </p:txBody>
+      </p:sp>
+      <p:sp>
+        <p:nvSpPr>
+          <p:cNvPr id="12" name="TextBox 11"/>
+          <p:cNvSpPr txBox="1"/>
+          <p:nvPr/>
+        </p:nvSpPr>
+        <p:spPr>
+          <a:xfrm>
+            <a:off x="850392" y="2441448"/>
+            <a:ext cx="685800" cy="384048"/>
+          </a:xfrm>
+          <a:prstGeom prst="rect">
+            <a:avLst/>
+          </a:prstGeom>
+          <a:noFill/>
+        </p:spPr>
+        <p:txBody>
+          <a:bodyPr wrap="square" lIns="45720" rIns="45720" tIns="36576" bIns="36576" anchor="t">
+            <a:spAutoFit/>
+          </a:bodyPr>
+          <a:lstStyle/>
+          <a:p>
+            <a:pPr algn="l">
+              <a:defRPr sz="1200" b="1">
+                <a:solidFill>
+                  <a:srgbClr val="CC4F3E"/>
+                </a:solidFill>
+                <a:latin typeface="Aptos"/>
+              </a:defRPr>
+            </a:pPr>
+            <a:r>
+              <a:t>PASO 2</a:t>
+            </a:r>
+          </a:p>
+        </p:txBody>
+      </p:sp>
+      <p:sp>
+        <p:nvSpPr>
+          <p:cNvPr id="13" name="TextBox 12"/>
+          <p:cNvSpPr txBox="1"/>
+          <p:nvPr/>
+        </p:nvSpPr>
+        <p:spPr>
+          <a:xfrm>
+            <a:off x="1664208" y="2404872"/>
+            <a:ext cx="9464040" cy="594360"/>
+          </a:xfrm>
+          <a:prstGeom prst="rect">
+            <a:avLst/>
+          </a:prstGeom>
+          <a:noFill/>
+        </p:spPr>
+        <p:txBody>
+          <a:bodyPr wrap="square" lIns="45720" rIns="45720" tIns="36576" bIns="36576" anchor="t">
+            <a:spAutoFit/>
+          </a:bodyPr>
+          <a:lstStyle/>
+          <a:p>
+            <a:pPr algn="l">
+              <a:defRPr sz="1700" b="0">
+                <a:solidFill>
+                  <a:srgbClr val="1C2330"/>
+                </a:solidFill>
+                <a:latin typeface="Aptos"/>
+              </a:defRPr>
+            </a:pPr>
+            <a:r>
+              <a:t>Regla de participación — impedir que una sola persona diseñe o construya toda la torre.</a:t>
+            </a:r>
+          </a:p>
+        </p:txBody>
+      </p:sp>
+      <p:sp>
+        <p:nvSpPr>
+          <p:cNvPr id="14" name="Rounded Rectangle 13"/>
+          <p:cNvSpPr/>
+          <p:nvPr/>
+        </p:nvSpPr>
+        <p:spPr>
+          <a:xfrm>
+            <a:off x="658368" y="3282696"/>
+            <a:ext cx="10835640" cy="813816"/>
+          </a:xfrm>
+          <a:prstGeom prst="roundRect">
+            <a:avLst/>
+          </a:prstGeom>
+          <a:solidFill>
+            <a:srgbClr val="FFFFFF"/>
+          </a:solidFill>
+          <a:ln>
+            <a:solidFill>
+              <a:srgbClr val="E5E9EF"/>
+            </a:solidFill>
+          </a:ln>
+        </p:spPr>
+        <p:style>
+          <a:lnRef idx="1">
+            <a:schemeClr val="accent1"/>
+          </a:lnRef>
+          <a:fillRef idx="3">
+            <a:schemeClr val="accent1"/>
+          </a:fillRef>
+          <a:effectRef idx="2">
+            <a:schemeClr val="accent1"/>
+          </a:effectRef>
+          <a:fontRef idx="minor">
+            <a:schemeClr val="lt1"/>
+          </a:fontRef>
+        </p:style>
+        <p:txBody>
+          <a:bodyPr rtlCol="0" anchor="ctr"/>
+          <a:lstStyle/>
+          <a:p>
+            <a:pPr algn="ctr"/>
+          </a:p>
+        </p:txBody>
+      </p:sp>
+      <p:sp>
+        <p:nvSpPr>
+          <p:cNvPr id="15" name="TextBox 14"/>
+          <p:cNvSpPr txBox="1"/>
+          <p:nvPr/>
+        </p:nvSpPr>
+        <p:spPr>
+          <a:xfrm>
+            <a:off x="850392" y="3429000"/>
+            <a:ext cx="685800" cy="384048"/>
+          </a:xfrm>
+          <a:prstGeom prst="rect">
+            <a:avLst/>
+          </a:prstGeom>
+          <a:noFill/>
+        </p:spPr>
+        <p:txBody>
+          <a:bodyPr wrap="square" lIns="45720" rIns="45720" tIns="36576" bIns="36576" anchor="t">
+            <a:spAutoFit/>
+          </a:bodyPr>
+          <a:lstStyle/>
+          <a:p>
+            <a:pPr algn="l">
+              <a:defRPr sz="1200" b="1">
+                <a:solidFill>
+                  <a:srgbClr val="CC4F3E"/>
+                </a:solidFill>
+                <a:latin typeface="Aptos"/>
+              </a:defRPr>
+            </a:pPr>
+            <a:r>
+              <a:t>PASO 3</a:t>
+            </a:r>
+          </a:p>
+        </p:txBody>
+      </p:sp>
+      <p:sp>
+        <p:nvSpPr>
+          <p:cNvPr id="16" name="TextBox 15"/>
+          <p:cNvSpPr txBox="1"/>
+          <p:nvPr/>
+        </p:nvSpPr>
+        <p:spPr>
+          <a:xfrm>
+            <a:off x="1664208" y="3392424"/>
+            <a:ext cx="9464040" cy="594360"/>
+          </a:xfrm>
+          <a:prstGeom prst="rect">
+            <a:avLst/>
+          </a:prstGeom>
+          <a:noFill/>
+        </p:spPr>
+        <p:txBody>
+          <a:bodyPr wrap="square" lIns="45720" rIns="45720" tIns="36576" bIns="36576" anchor="t">
+            <a:spAutoFit/>
+          </a:bodyPr>
+          <a:lstStyle/>
+          <a:p>
+            <a:pPr algn="l">
+              <a:defRPr sz="1700" b="0">
+                <a:solidFill>
+                  <a:srgbClr val="1C2330"/>
+                </a:solidFill>
+                <a:latin typeface="Aptos"/>
+              </a:defRPr>
+            </a:pPr>
+            <a:r>
+              <a:t>Ciclo 1 — 6 hojas A4 reutilizadas, tijeras y regla, sin conectores.</a:t>
+            </a:r>
+          </a:p>
+        </p:txBody>
+      </p:sp>
+      <p:sp>
+        <p:nvSpPr>
+          <p:cNvPr id="17" name="Rounded Rectangle 16"/>
+          <p:cNvSpPr/>
+          <p:nvPr/>
+        </p:nvSpPr>
+        <p:spPr>
+          <a:xfrm>
+            <a:off x="658368" y="4270248"/>
+            <a:ext cx="10835640" cy="813816"/>
+          </a:xfrm>
+          <a:prstGeom prst="roundRect">
+            <a:avLst/>
+          </a:prstGeom>
+          <a:solidFill>
+            <a:srgbClr val="FFFFFF"/>
+          </a:solidFill>
+          <a:ln>
+            <a:solidFill>
+              <a:srgbClr val="E5E9EF"/>
+            </a:solidFill>
+          </a:ln>
+        </p:spPr>
+        <p:style>
+          <a:lnRef idx="1">
+            <a:schemeClr val="accent1"/>
+          </a:lnRef>
+          <a:fillRef idx="3">
+            <a:schemeClr val="accent1"/>
+          </a:fillRef>
+          <a:effectRef idx="2">
+            <a:schemeClr val="accent1"/>
+          </a:effectRef>
+          <a:fontRef idx="minor">
+            <a:schemeClr val="lt1"/>
+          </a:fontRef>
+        </p:style>
+        <p:txBody>
+          <a:bodyPr rtlCol="0" anchor="ctr"/>
+          <a:lstStyle/>
+          <a:p>
+            <a:pPr algn="ctr"/>
+          </a:p>
+        </p:txBody>
+      </p:sp>
+      <p:sp>
+        <p:nvSpPr>
+          <p:cNvPr id="18" name="TextBox 17"/>
+          <p:cNvSpPr txBox="1"/>
+          <p:nvPr/>
+        </p:nvSpPr>
+        <p:spPr>
+          <a:xfrm>
+            <a:off x="850392" y="4416552"/>
+            <a:ext cx="685800" cy="384048"/>
+          </a:xfrm>
+          <a:prstGeom prst="rect">
+            <a:avLst/>
+          </a:prstGeom>
+          <a:noFill/>
+        </p:spPr>
+        <p:txBody>
+          <a:bodyPr wrap="square" lIns="45720" rIns="45720" tIns="36576" bIns="36576" anchor="t">
+            <a:spAutoFit/>
+          </a:bodyPr>
+          <a:lstStyle/>
+          <a:p>
+            <a:pPr algn="l">
+              <a:defRPr sz="1200" b="1">
+                <a:solidFill>
+                  <a:srgbClr val="CC4F3E"/>
+                </a:solidFill>
+                <a:latin typeface="Aptos"/>
+              </a:defRPr>
+            </a:pPr>
+            <a:r>
+              <a:t>PASO 4</a:t>
+            </a:r>
+          </a:p>
+        </p:txBody>
+      </p:sp>
+      <p:sp>
+        <p:nvSpPr>
+          <p:cNvPr id="19" name="TextBox 18"/>
+          <p:cNvSpPr txBox="1"/>
+          <p:nvPr/>
+        </p:nvSpPr>
+        <p:spPr>
+          <a:xfrm>
+            <a:off x="1664208" y="4379976"/>
+            <a:ext cx="9464040" cy="594360"/>
+          </a:xfrm>
+          <a:prstGeom prst="rect">
+            <a:avLst/>
+          </a:prstGeom>
+          <a:noFill/>
+        </p:spPr>
+        <p:txBody>
+          <a:bodyPr wrap="square" lIns="45720" rIns="45720" tIns="36576" bIns="36576" anchor="t">
+            <a:spAutoFit/>
+          </a:bodyPr>
+          <a:lstStyle/>
+          <a:p>
+            <a:pPr algn="l">
+              <a:defRPr sz="1700" b="0">
+                <a:solidFill>
+                  <a:srgbClr val="1C2330"/>
+                </a:solidFill>
+                <a:latin typeface="Aptos"/>
+              </a:defRPr>
+            </a:pPr>
+            <a:r>
+              <a:t>Ciclo 2 — solicitar material adicional solo tras justificar problema, cambio previsto y prueba esperada.</a:t>
+            </a:r>
+          </a:p>
+        </p:txBody>
+      </p:sp>
+      <p:sp>
+        <p:nvSpPr>
+          <p:cNvPr id="20" name="Rounded Rectangle 19"/>
+          <p:cNvSpPr/>
+          <p:nvPr/>
+        </p:nvSpPr>
+        <p:spPr>
+          <a:xfrm>
+            <a:off x="658368" y="5257800"/>
+            <a:ext cx="10835640" cy="813816"/>
+          </a:xfrm>
+          <a:prstGeom prst="roundRect">
+            <a:avLst/>
+          </a:prstGeom>
+          <a:solidFill>
+            <a:srgbClr val="FFFFFF"/>
+          </a:solidFill>
+          <a:ln>
+            <a:solidFill>
+              <a:srgbClr val="E5E9EF"/>
+            </a:solidFill>
+          </a:ln>
+        </p:spPr>
+        <p:style>
+          <a:lnRef idx="1">
+            <a:schemeClr val="accent1"/>
+          </a:lnRef>
+          <a:fillRef idx="3">
+            <a:schemeClr val="accent1"/>
+          </a:fillRef>
+          <a:effectRef idx="2">
+            <a:schemeClr val="accent1"/>
+          </a:effectRef>
+          <a:fontRef idx="minor">
+            <a:schemeClr val="lt1"/>
+          </a:fontRef>
+        </p:style>
+        <p:txBody>
+          <a:bodyPr rtlCol="0" anchor="ctr"/>
+          <a:lstStyle/>
+          <a:p>
+            <a:pPr algn="ctr"/>
+          </a:p>
+        </p:txBody>
+      </p:sp>
+      <p:sp>
+        <p:nvSpPr>
+          <p:cNvPr id="21" name="TextBox 20"/>
+          <p:cNvSpPr txBox="1"/>
+          <p:nvPr/>
+        </p:nvSpPr>
+        <p:spPr>
+          <a:xfrm>
+            <a:off x="850392" y="5404104"/>
+            <a:ext cx="685800" cy="384048"/>
+          </a:xfrm>
+          <a:prstGeom prst="rect">
+            <a:avLst/>
+          </a:prstGeom>
+          <a:noFill/>
+        </p:spPr>
+        <p:txBody>
+          <a:bodyPr wrap="square" lIns="45720" rIns="45720" tIns="36576" bIns="36576" anchor="t">
+            <a:spAutoFit/>
+          </a:bodyPr>
+          <a:lstStyle/>
+          <a:p>
+            <a:pPr algn="l">
+              <a:defRPr sz="1200" b="1">
+                <a:solidFill>
+                  <a:srgbClr val="CC4F3E"/>
+                </a:solidFill>
+                <a:latin typeface="Aptos"/>
+              </a:defRPr>
+            </a:pPr>
+            <a:r>
+              <a:t>PASO 5</a:t>
+            </a:r>
+          </a:p>
+        </p:txBody>
+      </p:sp>
+      <p:sp>
+        <p:nvSpPr>
+          <p:cNvPr id="22" name="TextBox 21"/>
+          <p:cNvSpPr txBox="1"/>
+          <p:nvPr/>
+        </p:nvSpPr>
+        <p:spPr>
+          <a:xfrm>
+            <a:off x="1664208" y="5367528"/>
+            <a:ext cx="9464040" cy="594360"/>
+          </a:xfrm>
+          <a:prstGeom prst="rect">
+            <a:avLst/>
+          </a:prstGeom>
+          <a:noFill/>
+        </p:spPr>
+        <p:txBody>
+          <a:bodyPr wrap="square" lIns="45720" rIns="45720" tIns="36576" bIns="36576" anchor="t">
+            <a:spAutoFit/>
+          </a:bodyPr>
+          <a:lstStyle/>
+          <a:p>
+            <a:pPr algn="l">
+              <a:defRPr sz="1700" b="0">
+                <a:solidFill>
+                  <a:srgbClr val="1C2330"/>
+                </a:solidFill>
+                <a:latin typeface="Aptos"/>
+              </a:defRPr>
+            </a:pPr>
+            <a:r>
+              <a:t>Reto — torre autoportante dentro de 25 × 25 cm; carga aproximada de 50 g durante 60 segundos.</a:t>
             </a:r>
           </a:p>
         </p:txBody>

--- a/02-PROFESORADO/03-PRESENTACIONES/POR-SESION/h0/S203-microprueba-y-equipos-provisionales-de-3-o-4-presentacion.pptx
+++ b/02-PROFESORADO/03-PRESENTACIONES/POR-SESION/h0/S203-microprueba-y-equipos-provisionales-de-3-o-4-presentacion.pptx
@@ -3407,7 +3407,7 @@
               </a:defRPr>
             </a:pPr>
             <a:r>
-              <a:t>Equipos provisionales de tres o cuatro preparados por el docente</a:t>
+              <a:t>Individual → puesta en común en equipo</a:t>
             </a:r>
           </a:p>
         </p:txBody>
@@ -3443,7 +3443,7 @@
               </a:defRPr>
             </a:pPr>
             <a:r>
-              <a:t>MINIJARVIS · PROGRAMACIÓN + ENTORNOS DE DESARROLLO</a:t>
+              <a:t>MINIJARVIS · PROGRAMACIÓN</a:t>
             </a:r>
           </a:p>
         </p:txBody>

--- a/02-PROFESORADO/03-PRESENTACIONES/POR-SESION/h0/S203-microprueba-y-equipos-provisionales-de-3-o-4-presentacion.pptx
+++ b/02-PROFESORADO/03-PRESENTACIONES/POR-SESION/h0/S203-microprueba-y-equipos-provisionales-de-3-o-4-presentacion.pptx
@@ -118,6 +118,1280 @@
     </a:lvl9pPr>
   </p:defaultTextStyle>
 </p:presentation>
+</file>
+
+<file path=ppt/notesMasters/notesMaster1.xml><?xml version="1.0" encoding="utf-8"?>
+<p:notesMaster xmlns:a="http://schemas.openxmlformats.org/drawingml/2006/main" xmlns:p="http://schemas.openxmlformats.org/presentationml/2006/main" xmlns:r="http://schemas.openxmlformats.org/officeDocument/2006/relationships">
+  <p:cSld>
+    <p:bg>
+      <p:bgRef idx="1001">
+        <a:schemeClr val="bg1"/>
+      </p:bgRef>
+    </p:bg>
+    <p:spTree>
+      <p:nvGrpSpPr>
+        <p:cNvPr id="1" name=""/>
+        <p:cNvGrpSpPr/>
+        <p:nvPr/>
+      </p:nvGrpSpPr>
+      <p:grpSpPr>
+        <a:xfrm>
+          <a:off x="0" y="0"/>
+          <a:ext cx="0" cy="0"/>
+          <a:chOff x="0" y="0"/>
+          <a:chExt cx="0" cy="0"/>
+        </a:xfrm>
+      </p:grpSpPr>
+      <p:sp>
+        <p:nvSpPr>
+          <p:cNvPr id="2" name="Header Placeholder 1"/>
+          <p:cNvSpPr>
+            <a:spLocks noGrp="1"/>
+          </p:cNvSpPr>
+          <p:nvPr>
+            <p:ph type="hdr" sz="quarter"/>
+          </p:nvPr>
+        </p:nvSpPr>
+        <p:spPr>
+          <a:xfrm>
+            <a:off x="0" y="0"/>
+            <a:ext cx="2971800" cy="457200"/>
+          </a:xfrm>
+          <a:prstGeom prst="rect">
+            <a:avLst/>
+          </a:prstGeom>
+        </p:spPr>
+        <p:txBody>
+          <a:bodyPr vert="horz" lIns="91440" tIns="45720" rIns="91440" bIns="45720" rtlCol="0"/>
+          <a:lstStyle>
+            <a:lvl1pPr algn="l">
+              <a:defRPr sz="1200"/>
+            </a:lvl1pPr>
+          </a:lstStyle>
+          <a:p>
+            <a:endParaRPr lang="en-US"/>
+          </a:p>
+        </p:txBody>
+      </p:sp>
+      <p:sp>
+        <p:nvSpPr>
+          <p:cNvPr id="3" name="Date Placeholder 2"/>
+          <p:cNvSpPr>
+            <a:spLocks noGrp="1"/>
+          </p:cNvSpPr>
+          <p:nvPr>
+            <p:ph type="dt" idx="1"/>
+          </p:nvPr>
+        </p:nvSpPr>
+        <p:spPr>
+          <a:xfrm>
+            <a:off x="3884613" y="0"/>
+            <a:ext cx="2971800" cy="457200"/>
+          </a:xfrm>
+          <a:prstGeom prst="rect">
+            <a:avLst/>
+          </a:prstGeom>
+        </p:spPr>
+        <p:txBody>
+          <a:bodyPr vert="horz" lIns="91440" tIns="45720" rIns="91440" bIns="45720" rtlCol="0"/>
+          <a:lstStyle>
+            <a:lvl1pPr algn="r">
+              <a:defRPr sz="1200"/>
+            </a:lvl1pPr>
+          </a:lstStyle>
+          <a:p>
+            <a:fld id="{0F89C1C7-3DCD-1040-A9CF-14679D8B5DDD}" type="datetimeFigureOut">
+              <a:rPr lang="en-US" smtClean="0"/>
+              <a:t>10/17/16</a:t>
+            </a:fld>
+            <a:endParaRPr lang="en-US"/>
+          </a:p>
+        </p:txBody>
+      </p:sp>
+      <p:sp>
+        <p:nvSpPr>
+          <p:cNvPr id="4" name="Slide Image Placeholder 3"/>
+          <p:cNvSpPr>
+            <a:spLocks noGrp="1" noRot="1" noChangeAspect="1"/>
+          </p:cNvSpPr>
+          <p:nvPr>
+            <p:ph type="sldImg" idx="2"/>
+          </p:nvPr>
+        </p:nvSpPr>
+        <p:spPr>
+          <a:xfrm>
+            <a:off x="1143000" y="685800"/>
+            <a:ext cx="4572000" cy="3429000"/>
+          </a:xfrm>
+          <a:prstGeom prst="rect">
+            <a:avLst/>
+          </a:prstGeom>
+          <a:noFill/>
+          <a:ln w="12700">
+            <a:solidFill>
+              <a:prstClr val="black"/>
+            </a:solidFill>
+          </a:ln>
+        </p:spPr>
+        <p:txBody>
+          <a:bodyPr vert="horz" lIns="91440" tIns="45720" rIns="91440" bIns="45720" rtlCol="0" anchor="ctr"/>
+          <a:lstStyle/>
+          <a:p>
+            <a:endParaRPr lang="en-US"/>
+          </a:p>
+        </p:txBody>
+      </p:sp>
+      <p:sp>
+        <p:nvSpPr>
+          <p:cNvPr id="5" name="Notes Placeholder 4"/>
+          <p:cNvSpPr>
+            <a:spLocks noGrp="1"/>
+          </p:cNvSpPr>
+          <p:nvPr>
+            <p:ph type="body" sz="quarter" idx="3"/>
+          </p:nvPr>
+        </p:nvSpPr>
+        <p:spPr>
+          <a:xfrm>
+            <a:off x="685800" y="4343400"/>
+            <a:ext cx="5486400" cy="4114800"/>
+          </a:xfrm>
+          <a:prstGeom prst="rect">
+            <a:avLst/>
+          </a:prstGeom>
+        </p:spPr>
+        <p:txBody>
+          <a:bodyPr vert="horz" lIns="91440" tIns="45720" rIns="91440" bIns="45720" rtlCol="0"/>
+          <a:lstStyle/>
+          <a:p>
+            <a:pPr lvl="0"/>
+            <a:r>
+              <a:rPr lang="en-US" smtClean="0"/>
+              <a:t>Click to edit Master text styles</a:t>
+            </a:r>
+          </a:p>
+          <a:p>
+            <a:pPr lvl="1"/>
+            <a:r>
+              <a:rPr lang="en-US" smtClean="0"/>
+              <a:t>Second level</a:t>
+            </a:r>
+          </a:p>
+          <a:p>
+            <a:pPr lvl="2"/>
+            <a:r>
+              <a:rPr lang="en-US" smtClean="0"/>
+              <a:t>Third level</a:t>
+            </a:r>
+          </a:p>
+          <a:p>
+            <a:pPr lvl="3"/>
+            <a:r>
+              <a:rPr lang="en-US" smtClean="0"/>
+              <a:t>Fourth level</a:t>
+            </a:r>
+          </a:p>
+          <a:p>
+            <a:pPr lvl="4"/>
+            <a:r>
+              <a:rPr lang="en-US" smtClean="0"/>
+              <a:t>Fifth level</a:t>
+            </a:r>
+            <a:endParaRPr lang="en-US"/>
+          </a:p>
+        </p:txBody>
+      </p:sp>
+      <p:sp>
+        <p:nvSpPr>
+          <p:cNvPr id="6" name="Footer Placeholder 5"/>
+          <p:cNvSpPr>
+            <a:spLocks noGrp="1"/>
+          </p:cNvSpPr>
+          <p:nvPr>
+            <p:ph type="ftr" sz="quarter" idx="4"/>
+          </p:nvPr>
+        </p:nvSpPr>
+        <p:spPr>
+          <a:xfrm>
+            <a:off x="0" y="8685213"/>
+            <a:ext cx="2971800" cy="457200"/>
+          </a:xfrm>
+          <a:prstGeom prst="rect">
+            <a:avLst/>
+          </a:prstGeom>
+        </p:spPr>
+        <p:txBody>
+          <a:bodyPr vert="horz" lIns="91440" tIns="45720" rIns="91440" bIns="45720" rtlCol="0" anchor="b"/>
+          <a:lstStyle>
+            <a:lvl1pPr algn="l">
+              <a:defRPr sz="1200"/>
+            </a:lvl1pPr>
+          </a:lstStyle>
+          <a:p>
+            <a:endParaRPr lang="en-US"/>
+          </a:p>
+        </p:txBody>
+      </p:sp>
+      <p:sp>
+        <p:nvSpPr>
+          <p:cNvPr id="7" name="Slide Number Placeholder 6"/>
+          <p:cNvSpPr>
+            <a:spLocks noGrp="1"/>
+          </p:cNvSpPr>
+          <p:nvPr>
+            <p:ph type="sldNum" sz="quarter" idx="5"/>
+          </p:nvPr>
+        </p:nvSpPr>
+        <p:spPr>
+          <a:xfrm>
+            <a:off x="3884613" y="8685213"/>
+            <a:ext cx="2971800" cy="457200"/>
+          </a:xfrm>
+          <a:prstGeom prst="rect">
+            <a:avLst/>
+          </a:prstGeom>
+        </p:spPr>
+        <p:txBody>
+          <a:bodyPr vert="horz" lIns="91440" tIns="45720" rIns="91440" bIns="45720" rtlCol="0" anchor="b"/>
+          <a:lstStyle>
+            <a:lvl1pPr algn="r">
+              <a:defRPr sz="1200"/>
+            </a:lvl1pPr>
+          </a:lstStyle>
+          <a:p>
+            <a:fld id="{BB5E49A5-4136-284D-997B-48E1D791AD67}" type="slidenum">
+              <a:rPr lang="en-US" smtClean="0"/>
+              <a:t>‹#›</a:t>
+            </a:fld>
+            <a:endParaRPr lang="en-US"/>
+          </a:p>
+        </p:txBody>
+      </p:sp>
+    </p:spTree>
+    <p:extLst>
+      <p:ext uri="{BB962C8B-B14F-4D97-AF65-F5344CB8AC3E}">
+        <p14:creationId xmlns:p14="http://schemas.microsoft.com/office/powerpoint/2010/main" val="2623252185"/>
+      </p:ext>
+    </p:extLst>
+  </p:cSld>
+  <p:clrMap bg1="lt1" tx1="dk1" bg2="lt2" tx2="dk2" accent1="accent1" accent2="accent2" accent3="accent3" accent4="accent4" accent5="accent5" accent6="accent6" hlink="hlink" folHlink="folHlink"/>
+  <p:notesStyle>
+    <a:lvl1pPr marL="0" algn="l" defTabSz="457200" rtl="0" eaLnBrk="1" latinLnBrk="0" hangingPunct="1">
+      <a:defRPr sz="1200" kern="1200">
+        <a:solidFill>
+          <a:schemeClr val="tx1"/>
+        </a:solidFill>
+        <a:latin typeface="+mn-lt"/>
+        <a:ea typeface="+mn-ea"/>
+        <a:cs typeface="+mn-cs"/>
+      </a:defRPr>
+    </a:lvl1pPr>
+    <a:lvl2pPr marL="457200" algn="l" defTabSz="457200" rtl="0" eaLnBrk="1" latinLnBrk="0" hangingPunct="1">
+      <a:defRPr sz="1200" kern="1200">
+        <a:solidFill>
+          <a:schemeClr val="tx1"/>
+        </a:solidFill>
+        <a:latin typeface="+mn-lt"/>
+        <a:ea typeface="+mn-ea"/>
+        <a:cs typeface="+mn-cs"/>
+      </a:defRPr>
+    </a:lvl2pPr>
+    <a:lvl3pPr marL="914400" algn="l" defTabSz="457200" rtl="0" eaLnBrk="1" latinLnBrk="0" hangingPunct="1">
+      <a:defRPr sz="1200" kern="1200">
+        <a:solidFill>
+          <a:schemeClr val="tx1"/>
+        </a:solidFill>
+        <a:latin typeface="+mn-lt"/>
+        <a:ea typeface="+mn-ea"/>
+        <a:cs typeface="+mn-cs"/>
+      </a:defRPr>
+    </a:lvl3pPr>
+    <a:lvl4pPr marL="1371600" algn="l" defTabSz="457200" rtl="0" eaLnBrk="1" latinLnBrk="0" hangingPunct="1">
+      <a:defRPr sz="1200" kern="1200">
+        <a:solidFill>
+          <a:schemeClr val="tx1"/>
+        </a:solidFill>
+        <a:latin typeface="+mn-lt"/>
+        <a:ea typeface="+mn-ea"/>
+        <a:cs typeface="+mn-cs"/>
+      </a:defRPr>
+    </a:lvl4pPr>
+    <a:lvl5pPr marL="1828800" algn="l" defTabSz="457200" rtl="0" eaLnBrk="1" latinLnBrk="0" hangingPunct="1">
+      <a:defRPr sz="1200" kern="1200">
+        <a:solidFill>
+          <a:schemeClr val="tx1"/>
+        </a:solidFill>
+        <a:latin typeface="+mn-lt"/>
+        <a:ea typeface="+mn-ea"/>
+        <a:cs typeface="+mn-cs"/>
+      </a:defRPr>
+    </a:lvl5pPr>
+    <a:lvl6pPr marL="2286000" algn="l" defTabSz="457200" rtl="0" eaLnBrk="1" latinLnBrk="0" hangingPunct="1">
+      <a:defRPr sz="1200" kern="1200">
+        <a:solidFill>
+          <a:schemeClr val="tx1"/>
+        </a:solidFill>
+        <a:latin typeface="+mn-lt"/>
+        <a:ea typeface="+mn-ea"/>
+        <a:cs typeface="+mn-cs"/>
+      </a:defRPr>
+    </a:lvl6pPr>
+    <a:lvl7pPr marL="2743200" algn="l" defTabSz="457200" rtl="0" eaLnBrk="1" latinLnBrk="0" hangingPunct="1">
+      <a:defRPr sz="1200" kern="1200">
+        <a:solidFill>
+          <a:schemeClr val="tx1"/>
+        </a:solidFill>
+        <a:latin typeface="+mn-lt"/>
+        <a:ea typeface="+mn-ea"/>
+        <a:cs typeface="+mn-cs"/>
+      </a:defRPr>
+    </a:lvl7pPr>
+    <a:lvl8pPr marL="3200400" algn="l" defTabSz="457200" rtl="0" eaLnBrk="1" latinLnBrk="0" hangingPunct="1">
+      <a:defRPr sz="1200" kern="1200">
+        <a:solidFill>
+          <a:schemeClr val="tx1"/>
+        </a:solidFill>
+        <a:latin typeface="+mn-lt"/>
+        <a:ea typeface="+mn-ea"/>
+        <a:cs typeface="+mn-cs"/>
+      </a:defRPr>
+    </a:lvl8pPr>
+    <a:lvl9pPr marL="3657600" algn="l" defTabSz="457200" rtl="0" eaLnBrk="1" latinLnBrk="0" hangingPunct="1">
+      <a:defRPr sz="1200" kern="1200">
+        <a:solidFill>
+          <a:schemeClr val="tx1"/>
+        </a:solidFill>
+        <a:latin typeface="+mn-lt"/>
+        <a:ea typeface="+mn-ea"/>
+        <a:cs typeface="+mn-cs"/>
+      </a:defRPr>
+    </a:lvl9pPr>
+  </p:notesStyle>
+</p:notesMaster>
+</file>
+
+<file path=ppt/notesSlides/notesSlide1.xml><?xml version="1.0" encoding="utf-8"?>
+<p:notes xmlns:a="http://schemas.openxmlformats.org/drawingml/2006/main" xmlns:p="http://schemas.openxmlformats.org/presentationml/2006/main" xmlns:r="http://schemas.openxmlformats.org/officeDocument/2006/relationships">
+  <p:cSld>
+    <p:spTree>
+      <p:nvGrpSpPr>
+        <p:cNvPr id="1" name=""/>
+        <p:cNvGrpSpPr/>
+        <p:nvPr/>
+      </p:nvGrpSpPr>
+      <p:grpSpPr>
+        <a:xfrm>
+          <a:off x="0" y="0"/>
+          <a:ext cx="0" cy="0"/>
+          <a:chOff x="0" y="0"/>
+          <a:chExt cx="0" cy="0"/>
+        </a:xfrm>
+      </p:grpSpPr>
+      <p:sp>
+        <p:nvSpPr>
+          <p:cNvPr id="2" name="Slide Image Placeholder 1"/>
+          <p:cNvSpPr>
+            <a:spLocks noGrp="1"/>
+          </p:cNvSpPr>
+          <p:nvPr>
+            <p:ph type="sldImg" idx="2"/>
+          </p:nvPr>
+        </p:nvSpPr>
+        <p:spPr/>
+      </p:sp>
+      <p:sp>
+        <p:nvSpPr>
+          <p:cNvPr id="3" name="Notes Placeholder 2"/>
+          <p:cNvSpPr>
+            <a:spLocks noGrp="1"/>
+          </p:cNvSpPr>
+          <p:nvPr>
+            <p:ph type="body" idx="3" sz="quarter"/>
+          </p:nvPr>
+        </p:nvSpPr>
+        <p:spPr/>
+        <p:txBody>
+          <a:bodyPr/>
+          <a:lstStyle/>
+          <a:p/>
+        </p:txBody>
+      </p:sp>
+      <p:sp>
+        <p:nvSpPr>
+          <p:cNvPr id="4" name="Slide Number Placeholder 3"/>
+          <p:cNvSpPr>
+            <a:spLocks noGrp="1"/>
+          </p:cNvSpPr>
+          <p:nvPr>
+            <p:ph type="sldNum" idx="5" sz="quarter"/>
+          </p:nvPr>
+        </p:nvSpPr>
+        <p:spPr/>
+      </p:sp>
+    </p:spTree>
+  </p:cSld>
+  <p:clrMapOvr>
+    <a:masterClrMapping/>
+  </p:clrMapOvr>
+</p:notes>
+</file>
+
+<file path=ppt/notesSlides/notesSlide10.xml><?xml version="1.0" encoding="utf-8"?>
+<p:notes xmlns:a="http://schemas.openxmlformats.org/drawingml/2006/main" xmlns:p="http://schemas.openxmlformats.org/presentationml/2006/main" xmlns:r="http://schemas.openxmlformats.org/officeDocument/2006/relationships">
+  <p:cSld>
+    <p:spTree>
+      <p:nvGrpSpPr>
+        <p:cNvPr id="1" name=""/>
+        <p:cNvGrpSpPr/>
+        <p:nvPr/>
+      </p:nvGrpSpPr>
+      <p:grpSpPr>
+        <a:xfrm>
+          <a:off x="0" y="0"/>
+          <a:ext cx="0" cy="0"/>
+          <a:chOff x="0" y="0"/>
+          <a:chExt cx="0" cy="0"/>
+        </a:xfrm>
+      </p:grpSpPr>
+      <p:sp>
+        <p:nvSpPr>
+          <p:cNvPr id="2" name="Slide Image Placeholder 1"/>
+          <p:cNvSpPr>
+            <a:spLocks noGrp="1"/>
+          </p:cNvSpPr>
+          <p:nvPr>
+            <p:ph type="sldImg" idx="2"/>
+          </p:nvPr>
+        </p:nvSpPr>
+        <p:spPr/>
+      </p:sp>
+      <p:sp>
+        <p:nvSpPr>
+          <p:cNvPr id="3" name="Notes Placeholder 2"/>
+          <p:cNvSpPr>
+            <a:spLocks noGrp="1"/>
+          </p:cNvSpPr>
+          <p:nvPr>
+            <p:ph type="body" idx="3" sz="quarter"/>
+          </p:nvPr>
+        </p:nvSpPr>
+        <p:spPr/>
+        <p:txBody>
+          <a:bodyPr/>
+          <a:lstStyle/>
+          <a:p/>
+        </p:txBody>
+      </p:sp>
+      <p:sp>
+        <p:nvSpPr>
+          <p:cNvPr id="4" name="Slide Number Placeholder 3"/>
+          <p:cNvSpPr>
+            <a:spLocks noGrp="1"/>
+          </p:cNvSpPr>
+          <p:nvPr>
+            <p:ph type="sldNum" idx="5" sz="quarter"/>
+          </p:nvPr>
+        </p:nvSpPr>
+        <p:spPr/>
+      </p:sp>
+    </p:spTree>
+  </p:cSld>
+  <p:clrMapOvr>
+    <a:masterClrMapping/>
+  </p:clrMapOvr>
+</p:notes>
+</file>
+
+<file path=ppt/notesSlides/notesSlide11.xml><?xml version="1.0" encoding="utf-8"?>
+<p:notes xmlns:a="http://schemas.openxmlformats.org/drawingml/2006/main" xmlns:p="http://schemas.openxmlformats.org/presentationml/2006/main" xmlns:r="http://schemas.openxmlformats.org/officeDocument/2006/relationships">
+  <p:cSld>
+    <p:spTree>
+      <p:nvGrpSpPr>
+        <p:cNvPr id="1" name=""/>
+        <p:cNvGrpSpPr/>
+        <p:nvPr/>
+      </p:nvGrpSpPr>
+      <p:grpSpPr>
+        <a:xfrm>
+          <a:off x="0" y="0"/>
+          <a:ext cx="0" cy="0"/>
+          <a:chOff x="0" y="0"/>
+          <a:chExt cx="0" cy="0"/>
+        </a:xfrm>
+      </p:grpSpPr>
+      <p:sp>
+        <p:nvSpPr>
+          <p:cNvPr id="2" name="Slide Image Placeholder 1"/>
+          <p:cNvSpPr>
+            <a:spLocks noGrp="1"/>
+          </p:cNvSpPr>
+          <p:nvPr>
+            <p:ph type="sldImg" idx="2"/>
+          </p:nvPr>
+        </p:nvSpPr>
+        <p:spPr/>
+      </p:sp>
+      <p:sp>
+        <p:nvSpPr>
+          <p:cNvPr id="3" name="Notes Placeholder 2"/>
+          <p:cNvSpPr>
+            <a:spLocks noGrp="1"/>
+          </p:cNvSpPr>
+          <p:nvPr>
+            <p:ph type="body" idx="3" sz="quarter"/>
+          </p:nvPr>
+        </p:nvSpPr>
+        <p:spPr/>
+        <p:txBody>
+          <a:bodyPr/>
+          <a:lstStyle/>
+          <a:p/>
+        </p:txBody>
+      </p:sp>
+      <p:sp>
+        <p:nvSpPr>
+          <p:cNvPr id="4" name="Slide Number Placeholder 3"/>
+          <p:cNvSpPr>
+            <a:spLocks noGrp="1"/>
+          </p:cNvSpPr>
+          <p:nvPr>
+            <p:ph type="sldNum" idx="5" sz="quarter"/>
+          </p:nvPr>
+        </p:nvSpPr>
+        <p:spPr/>
+      </p:sp>
+    </p:spTree>
+  </p:cSld>
+  <p:clrMapOvr>
+    <a:masterClrMapping/>
+  </p:clrMapOvr>
+</p:notes>
+</file>
+
+<file path=ppt/notesSlides/notesSlide12.xml><?xml version="1.0" encoding="utf-8"?>
+<p:notes xmlns:a="http://schemas.openxmlformats.org/drawingml/2006/main" xmlns:p="http://schemas.openxmlformats.org/presentationml/2006/main" xmlns:r="http://schemas.openxmlformats.org/officeDocument/2006/relationships">
+  <p:cSld>
+    <p:spTree>
+      <p:nvGrpSpPr>
+        <p:cNvPr id="1" name=""/>
+        <p:cNvGrpSpPr/>
+        <p:nvPr/>
+      </p:nvGrpSpPr>
+      <p:grpSpPr>
+        <a:xfrm>
+          <a:off x="0" y="0"/>
+          <a:ext cx="0" cy="0"/>
+          <a:chOff x="0" y="0"/>
+          <a:chExt cx="0" cy="0"/>
+        </a:xfrm>
+      </p:grpSpPr>
+      <p:sp>
+        <p:nvSpPr>
+          <p:cNvPr id="2" name="Slide Image Placeholder 1"/>
+          <p:cNvSpPr>
+            <a:spLocks noGrp="1"/>
+          </p:cNvSpPr>
+          <p:nvPr>
+            <p:ph type="sldImg" idx="2"/>
+          </p:nvPr>
+        </p:nvSpPr>
+        <p:spPr/>
+      </p:sp>
+      <p:sp>
+        <p:nvSpPr>
+          <p:cNvPr id="3" name="Notes Placeholder 2"/>
+          <p:cNvSpPr>
+            <a:spLocks noGrp="1"/>
+          </p:cNvSpPr>
+          <p:nvPr>
+            <p:ph type="body" idx="3" sz="quarter"/>
+          </p:nvPr>
+        </p:nvSpPr>
+        <p:spPr/>
+        <p:txBody>
+          <a:bodyPr/>
+          <a:lstStyle/>
+          <a:p/>
+        </p:txBody>
+      </p:sp>
+      <p:sp>
+        <p:nvSpPr>
+          <p:cNvPr id="4" name="Slide Number Placeholder 3"/>
+          <p:cNvSpPr>
+            <a:spLocks noGrp="1"/>
+          </p:cNvSpPr>
+          <p:nvPr>
+            <p:ph type="sldNum" idx="5" sz="quarter"/>
+          </p:nvPr>
+        </p:nvSpPr>
+        <p:spPr/>
+      </p:sp>
+    </p:spTree>
+  </p:cSld>
+  <p:clrMapOvr>
+    <a:masterClrMapping/>
+  </p:clrMapOvr>
+</p:notes>
+</file>
+
+<file path=ppt/notesSlides/notesSlide13.xml><?xml version="1.0" encoding="utf-8"?>
+<p:notes xmlns:a="http://schemas.openxmlformats.org/drawingml/2006/main" xmlns:p="http://schemas.openxmlformats.org/presentationml/2006/main" xmlns:r="http://schemas.openxmlformats.org/officeDocument/2006/relationships">
+  <p:cSld>
+    <p:spTree>
+      <p:nvGrpSpPr>
+        <p:cNvPr id="1" name=""/>
+        <p:cNvGrpSpPr/>
+        <p:nvPr/>
+      </p:nvGrpSpPr>
+      <p:grpSpPr>
+        <a:xfrm>
+          <a:off x="0" y="0"/>
+          <a:ext cx="0" cy="0"/>
+          <a:chOff x="0" y="0"/>
+          <a:chExt cx="0" cy="0"/>
+        </a:xfrm>
+      </p:grpSpPr>
+      <p:sp>
+        <p:nvSpPr>
+          <p:cNvPr id="2" name="Slide Image Placeholder 1"/>
+          <p:cNvSpPr>
+            <a:spLocks noGrp="1"/>
+          </p:cNvSpPr>
+          <p:nvPr>
+            <p:ph type="sldImg" idx="2"/>
+          </p:nvPr>
+        </p:nvSpPr>
+        <p:spPr/>
+      </p:sp>
+      <p:sp>
+        <p:nvSpPr>
+          <p:cNvPr id="3" name="Notes Placeholder 2"/>
+          <p:cNvSpPr>
+            <a:spLocks noGrp="1"/>
+          </p:cNvSpPr>
+          <p:nvPr>
+            <p:ph type="body" idx="3" sz="quarter"/>
+          </p:nvPr>
+        </p:nvSpPr>
+        <p:spPr/>
+        <p:txBody>
+          <a:bodyPr/>
+          <a:lstStyle/>
+          <a:p/>
+        </p:txBody>
+      </p:sp>
+      <p:sp>
+        <p:nvSpPr>
+          <p:cNvPr id="4" name="Slide Number Placeholder 3"/>
+          <p:cNvSpPr>
+            <a:spLocks noGrp="1"/>
+          </p:cNvSpPr>
+          <p:nvPr>
+            <p:ph type="sldNum" idx="5" sz="quarter"/>
+          </p:nvPr>
+        </p:nvSpPr>
+        <p:spPr/>
+      </p:sp>
+    </p:spTree>
+  </p:cSld>
+  <p:clrMapOvr>
+    <a:masterClrMapping/>
+  </p:clrMapOvr>
+</p:notes>
+</file>
+
+<file path=ppt/notesSlides/notesSlide14.xml><?xml version="1.0" encoding="utf-8"?>
+<p:notes xmlns:a="http://schemas.openxmlformats.org/drawingml/2006/main" xmlns:p="http://schemas.openxmlformats.org/presentationml/2006/main" xmlns:r="http://schemas.openxmlformats.org/officeDocument/2006/relationships">
+  <p:cSld>
+    <p:spTree>
+      <p:nvGrpSpPr>
+        <p:cNvPr id="1" name=""/>
+        <p:cNvGrpSpPr/>
+        <p:nvPr/>
+      </p:nvGrpSpPr>
+      <p:grpSpPr>
+        <a:xfrm>
+          <a:off x="0" y="0"/>
+          <a:ext cx="0" cy="0"/>
+          <a:chOff x="0" y="0"/>
+          <a:chExt cx="0" cy="0"/>
+        </a:xfrm>
+      </p:grpSpPr>
+      <p:sp>
+        <p:nvSpPr>
+          <p:cNvPr id="2" name="Slide Image Placeholder 1"/>
+          <p:cNvSpPr>
+            <a:spLocks noGrp="1"/>
+          </p:cNvSpPr>
+          <p:nvPr>
+            <p:ph type="sldImg" idx="2"/>
+          </p:nvPr>
+        </p:nvSpPr>
+        <p:spPr/>
+      </p:sp>
+      <p:sp>
+        <p:nvSpPr>
+          <p:cNvPr id="3" name="Notes Placeholder 2"/>
+          <p:cNvSpPr>
+            <a:spLocks noGrp="1"/>
+          </p:cNvSpPr>
+          <p:nvPr>
+            <p:ph type="body" idx="3" sz="quarter"/>
+          </p:nvPr>
+        </p:nvSpPr>
+        <p:spPr/>
+        <p:txBody>
+          <a:bodyPr/>
+          <a:lstStyle/>
+          <a:p/>
+        </p:txBody>
+      </p:sp>
+      <p:sp>
+        <p:nvSpPr>
+          <p:cNvPr id="4" name="Slide Number Placeholder 3"/>
+          <p:cNvSpPr>
+            <a:spLocks noGrp="1"/>
+          </p:cNvSpPr>
+          <p:nvPr>
+            <p:ph type="sldNum" idx="5" sz="quarter"/>
+          </p:nvPr>
+        </p:nvSpPr>
+        <p:spPr/>
+      </p:sp>
+    </p:spTree>
+  </p:cSld>
+  <p:clrMapOvr>
+    <a:masterClrMapping/>
+  </p:clrMapOvr>
+</p:notes>
+</file>
+
+<file path=ppt/notesSlides/notesSlide2.xml><?xml version="1.0" encoding="utf-8"?>
+<p:notes xmlns:a="http://schemas.openxmlformats.org/drawingml/2006/main" xmlns:p="http://schemas.openxmlformats.org/presentationml/2006/main" xmlns:r="http://schemas.openxmlformats.org/officeDocument/2006/relationships">
+  <p:cSld>
+    <p:spTree>
+      <p:nvGrpSpPr>
+        <p:cNvPr id="1" name=""/>
+        <p:cNvGrpSpPr/>
+        <p:nvPr/>
+      </p:nvGrpSpPr>
+      <p:grpSpPr>
+        <a:xfrm>
+          <a:off x="0" y="0"/>
+          <a:ext cx="0" cy="0"/>
+          <a:chOff x="0" y="0"/>
+          <a:chExt cx="0" cy="0"/>
+        </a:xfrm>
+      </p:grpSpPr>
+      <p:sp>
+        <p:nvSpPr>
+          <p:cNvPr id="2" name="Slide Image Placeholder 1"/>
+          <p:cNvSpPr>
+            <a:spLocks noGrp="1"/>
+          </p:cNvSpPr>
+          <p:nvPr>
+            <p:ph type="sldImg" idx="2"/>
+          </p:nvPr>
+        </p:nvSpPr>
+        <p:spPr/>
+      </p:sp>
+      <p:sp>
+        <p:nvSpPr>
+          <p:cNvPr id="3" name="Notes Placeholder 2"/>
+          <p:cNvSpPr>
+            <a:spLocks noGrp="1"/>
+          </p:cNvSpPr>
+          <p:nvPr>
+            <p:ph type="body" idx="3" sz="quarter"/>
+          </p:nvPr>
+        </p:nvSpPr>
+        <p:spPr/>
+        <p:txBody>
+          <a:bodyPr/>
+          <a:lstStyle/>
+          <a:p/>
+        </p:txBody>
+      </p:sp>
+      <p:sp>
+        <p:nvSpPr>
+          <p:cNvPr id="4" name="Slide Number Placeholder 3"/>
+          <p:cNvSpPr>
+            <a:spLocks noGrp="1"/>
+          </p:cNvSpPr>
+          <p:nvPr>
+            <p:ph type="sldNum" idx="5" sz="quarter"/>
+          </p:nvPr>
+        </p:nvSpPr>
+        <p:spPr/>
+      </p:sp>
+    </p:spTree>
+  </p:cSld>
+  <p:clrMapOvr>
+    <a:masterClrMapping/>
+  </p:clrMapOvr>
+</p:notes>
+</file>
+
+<file path=ppt/notesSlides/notesSlide3.xml><?xml version="1.0" encoding="utf-8"?>
+<p:notes xmlns:a="http://schemas.openxmlformats.org/drawingml/2006/main" xmlns:p="http://schemas.openxmlformats.org/presentationml/2006/main" xmlns:r="http://schemas.openxmlformats.org/officeDocument/2006/relationships">
+  <p:cSld>
+    <p:spTree>
+      <p:nvGrpSpPr>
+        <p:cNvPr id="1" name=""/>
+        <p:cNvGrpSpPr/>
+        <p:nvPr/>
+      </p:nvGrpSpPr>
+      <p:grpSpPr>
+        <a:xfrm>
+          <a:off x="0" y="0"/>
+          <a:ext cx="0" cy="0"/>
+          <a:chOff x="0" y="0"/>
+          <a:chExt cx="0" cy="0"/>
+        </a:xfrm>
+      </p:grpSpPr>
+      <p:sp>
+        <p:nvSpPr>
+          <p:cNvPr id="2" name="Slide Image Placeholder 1"/>
+          <p:cNvSpPr>
+            <a:spLocks noGrp="1"/>
+          </p:cNvSpPr>
+          <p:nvPr>
+            <p:ph type="sldImg" idx="2"/>
+          </p:nvPr>
+        </p:nvSpPr>
+        <p:spPr/>
+      </p:sp>
+      <p:sp>
+        <p:nvSpPr>
+          <p:cNvPr id="3" name="Notes Placeholder 2"/>
+          <p:cNvSpPr>
+            <a:spLocks noGrp="1"/>
+          </p:cNvSpPr>
+          <p:nvPr>
+            <p:ph type="body" idx="3" sz="quarter"/>
+          </p:nvPr>
+        </p:nvSpPr>
+        <p:spPr/>
+        <p:txBody>
+          <a:bodyPr/>
+          <a:lstStyle/>
+          <a:p/>
+        </p:txBody>
+      </p:sp>
+      <p:sp>
+        <p:nvSpPr>
+          <p:cNvPr id="4" name="Slide Number Placeholder 3"/>
+          <p:cNvSpPr>
+            <a:spLocks noGrp="1"/>
+          </p:cNvSpPr>
+          <p:nvPr>
+            <p:ph type="sldNum" idx="5" sz="quarter"/>
+          </p:nvPr>
+        </p:nvSpPr>
+        <p:spPr/>
+      </p:sp>
+    </p:spTree>
+  </p:cSld>
+  <p:clrMapOvr>
+    <a:masterClrMapping/>
+  </p:clrMapOvr>
+</p:notes>
+</file>
+
+<file path=ppt/notesSlides/notesSlide4.xml><?xml version="1.0" encoding="utf-8"?>
+<p:notes xmlns:a="http://schemas.openxmlformats.org/drawingml/2006/main" xmlns:p="http://schemas.openxmlformats.org/presentationml/2006/main" xmlns:r="http://schemas.openxmlformats.org/officeDocument/2006/relationships">
+  <p:cSld>
+    <p:spTree>
+      <p:nvGrpSpPr>
+        <p:cNvPr id="1" name=""/>
+        <p:cNvGrpSpPr/>
+        <p:nvPr/>
+      </p:nvGrpSpPr>
+      <p:grpSpPr>
+        <a:xfrm>
+          <a:off x="0" y="0"/>
+          <a:ext cx="0" cy="0"/>
+          <a:chOff x="0" y="0"/>
+          <a:chExt cx="0" cy="0"/>
+        </a:xfrm>
+      </p:grpSpPr>
+      <p:sp>
+        <p:nvSpPr>
+          <p:cNvPr id="2" name="Slide Image Placeholder 1"/>
+          <p:cNvSpPr>
+            <a:spLocks noGrp="1"/>
+          </p:cNvSpPr>
+          <p:nvPr>
+            <p:ph type="sldImg" idx="2"/>
+          </p:nvPr>
+        </p:nvSpPr>
+        <p:spPr/>
+      </p:sp>
+      <p:sp>
+        <p:nvSpPr>
+          <p:cNvPr id="3" name="Notes Placeholder 2"/>
+          <p:cNvSpPr>
+            <a:spLocks noGrp="1"/>
+          </p:cNvSpPr>
+          <p:nvPr>
+            <p:ph type="body" idx="3" sz="quarter"/>
+          </p:nvPr>
+        </p:nvSpPr>
+        <p:spPr/>
+        <p:txBody>
+          <a:bodyPr/>
+          <a:lstStyle/>
+          <a:p/>
+        </p:txBody>
+      </p:sp>
+      <p:sp>
+        <p:nvSpPr>
+          <p:cNvPr id="4" name="Slide Number Placeholder 3"/>
+          <p:cNvSpPr>
+            <a:spLocks noGrp="1"/>
+          </p:cNvSpPr>
+          <p:nvPr>
+            <p:ph type="sldNum" idx="5" sz="quarter"/>
+          </p:nvPr>
+        </p:nvSpPr>
+        <p:spPr/>
+      </p:sp>
+    </p:spTree>
+  </p:cSld>
+  <p:clrMapOvr>
+    <a:masterClrMapping/>
+  </p:clrMapOvr>
+</p:notes>
+</file>
+
+<file path=ppt/notesSlides/notesSlide5.xml><?xml version="1.0" encoding="utf-8"?>
+<p:notes xmlns:a="http://schemas.openxmlformats.org/drawingml/2006/main" xmlns:p="http://schemas.openxmlformats.org/presentationml/2006/main" xmlns:r="http://schemas.openxmlformats.org/officeDocument/2006/relationships">
+  <p:cSld>
+    <p:spTree>
+      <p:nvGrpSpPr>
+        <p:cNvPr id="1" name=""/>
+        <p:cNvGrpSpPr/>
+        <p:nvPr/>
+      </p:nvGrpSpPr>
+      <p:grpSpPr>
+        <a:xfrm>
+          <a:off x="0" y="0"/>
+          <a:ext cx="0" cy="0"/>
+          <a:chOff x="0" y="0"/>
+          <a:chExt cx="0" cy="0"/>
+        </a:xfrm>
+      </p:grpSpPr>
+      <p:sp>
+        <p:nvSpPr>
+          <p:cNvPr id="2" name="Slide Image Placeholder 1"/>
+          <p:cNvSpPr>
+            <a:spLocks noGrp="1"/>
+          </p:cNvSpPr>
+          <p:nvPr>
+            <p:ph type="sldImg" idx="2"/>
+          </p:nvPr>
+        </p:nvSpPr>
+        <p:spPr/>
+      </p:sp>
+      <p:sp>
+        <p:nvSpPr>
+          <p:cNvPr id="3" name="Notes Placeholder 2"/>
+          <p:cNvSpPr>
+            <a:spLocks noGrp="1"/>
+          </p:cNvSpPr>
+          <p:nvPr>
+            <p:ph type="body" idx="3" sz="quarter"/>
+          </p:nvPr>
+        </p:nvSpPr>
+        <p:spPr/>
+        <p:txBody>
+          <a:bodyPr/>
+          <a:lstStyle/>
+          <a:p/>
+        </p:txBody>
+      </p:sp>
+      <p:sp>
+        <p:nvSpPr>
+          <p:cNvPr id="4" name="Slide Number Placeholder 3"/>
+          <p:cNvSpPr>
+            <a:spLocks noGrp="1"/>
+          </p:cNvSpPr>
+          <p:nvPr>
+            <p:ph type="sldNum" idx="5" sz="quarter"/>
+          </p:nvPr>
+        </p:nvSpPr>
+        <p:spPr/>
+      </p:sp>
+    </p:spTree>
+  </p:cSld>
+  <p:clrMapOvr>
+    <a:masterClrMapping/>
+  </p:clrMapOvr>
+</p:notes>
+</file>
+
+<file path=ppt/notesSlides/notesSlide6.xml><?xml version="1.0" encoding="utf-8"?>
+<p:notes xmlns:a="http://schemas.openxmlformats.org/drawingml/2006/main" xmlns:p="http://schemas.openxmlformats.org/presentationml/2006/main" xmlns:r="http://schemas.openxmlformats.org/officeDocument/2006/relationships">
+  <p:cSld>
+    <p:spTree>
+      <p:nvGrpSpPr>
+        <p:cNvPr id="1" name=""/>
+        <p:cNvGrpSpPr/>
+        <p:nvPr/>
+      </p:nvGrpSpPr>
+      <p:grpSpPr>
+        <a:xfrm>
+          <a:off x="0" y="0"/>
+          <a:ext cx="0" cy="0"/>
+          <a:chOff x="0" y="0"/>
+          <a:chExt cx="0" cy="0"/>
+        </a:xfrm>
+      </p:grpSpPr>
+      <p:sp>
+        <p:nvSpPr>
+          <p:cNvPr id="2" name="Slide Image Placeholder 1"/>
+          <p:cNvSpPr>
+            <a:spLocks noGrp="1"/>
+          </p:cNvSpPr>
+          <p:nvPr>
+            <p:ph type="sldImg" idx="2"/>
+          </p:nvPr>
+        </p:nvSpPr>
+        <p:spPr/>
+      </p:sp>
+      <p:sp>
+        <p:nvSpPr>
+          <p:cNvPr id="3" name="Notes Placeholder 2"/>
+          <p:cNvSpPr>
+            <a:spLocks noGrp="1"/>
+          </p:cNvSpPr>
+          <p:nvPr>
+            <p:ph type="body" idx="3" sz="quarter"/>
+          </p:nvPr>
+        </p:nvSpPr>
+        <p:spPr/>
+        <p:txBody>
+          <a:bodyPr/>
+          <a:lstStyle/>
+          <a:p/>
+        </p:txBody>
+      </p:sp>
+      <p:sp>
+        <p:nvSpPr>
+          <p:cNvPr id="4" name="Slide Number Placeholder 3"/>
+          <p:cNvSpPr>
+            <a:spLocks noGrp="1"/>
+          </p:cNvSpPr>
+          <p:nvPr>
+            <p:ph type="sldNum" idx="5" sz="quarter"/>
+          </p:nvPr>
+        </p:nvSpPr>
+        <p:spPr/>
+      </p:sp>
+    </p:spTree>
+  </p:cSld>
+  <p:clrMapOvr>
+    <a:masterClrMapping/>
+  </p:clrMapOvr>
+</p:notes>
+</file>
+
+<file path=ppt/notesSlides/notesSlide7.xml><?xml version="1.0" encoding="utf-8"?>
+<p:notes xmlns:a="http://schemas.openxmlformats.org/drawingml/2006/main" xmlns:p="http://schemas.openxmlformats.org/presentationml/2006/main" xmlns:r="http://schemas.openxmlformats.org/officeDocument/2006/relationships">
+  <p:cSld>
+    <p:spTree>
+      <p:nvGrpSpPr>
+        <p:cNvPr id="1" name=""/>
+        <p:cNvGrpSpPr/>
+        <p:nvPr/>
+      </p:nvGrpSpPr>
+      <p:grpSpPr>
+        <a:xfrm>
+          <a:off x="0" y="0"/>
+          <a:ext cx="0" cy="0"/>
+          <a:chOff x="0" y="0"/>
+          <a:chExt cx="0" cy="0"/>
+        </a:xfrm>
+      </p:grpSpPr>
+      <p:sp>
+        <p:nvSpPr>
+          <p:cNvPr id="2" name="Slide Image Placeholder 1"/>
+          <p:cNvSpPr>
+            <a:spLocks noGrp="1"/>
+          </p:cNvSpPr>
+          <p:nvPr>
+            <p:ph type="sldImg" idx="2"/>
+          </p:nvPr>
+        </p:nvSpPr>
+        <p:spPr/>
+      </p:sp>
+      <p:sp>
+        <p:nvSpPr>
+          <p:cNvPr id="3" name="Notes Placeholder 2"/>
+          <p:cNvSpPr>
+            <a:spLocks noGrp="1"/>
+          </p:cNvSpPr>
+          <p:nvPr>
+            <p:ph type="body" idx="3" sz="quarter"/>
+          </p:nvPr>
+        </p:nvSpPr>
+        <p:spPr/>
+        <p:txBody>
+          <a:bodyPr/>
+          <a:lstStyle/>
+          <a:p/>
+        </p:txBody>
+      </p:sp>
+      <p:sp>
+        <p:nvSpPr>
+          <p:cNvPr id="4" name="Slide Number Placeholder 3"/>
+          <p:cNvSpPr>
+            <a:spLocks noGrp="1"/>
+          </p:cNvSpPr>
+          <p:nvPr>
+            <p:ph type="sldNum" idx="5" sz="quarter"/>
+          </p:nvPr>
+        </p:nvSpPr>
+        <p:spPr/>
+      </p:sp>
+    </p:spTree>
+  </p:cSld>
+  <p:clrMapOvr>
+    <a:masterClrMapping/>
+  </p:clrMapOvr>
+</p:notes>
+</file>
+
+<file path=ppt/notesSlides/notesSlide8.xml><?xml version="1.0" encoding="utf-8"?>
+<p:notes xmlns:a="http://schemas.openxmlformats.org/drawingml/2006/main" xmlns:p="http://schemas.openxmlformats.org/presentationml/2006/main" xmlns:r="http://schemas.openxmlformats.org/officeDocument/2006/relationships">
+  <p:cSld>
+    <p:spTree>
+      <p:nvGrpSpPr>
+        <p:cNvPr id="1" name=""/>
+        <p:cNvGrpSpPr/>
+        <p:nvPr/>
+      </p:nvGrpSpPr>
+      <p:grpSpPr>
+        <a:xfrm>
+          <a:off x="0" y="0"/>
+          <a:ext cx="0" cy="0"/>
+          <a:chOff x="0" y="0"/>
+          <a:chExt cx="0" cy="0"/>
+        </a:xfrm>
+      </p:grpSpPr>
+      <p:sp>
+        <p:nvSpPr>
+          <p:cNvPr id="2" name="Slide Image Placeholder 1"/>
+          <p:cNvSpPr>
+            <a:spLocks noGrp="1"/>
+          </p:cNvSpPr>
+          <p:nvPr>
+            <p:ph type="sldImg" idx="2"/>
+          </p:nvPr>
+        </p:nvSpPr>
+        <p:spPr/>
+      </p:sp>
+      <p:sp>
+        <p:nvSpPr>
+          <p:cNvPr id="3" name="Notes Placeholder 2"/>
+          <p:cNvSpPr>
+            <a:spLocks noGrp="1"/>
+          </p:cNvSpPr>
+          <p:nvPr>
+            <p:ph type="body" idx="3" sz="quarter"/>
+          </p:nvPr>
+        </p:nvSpPr>
+        <p:spPr/>
+        <p:txBody>
+          <a:bodyPr/>
+          <a:lstStyle/>
+          <a:p/>
+        </p:txBody>
+      </p:sp>
+      <p:sp>
+        <p:nvSpPr>
+          <p:cNvPr id="4" name="Slide Number Placeholder 3"/>
+          <p:cNvSpPr>
+            <a:spLocks noGrp="1"/>
+          </p:cNvSpPr>
+          <p:nvPr>
+            <p:ph type="sldNum" idx="5" sz="quarter"/>
+          </p:nvPr>
+        </p:nvSpPr>
+        <p:spPr/>
+      </p:sp>
+    </p:spTree>
+  </p:cSld>
+  <p:clrMapOvr>
+    <a:masterClrMapping/>
+  </p:clrMapOvr>
+</p:notes>
+</file>
+
+<file path=ppt/notesSlides/notesSlide9.xml><?xml version="1.0" encoding="utf-8"?>
+<p:notes xmlns:a="http://schemas.openxmlformats.org/drawingml/2006/main" xmlns:p="http://schemas.openxmlformats.org/presentationml/2006/main" xmlns:r="http://schemas.openxmlformats.org/officeDocument/2006/relationships">
+  <p:cSld>
+    <p:spTree>
+      <p:nvGrpSpPr>
+        <p:cNvPr id="1" name=""/>
+        <p:cNvGrpSpPr/>
+        <p:nvPr/>
+      </p:nvGrpSpPr>
+      <p:grpSpPr>
+        <a:xfrm>
+          <a:off x="0" y="0"/>
+          <a:ext cx="0" cy="0"/>
+          <a:chOff x="0" y="0"/>
+          <a:chExt cx="0" cy="0"/>
+        </a:xfrm>
+      </p:grpSpPr>
+      <p:sp>
+        <p:nvSpPr>
+          <p:cNvPr id="2" name="Slide Image Placeholder 1"/>
+          <p:cNvSpPr>
+            <a:spLocks noGrp="1"/>
+          </p:cNvSpPr>
+          <p:nvPr>
+            <p:ph type="sldImg" idx="2"/>
+          </p:nvPr>
+        </p:nvSpPr>
+        <p:spPr/>
+      </p:sp>
+      <p:sp>
+        <p:nvSpPr>
+          <p:cNvPr id="3" name="Notes Placeholder 2"/>
+          <p:cNvSpPr>
+            <a:spLocks noGrp="1"/>
+          </p:cNvSpPr>
+          <p:nvPr>
+            <p:ph type="body" idx="3" sz="quarter"/>
+          </p:nvPr>
+        </p:nvSpPr>
+        <p:spPr/>
+        <p:txBody>
+          <a:bodyPr/>
+          <a:lstStyle/>
+          <a:p/>
+        </p:txBody>
+      </p:sp>
+      <p:sp>
+        <p:nvSpPr>
+          <p:cNvPr id="4" name="Slide Number Placeholder 3"/>
+          <p:cNvSpPr>
+            <a:spLocks noGrp="1"/>
+          </p:cNvSpPr>
+          <p:nvPr>
+            <p:ph type="sldNum" idx="5" sz="quarter"/>
+          </p:nvPr>
+        </p:nvSpPr>
+        <p:spPr/>
+      </p:sp>
+    </p:spTree>
+  </p:cSld>
+  <p:clrMapOvr>
+    <a:masterClrMapping/>
+  </p:clrMapOvr>
+</p:notes>
 </file>
 
 <file path=ppt/slideLayouts/slideLayout1.xml><?xml version="1.0" encoding="utf-8"?>
@@ -3263,7 +4537,7 @@
               </a:defRPr>
             </a:pPr>
             <a:r>
-              <a:t>SESIÓN 203</a:t>
+              <a:t>H0.3</a:t>
             </a:r>
           </a:p>
         </p:txBody>
@@ -3698,7 +4972,7 @@
               </a:defRPr>
             </a:pPr>
             <a:r>
-              <a:t>MiniJarvis · 1.º DAW · Sesión 203 · H0 — Formación y prueba de equipos Scrum mediante la torre de papel</a:t>
+              <a:t>MiniJarvis · 1.º DAW · H0.3 · H0 — Formación y prueba de equipos Scrum mediante la torre de papel</a:t>
             </a:r>
           </a:p>
         </p:txBody>
@@ -4421,7 +5695,7 @@
               </a:defRPr>
             </a:pPr>
             <a:r>
-              <a:t>MiniJarvis · 1.º DAW · Sesión 203 · H0 — Formación y prueba de equipos Scrum mediante la torre de papel</a:t>
+              <a:t>MiniJarvis · 1.º DAW · H0.3 · H0 — Formación y prueba de equipos Scrum mediante la torre de papel</a:t>
             </a:r>
           </a:p>
         </p:txBody>
@@ -5243,7 +6517,7 @@
               </a:defRPr>
             </a:pPr>
             <a:r>
-              <a:t>MiniJarvis · 1.º DAW · Sesión 203 · H0 — Formación y prueba de equipos Scrum mediante la torre de papel</a:t>
+              <a:t>MiniJarvis · 1.º DAW · H0.3 · H0 — Formación y prueba de equipos Scrum mediante la torre de papel</a:t>
             </a:r>
           </a:p>
         </p:txBody>
@@ -5741,7 +7015,7 @@
               </a:defRPr>
             </a:pPr>
             <a:r>
-              <a:t>MiniJarvis · 1.º DAW · Sesión 203 · H0 — Formación y prueba de equipos Scrum mediante la torre de papel</a:t>
+              <a:t>MiniJarvis · 1.º DAW · H0.3 · H0 — Formación y prueba de equipos Scrum mediante la torre de papel</a:t>
             </a:r>
           </a:p>
         </p:txBody>
@@ -6244,7 +7518,7 @@
               </a:defRPr>
             </a:pPr>
             <a:r>
-              <a:t>MiniJarvis · 1.º DAW · Sesión 203 · H0 — Formación y prueba de equipos Scrum mediante la torre de papel</a:t>
+              <a:t>MiniJarvis · 1.º DAW · H0.3 · H0 — Formación y prueba de equipos Scrum mediante la torre de papel</a:t>
             </a:r>
           </a:p>
         </p:txBody>
@@ -6687,7 +7961,7 @@
               </a:defRPr>
             </a:pPr>
             <a:r>
-              <a:t>MiniJarvis · 1.º DAW · Sesión 203 · H0 — Formación y prueba de equipos Scrum mediante la torre de papel</a:t>
+              <a:t>MiniJarvis · 1.º DAW · H0.3 · H0 — Formación y prueba de equipos Scrum mediante la torre de papel</a:t>
             </a:r>
           </a:p>
         </p:txBody>
@@ -7104,7 +8378,7 @@
               </a:defRPr>
             </a:pPr>
             <a:r>
-              <a:t>MiniJarvis · 1.º DAW · Sesión 203 · H0 — Formación y prueba de equipos Scrum mediante la torre de papel</a:t>
+              <a:t>MiniJarvis · 1.º DAW · H0.3 · H0 — Formación y prueba de equipos Scrum mediante la torre de papel</a:t>
             </a:r>
           </a:p>
         </p:txBody>
@@ -8049,7 +9323,7 @@
               </a:defRPr>
             </a:pPr>
             <a:r>
-              <a:t>MiniJarvis · 1.º DAW · Sesión 203 · H0 — Formación y prueba de equipos Scrum mediante la torre de papel</a:t>
+              <a:t>MiniJarvis · 1.º DAW · H0.3 · H0 — Formación y prueba de equipos Scrum mediante la torre de papel</a:t>
             </a:r>
           </a:p>
         </p:txBody>
@@ -8649,7 +9923,7 @@
               </a:defRPr>
             </a:pPr>
             <a:r>
-              <a:t>MiniJarvis · 1.º DAW · Sesión 203 · H0 — Formación y prueba de equipos Scrum mediante la torre de papel</a:t>
+              <a:t>MiniJarvis · 1.º DAW · H0.3 · H0 — Formación y prueba de equipos Scrum mediante la torre de papel</a:t>
             </a:r>
           </a:p>
         </p:txBody>
@@ -9723,7 +10997,7 @@
               </a:defRPr>
             </a:pPr>
             <a:r>
-              <a:t>MiniJarvis · 1.º DAW · Sesión 203 · H0 — Formación y prueba de equipos Scrum mediante la torre de papel</a:t>
+              <a:t>MiniJarvis · 1.º DAW · H0.3 · H0 — Formación y prueba de equipos Scrum mediante la torre de papel</a:t>
             </a:r>
           </a:p>
         </p:txBody>
@@ -10563,7 +11837,7 @@
               </a:defRPr>
             </a:pPr>
             <a:r>
-              <a:t>MiniJarvis · 1.º DAW · Sesión 203 · H0 — Formación y prueba de equipos Scrum mediante la torre de papel</a:t>
+              <a:t>MiniJarvis · 1.º DAW · H0.3 · H0 — Formación y prueba de equipos Scrum mediante la torre de papel</a:t>
             </a:r>
           </a:p>
         </p:txBody>
@@ -11367,7 +12641,7 @@
               </a:defRPr>
             </a:pPr>
             <a:r>
-              <a:t>MiniJarvis · 1.º DAW · Sesión 203 · H0 — Formación y prueba de equipos Scrum mediante la torre de papel</a:t>
+              <a:t>MiniJarvis · 1.º DAW · H0.3 · H0 — Formación y prueba de equipos Scrum mediante la torre de papel</a:t>
             </a:r>
           </a:p>
         </p:txBody>
@@ -11485,7 +12759,7 @@
               </a:defRPr>
             </a:pPr>
             <a:r>
-              <a:t>•  S203 — Diseñamos el equipo que pondremos a prueba</a:t>
+              <a:t>•  H0.3 — Diseñamos el equipo que pondremos a prueba</a:t>
             </a:r>
           </a:p>
           <a:p>
@@ -11804,7 +13078,7 @@
               </a:defRPr>
             </a:pPr>
             <a:r>
-              <a:t>MiniJarvis · 1.º DAW · Sesión 203 · H0 — Formación y prueba de equipos Scrum mediante la torre de papel</a:t>
+              <a:t>MiniJarvis · 1.º DAW · H0.3 · H0 — Formación y prueba de equipos Scrum mediante la torre de papel</a:t>
             </a:r>
           </a:p>
         </p:txBody>
@@ -12720,4 +13994,324 @@
   </a:objectDefaults>
   <a:extraClrSchemeLst/>
 </a:theme>
+</file>
+
+<file path=ppt/theme/theme2.xml><?xml version="1.0" encoding="utf-8"?>
+<a:theme xmlns:a="http://schemas.openxmlformats.org/drawingml/2006/main" name="Office Theme">
+  <a:themeElements>
+    <a:clrScheme name="Office">
+      <a:dk1>
+        <a:sysClr val="windowText" lastClr="000000"/>
+      </a:dk1>
+      <a:lt1>
+        <a:sysClr val="window" lastClr="FFFFFF"/>
+      </a:lt1>
+      <a:dk2>
+        <a:srgbClr val="1F497D"/>
+      </a:dk2>
+      <a:lt2>
+        <a:srgbClr val="EEECE1"/>
+      </a:lt2>
+      <a:accent1>
+        <a:srgbClr val="4F81BD"/>
+      </a:accent1>
+      <a:accent2>
+        <a:srgbClr val="C0504D"/>
+      </a:accent2>
+      <a:accent3>
+        <a:srgbClr val="9BBB59"/>
+      </a:accent3>
+      <a:accent4>
+        <a:srgbClr val="8064A2"/>
+      </a:accent4>
+      <a:accent5>
+        <a:srgbClr val="4BACC6"/>
+      </a:accent5>
+      <a:accent6>
+        <a:srgbClr val="F79646"/>
+      </a:accent6>
+      <a:hlink>
+        <a:srgbClr val="0000FF"/>
+      </a:hlink>
+      <a:folHlink>
+        <a:srgbClr val="800080"/>
+      </a:folHlink>
+    </a:clrScheme>
+    <a:fontScheme name="Office">
+      <a:majorFont>
+        <a:latin typeface="Calibri"/>
+        <a:ea typeface=""/>
+        <a:cs typeface=""/>
+        <a:font script="Jpan" typeface="ＭＳ Ｐゴシック"/>
+        <a:font script="Hang" typeface="맑은 고딕"/>
+        <a:font script="Hans" typeface="宋体"/>
+        <a:font script="Hant" typeface="新細明體"/>
+        <a:font script="Arab" typeface="Times New Roman"/>
+        <a:font script="Hebr" typeface="Times New Roman"/>
+        <a:font script="Thai" typeface="Angsana New"/>
+        <a:font script="Ethi" typeface="Nyala"/>
+        <a:font script="Beng" typeface="Vrinda"/>
+        <a:font script="Gujr" typeface="Shruti"/>
+        <a:font script="Khmr" typeface="MoolBoran"/>
+        <a:font script="Knda" typeface="Tunga"/>
+        <a:font script="Guru" typeface="Raavi"/>
+        <a:font script="Cans" typeface="Euphemia"/>
+        <a:font script="Cher" typeface="Plantagenet Cherokee"/>
+        <a:font script="Yiii" typeface="Microsoft Yi Baiti"/>
+        <a:font script="Tibt" typeface="Microsoft Himalaya"/>
+        <a:font script="Thaa" typeface="MV Boli"/>
+        <a:font script="Deva" typeface="Mangal"/>
+        <a:font script="Telu" typeface="Gautami"/>
+        <a:font script="Taml" typeface="Latha"/>
+        <a:font script="Syrc" typeface="Estrangelo Edessa"/>
+        <a:font script="Orya" typeface="Kalinga"/>
+        <a:font script="Mlym" typeface="Kartika"/>
+        <a:font script="Laoo" typeface="DokChampa"/>
+        <a:font script="Sinh" typeface="Iskoola Pota"/>
+        <a:font script="Mong" typeface="Mongolian Baiti"/>
+        <a:font script="Viet" typeface="Times New Roman"/>
+        <a:font script="Uigh" typeface="Microsoft Uighur"/>
+        <a:font script="Geor" typeface="Sylfaen"/>
+      </a:majorFont>
+      <a:minorFont>
+        <a:latin typeface="Calibri"/>
+        <a:ea typeface=""/>
+        <a:cs typeface=""/>
+        <a:font script="Jpan" typeface="ＭＳ Ｐゴシック"/>
+        <a:font script="Hang" typeface="맑은 고딕"/>
+        <a:font script="Hans" typeface="宋体"/>
+        <a:font script="Hant" typeface="新細明體"/>
+        <a:font script="Arab" typeface="Arial"/>
+        <a:font script="Hebr" typeface="Arial"/>
+        <a:font script="Thai" typeface="Cordia New"/>
+        <a:font script="Ethi" typeface="Nyala"/>
+        <a:font script="Beng" typeface="Vrinda"/>
+        <a:font script="Gujr" typeface="Shruti"/>
+        <a:font script="Khmr" typeface="DaunPenh"/>
+        <a:font script="Knda" typeface="Tunga"/>
+        <a:font script="Guru" typeface="Raavi"/>
+        <a:font script="Cans" typeface="Euphemia"/>
+        <a:font script="Cher" typeface="Plantagenet Cherokee"/>
+        <a:font script="Yiii" typeface="Microsoft Yi Baiti"/>
+        <a:font script="Tibt" typeface="Microsoft Himalaya"/>
+        <a:font script="Thaa" typeface="MV Boli"/>
+        <a:font script="Deva" typeface="Mangal"/>
+        <a:font script="Telu" typeface="Gautami"/>
+        <a:font script="Taml" typeface="Latha"/>
+        <a:font script="Syrc" typeface="Estrangelo Edessa"/>
+        <a:font script="Orya" typeface="Kalinga"/>
+        <a:font script="Mlym" typeface="Kartika"/>
+        <a:font script="Laoo" typeface="DokChampa"/>
+        <a:font script="Sinh" typeface="Iskoola Pota"/>
+        <a:font script="Mong" typeface="Mongolian Baiti"/>
+        <a:font script="Viet" typeface="Arial"/>
+        <a:font script="Uigh" typeface="Microsoft Uighur"/>
+        <a:font script="Geor" typeface="Sylfaen"/>
+      </a:minorFont>
+    </a:fontScheme>
+    <a:fmtScheme name="Office">
+      <a:fillStyleLst>
+        <a:solidFill>
+          <a:schemeClr val="phClr"/>
+        </a:solidFill>
+        <a:gradFill rotWithShape="1">
+          <a:gsLst>
+            <a:gs pos="0">
+              <a:schemeClr val="phClr">
+                <a:tint val="50000"/>
+                <a:satMod val="300000"/>
+              </a:schemeClr>
+            </a:gs>
+            <a:gs pos="35000">
+              <a:schemeClr val="phClr">
+                <a:tint val="37000"/>
+                <a:satMod val="300000"/>
+              </a:schemeClr>
+            </a:gs>
+            <a:gs pos="100000">
+              <a:schemeClr val="phClr">
+                <a:tint val="15000"/>
+                <a:satMod val="350000"/>
+              </a:schemeClr>
+            </a:gs>
+          </a:gsLst>
+          <a:lin ang="16200000" scaled="1"/>
+        </a:gradFill>
+        <a:gradFill rotWithShape="1">
+          <a:gsLst>
+            <a:gs pos="0">
+              <a:schemeClr val="phClr">
+                <a:tint val="100000"/>
+                <a:shade val="100000"/>
+                <a:satMod val="130000"/>
+              </a:schemeClr>
+            </a:gs>
+            <a:gs pos="100000">
+              <a:schemeClr val="phClr">
+                <a:tint val="50000"/>
+                <a:shade val="100000"/>
+                <a:satMod val="350000"/>
+              </a:schemeClr>
+            </a:gs>
+          </a:gsLst>
+          <a:lin ang="16200000" scaled="0"/>
+        </a:gradFill>
+      </a:fillStyleLst>
+      <a:lnStyleLst>
+        <a:ln w="9525" cap="flat" cmpd="sng" algn="ctr">
+          <a:solidFill>
+            <a:schemeClr val="phClr">
+              <a:shade val="95000"/>
+              <a:satMod val="105000"/>
+            </a:schemeClr>
+          </a:solidFill>
+          <a:prstDash val="solid"/>
+        </a:ln>
+        <a:ln w="25400" cap="flat" cmpd="sng" algn="ctr">
+          <a:solidFill>
+            <a:schemeClr val="phClr"/>
+          </a:solidFill>
+          <a:prstDash val="solid"/>
+        </a:ln>
+        <a:ln w="38100" cap="flat" cmpd="sng" algn="ctr">
+          <a:solidFill>
+            <a:schemeClr val="phClr"/>
+          </a:solidFill>
+          <a:prstDash val="solid"/>
+        </a:ln>
+      </a:lnStyleLst>
+      <a:effectStyleLst>
+        <a:effectStyle>
+          <a:effectLst>
+            <a:outerShdw blurRad="40000" dist="20000" dir="5400000" rotWithShape="0">
+              <a:srgbClr val="000000">
+                <a:alpha val="38000"/>
+              </a:srgbClr>
+            </a:outerShdw>
+          </a:effectLst>
+        </a:effectStyle>
+        <a:effectStyle>
+          <a:effectLst>
+            <a:outerShdw blurRad="40000" dist="23000" dir="5400000" rotWithShape="0">
+              <a:srgbClr val="000000">
+                <a:alpha val="35000"/>
+              </a:srgbClr>
+            </a:outerShdw>
+          </a:effectLst>
+        </a:effectStyle>
+        <a:effectStyle>
+          <a:effectLst>
+            <a:outerShdw blurRad="40000" dist="23000" dir="5400000" rotWithShape="0">
+              <a:srgbClr val="000000">
+                <a:alpha val="35000"/>
+              </a:srgbClr>
+            </a:outerShdw>
+          </a:effectLst>
+          <a:scene3d>
+            <a:camera prst="orthographicFront">
+              <a:rot lat="0" lon="0" rev="0"/>
+            </a:camera>
+            <a:lightRig rig="threePt" dir="t">
+              <a:rot lat="0" lon="0" rev="1200000"/>
+            </a:lightRig>
+          </a:scene3d>
+          <a:sp3d>
+            <a:bevelT w="63500" h="25400"/>
+          </a:sp3d>
+        </a:effectStyle>
+      </a:effectStyleLst>
+      <a:bgFillStyleLst>
+        <a:solidFill>
+          <a:schemeClr val="phClr"/>
+        </a:solidFill>
+        <a:gradFill rotWithShape="1">
+          <a:gsLst>
+            <a:gs pos="0">
+              <a:schemeClr val="phClr">
+                <a:tint val="40000"/>
+                <a:satMod val="350000"/>
+              </a:schemeClr>
+            </a:gs>
+            <a:gs pos="40000">
+              <a:schemeClr val="phClr">
+                <a:tint val="45000"/>
+                <a:shade val="99000"/>
+                <a:satMod val="350000"/>
+              </a:schemeClr>
+            </a:gs>
+            <a:gs pos="100000">
+              <a:schemeClr val="phClr">
+                <a:shade val="20000"/>
+                <a:satMod val="255000"/>
+              </a:schemeClr>
+            </a:gs>
+          </a:gsLst>
+          <a:path path="circle">
+            <a:fillToRect l="50000" t="-80000" r="50000" b="180000"/>
+          </a:path>
+        </a:gradFill>
+        <a:gradFill rotWithShape="1">
+          <a:gsLst>
+            <a:gs pos="0">
+              <a:schemeClr val="phClr">
+                <a:tint val="80000"/>
+                <a:satMod val="300000"/>
+              </a:schemeClr>
+            </a:gs>
+            <a:gs pos="100000">
+              <a:schemeClr val="phClr">
+                <a:shade val="30000"/>
+                <a:satMod val="200000"/>
+              </a:schemeClr>
+            </a:gs>
+          </a:gsLst>
+          <a:path path="circle">
+            <a:fillToRect l="50000" t="50000" r="50000" b="50000"/>
+          </a:path>
+        </a:gradFill>
+      </a:bgFillStyleLst>
+    </a:fmtScheme>
+  </a:themeElements>
+  <a:objectDefaults>
+    <a:spDef>
+      <a:spPr/>
+      <a:bodyPr/>
+      <a:lstStyle/>
+      <a:style>
+        <a:lnRef idx="1">
+          <a:schemeClr val="accent1"/>
+        </a:lnRef>
+        <a:fillRef idx="3">
+          <a:schemeClr val="accent1"/>
+        </a:fillRef>
+        <a:effectRef idx="2">
+          <a:schemeClr val="accent1"/>
+        </a:effectRef>
+        <a:fontRef idx="minor">
+          <a:schemeClr val="lt1"/>
+        </a:fontRef>
+      </a:style>
+    </a:spDef>
+    <a:lnDef>
+      <a:spPr/>
+      <a:bodyPr/>
+      <a:lstStyle/>
+      <a:style>
+        <a:lnRef idx="2">
+          <a:schemeClr val="accent1"/>
+        </a:lnRef>
+        <a:fillRef idx="0">
+          <a:schemeClr val="accent1"/>
+        </a:fillRef>
+        <a:effectRef idx="1">
+          <a:schemeClr val="accent1"/>
+        </a:effectRef>
+        <a:fontRef idx="minor">
+          <a:schemeClr val="tx1"/>
+        </a:fontRef>
+      </a:style>
+    </a:lnDef>
+  </a:objectDefaults>
+  <a:extraClrSchemeLst/>
+</a:theme>
 </file>